--- a/docs/sop/SUCCESS-Bank-Ticketing-SOP.pptx
+++ b/docs/sop/SUCCESS-Bank-Ticketing-SOP.pptx
@@ -3996,7 +3996,7 @@
                 </a:solidFill>
                 <a:latin typeface="Calibri"/>
               </a:rPr>
-              <a:t>Version 1.0  ·  Built at commit 05e5f8f</a:t>
+              <a:t>Version 1.0  ·  Built at commit 9fe8bc4</a:t>
             </a:r>
           </a:p>
         </p:txBody>
@@ -9851,7 +9851,7 @@
         </p:nvSpPr>
         <p:spPr>
           <a:xfrm>
-            <a:off x="5692368" y="1202636"/>
+            <a:off x="6927402" y="1607286"/>
             <a:ext cx="274320" cy="274320"/>
           </a:xfrm>
           <a:prstGeom prst="ellipse">
@@ -9904,7 +9904,7 @@
         </p:nvSpPr>
         <p:spPr>
           <a:xfrm>
-            <a:off x="6927402" y="1607286"/>
+            <a:off x="1436979" y="1915267"/>
             <a:ext cx="274320" cy="274320"/>
           </a:xfrm>
           <a:prstGeom prst="ellipse">
@@ -10075,7 +10075,7 @@
                 </a:solidFill>
                 <a:latin typeface="Calibri"/>
               </a:rPr>
-              <a:t>Search and filters</a:t>
+              <a:t>New Ticket</a:t>
             </a:r>
           </a:p>
         </p:txBody>
@@ -10167,7 +10167,7 @@
                 </a:solidFill>
                 <a:latin typeface="Calibri"/>
               </a:rPr>
-              <a:t>New Ticket</a:t>
+              <a:t>Search and filters</a:t>
             </a:r>
           </a:p>
         </p:txBody>
@@ -13634,7 +13634,7 @@
         </p:nvSpPr>
         <p:spPr>
           <a:xfrm>
-            <a:off x="2703880" y="1710270"/>
+            <a:off x="5979946" y="3228803"/>
             <a:ext cx="274320" cy="274320"/>
           </a:xfrm>
           <a:prstGeom prst="ellipse">
@@ -13687,7 +13687,7 @@
         </p:nvSpPr>
         <p:spPr>
           <a:xfrm>
-            <a:off x="5769314" y="2900419"/>
+            <a:off x="5769314" y="3885085"/>
             <a:ext cx="274320" cy="274320"/>
           </a:xfrm>
           <a:prstGeom prst="ellipse">
@@ -13740,7 +13740,7 @@
         </p:nvSpPr>
         <p:spPr>
           <a:xfrm>
-            <a:off x="1523252" y="4221241"/>
+            <a:off x="1523252" y="4754137"/>
             <a:ext cx="274320" cy="274320"/>
           </a:xfrm>
           <a:prstGeom prst="ellipse">
@@ -13793,7 +13793,7 @@
         </p:nvSpPr>
         <p:spPr>
           <a:xfrm>
-            <a:off x="5769314" y="4491332"/>
+            <a:off x="5769314" y="5762120"/>
             <a:ext cx="274320" cy="274320"/>
           </a:xfrm>
           <a:prstGeom prst="ellipse">
@@ -15040,7 +15040,7 @@
         </p:nvSpPr>
         <p:spPr>
           <a:xfrm>
-            <a:off x="1523252" y="1992020"/>
+            <a:off x="1523252" y="1598056"/>
             <a:ext cx="274320" cy="274320"/>
           </a:xfrm>
           <a:prstGeom prst="ellipse">
@@ -15093,7 +15093,7 @@
         </p:nvSpPr>
         <p:spPr>
           <a:xfrm>
-            <a:off x="3015553" y="2936852"/>
+            <a:off x="3015553" y="3075784"/>
             <a:ext cx="274320" cy="274320"/>
           </a:xfrm>
           <a:prstGeom prst="ellipse">
@@ -19870,7 +19870,7 @@
         </p:nvSpPr>
         <p:spPr>
           <a:xfrm>
-            <a:off x="1528693" y="2379183"/>
+            <a:off x="1307179" y="1572310"/>
             <a:ext cx="274320" cy="274320"/>
           </a:xfrm>
           <a:prstGeom prst="ellipse">
@@ -19923,7 +19923,7 @@
         </p:nvSpPr>
         <p:spPr>
           <a:xfrm>
-            <a:off x="1307179" y="1572310"/>
+            <a:off x="7036215" y="1915267"/>
             <a:ext cx="274320" cy="274320"/>
           </a:xfrm>
           <a:prstGeom prst="ellipse">
@@ -20094,7 +20094,7 @@
                 </a:solidFill>
                 <a:latin typeface="Calibri"/>
               </a:rPr>
-              <a:t>Filter by status, priority or owner</a:t>
+              <a:t>Every ticket in your scope</a:t>
             </a:r>
           </a:p>
         </p:txBody>
@@ -20186,7 +20186,7 @@
                 </a:solidFill>
                 <a:latin typeface="Calibri"/>
               </a:rPr>
-              <a:t>Every ticket in your scope</a:t>
+              <a:t>Filter by status, priority or owner</a:t>
             </a:r>
           </a:p>
         </p:txBody>
@@ -20986,7 +20986,7 @@
         </p:nvSpPr>
         <p:spPr>
           <a:xfrm>
-            <a:off x="5739002" y="1202636"/>
+            <a:off x="6608733" y="1915267"/>
             <a:ext cx="274320" cy="274320"/>
           </a:xfrm>
           <a:prstGeom prst="ellipse">
@@ -25601,7 +25601,7 @@
         </p:nvSpPr>
         <p:spPr>
           <a:xfrm>
-            <a:off x="2316814" y="2001735"/>
+            <a:off x="444398" y="1270158"/>
             <a:ext cx="274320" cy="274320"/>
           </a:xfrm>
           <a:prstGeom prst="ellipse">
@@ -25654,7 +25654,7 @@
         </p:nvSpPr>
         <p:spPr>
           <a:xfrm>
-            <a:off x="444398" y="1270158"/>
+            <a:off x="2316814" y="2001735"/>
             <a:ext cx="274320" cy="274320"/>
           </a:xfrm>
           <a:prstGeom prst="ellipse">
@@ -25800,7 +25800,7 @@
         <p:spPr>
           <a:xfrm>
             <a:off x="8787384" y="1481328"/>
-            <a:ext cx="2962656" cy="338328"/>
+            <a:ext cx="2962656" cy="169164"/>
           </a:xfrm>
           <a:prstGeom prst="rect">
             <a:avLst/>
@@ -25825,7 +25825,7 @@
                 </a:solidFill>
                 <a:latin typeface="Calibri"/>
               </a:rPr>
-              <a:t>Breached — the number that matters most</a:t>
+              <a:t>SLA Monitor and Escalations in the menu</a:t>
             </a:r>
           </a:p>
         </p:txBody>
@@ -25838,7 +25838,7 @@
         </p:nvSpPr>
         <p:spPr>
           <a:xfrm>
-            <a:off x="8458200" y="1892808"/>
+            <a:off x="8458200" y="1723644"/>
             <a:ext cx="210312" cy="210312"/>
           </a:xfrm>
           <a:prstGeom prst="ellipse">
@@ -25891,8 +25891,8 @@
         </p:nvSpPr>
         <p:spPr>
           <a:xfrm>
-            <a:off x="8787384" y="1911096"/>
-            <a:ext cx="2962656" cy="169164"/>
+            <a:off x="8787384" y="1741932"/>
+            <a:ext cx="2962656" cy="338328"/>
           </a:xfrm>
           <a:prstGeom prst="rect">
             <a:avLst/>
@@ -25917,7 +25917,7 @@
                 </a:solidFill>
                 <a:latin typeface="Calibri"/>
               </a:rPr>
-              <a:t>SLA Monitor and Escalations in the menu</a:t>
+              <a:t>Breached — the number that matters most</a:t>
             </a:r>
           </a:p>
         </p:txBody>
@@ -34391,7 +34391,7 @@
         </p:nvSpPr>
         <p:spPr>
           <a:xfrm>
-            <a:off x="7094508" y="1607286"/>
+            <a:off x="1307179" y="1572310"/>
             <a:ext cx="274320" cy="274320"/>
           </a:xfrm>
           <a:prstGeom prst="ellipse">
@@ -34444,7 +34444,7 @@
         </p:nvSpPr>
         <p:spPr>
           <a:xfrm>
-            <a:off x="1307179" y="1572310"/>
+            <a:off x="7094508" y="1607286"/>
             <a:ext cx="274320" cy="274320"/>
           </a:xfrm>
           <a:prstGeom prst="ellipse">
@@ -34615,7 +34615,7 @@
                 </a:solidFill>
                 <a:latin typeface="Calibri"/>
               </a:rPr>
-              <a:t>Add a user</a:t>
+              <a:t>Everyone with an account</a:t>
             </a:r>
           </a:p>
         </p:txBody>
@@ -34707,7 +34707,7 @@
                 </a:solidFill>
                 <a:latin typeface="Calibri"/>
               </a:rPr>
-              <a:t>Everyone with an account</a:t>
+              <a:t>Add a user</a:t>
             </a:r>
           </a:p>
         </p:txBody>
@@ -50784,8 +50784,8 @@
         </p:nvSpPr>
         <p:spPr>
           <a:xfrm>
-            <a:off x="548640" y="1234440"/>
-            <a:ext cx="2057400" cy="786384"/>
+            <a:off x="548640" y="1207008"/>
+            <a:ext cx="2057400" cy="701040"/>
           </a:xfrm>
           <a:prstGeom prst="rect">
             <a:avLst/>
@@ -50828,16 +50828,16 @@
         </p:nvSpPr>
         <p:spPr>
           <a:xfrm>
-            <a:off x="713232" y="1490472"/>
-            <a:ext cx="1828800" cy="274320"/>
-          </a:xfrm>
-          <a:prstGeom prst="rect">
-            <a:avLst/>
-          </a:prstGeom>
-          <a:noFill/>
-        </p:spPr>
-        <p:txBody>
-          <a:bodyPr wrap="square" anchor="t" lIns="0" rIns="0" tIns="0" bIns="0">
+            <a:off x="713232" y="1207008"/>
+            <a:ext cx="1828800" cy="701040"/>
+          </a:xfrm>
+          <a:prstGeom prst="rect">
+            <a:avLst/>
+          </a:prstGeom>
+          <a:noFill/>
+        </p:spPr>
+        <p:txBody>
+          <a:bodyPr wrap="square" anchor="ctr" lIns="0" rIns="0" tIns="0" bIns="0">
             <a:spAutoFit/>
           </a:bodyPr>
           <a:lstStyle/>
@@ -50867,8 +50867,8 @@
         </p:nvSpPr>
         <p:spPr>
           <a:xfrm>
-            <a:off x="2697480" y="1234440"/>
-            <a:ext cx="8942832" cy="786384"/>
+            <a:off x="2697480" y="1207008"/>
+            <a:ext cx="8942832" cy="701040"/>
           </a:xfrm>
           <a:prstGeom prst="rect">
             <a:avLst/>
@@ -50913,16 +50913,16 @@
         </p:nvSpPr>
         <p:spPr>
           <a:xfrm>
-            <a:off x="2971800" y="1417320"/>
-            <a:ext cx="8412480" cy="548640"/>
-          </a:xfrm>
-          <a:prstGeom prst="rect">
-            <a:avLst/>
-          </a:prstGeom>
-          <a:noFill/>
-        </p:spPr>
-        <p:txBody>
-          <a:bodyPr wrap="square" anchor="t" lIns="0" rIns="0" tIns="0" bIns="0">
+            <a:off x="2971800" y="1207008"/>
+            <a:ext cx="8412480" cy="701040"/>
+          </a:xfrm>
+          <a:prstGeom prst="rect">
+            <a:avLst/>
+          </a:prstGeom>
+          <a:noFill/>
+        </p:spPr>
+        <p:txBody>
+          <a:bodyPr wrap="square" anchor="ctr" lIns="0" rIns="0" tIns="0" bIns="0">
             <a:spAutoFit/>
           </a:bodyPr>
           <a:lstStyle/>
@@ -50952,8 +50952,8 @@
         </p:nvSpPr>
         <p:spPr>
           <a:xfrm>
-            <a:off x="548640" y="2167128"/>
-            <a:ext cx="2057400" cy="786384"/>
+            <a:off x="548640" y="2054352"/>
+            <a:ext cx="2057400" cy="701040"/>
           </a:xfrm>
           <a:prstGeom prst="rect">
             <a:avLst/>
@@ -50996,16 +50996,16 @@
         </p:nvSpPr>
         <p:spPr>
           <a:xfrm>
-            <a:off x="713232" y="2423160"/>
-            <a:ext cx="1828800" cy="274320"/>
-          </a:xfrm>
-          <a:prstGeom prst="rect">
-            <a:avLst/>
-          </a:prstGeom>
-          <a:noFill/>
-        </p:spPr>
-        <p:txBody>
-          <a:bodyPr wrap="square" anchor="t" lIns="0" rIns="0" tIns="0" bIns="0">
+            <a:off x="713232" y="2054352"/>
+            <a:ext cx="1828800" cy="701040"/>
+          </a:xfrm>
+          <a:prstGeom prst="rect">
+            <a:avLst/>
+          </a:prstGeom>
+          <a:noFill/>
+        </p:spPr>
+        <p:txBody>
+          <a:bodyPr wrap="square" anchor="ctr" lIns="0" rIns="0" tIns="0" bIns="0">
             <a:spAutoFit/>
           </a:bodyPr>
           <a:lstStyle/>
@@ -51035,8 +51035,8 @@
         </p:nvSpPr>
         <p:spPr>
           <a:xfrm>
-            <a:off x="2697480" y="2167128"/>
-            <a:ext cx="8942832" cy="786384"/>
+            <a:off x="2697480" y="2054352"/>
+            <a:ext cx="8942832" cy="701040"/>
           </a:xfrm>
           <a:prstGeom prst="rect">
             <a:avLst/>
@@ -51081,16 +51081,16 @@
         </p:nvSpPr>
         <p:spPr>
           <a:xfrm>
-            <a:off x="2971800" y="2350008"/>
-            <a:ext cx="8412480" cy="548640"/>
-          </a:xfrm>
-          <a:prstGeom prst="rect">
-            <a:avLst/>
-          </a:prstGeom>
-          <a:noFill/>
-        </p:spPr>
-        <p:txBody>
-          <a:bodyPr wrap="square" anchor="t" lIns="0" rIns="0" tIns="0" bIns="0">
+            <a:off x="2971800" y="2054352"/>
+            <a:ext cx="8412480" cy="701040"/>
+          </a:xfrm>
+          <a:prstGeom prst="rect">
+            <a:avLst/>
+          </a:prstGeom>
+          <a:noFill/>
+        </p:spPr>
+        <p:txBody>
+          <a:bodyPr wrap="square" anchor="ctr" lIns="0" rIns="0" tIns="0" bIns="0">
             <a:spAutoFit/>
           </a:bodyPr>
           <a:lstStyle/>
@@ -51120,8 +51120,8 @@
         </p:nvSpPr>
         <p:spPr>
           <a:xfrm>
-            <a:off x="548640" y="3099816"/>
-            <a:ext cx="2057400" cy="786384"/>
+            <a:off x="548640" y="2901696"/>
+            <a:ext cx="2057400" cy="701040"/>
           </a:xfrm>
           <a:prstGeom prst="rect">
             <a:avLst/>
@@ -51164,16 +51164,16 @@
         </p:nvSpPr>
         <p:spPr>
           <a:xfrm>
-            <a:off x="713232" y="3355848"/>
-            <a:ext cx="1828800" cy="274320"/>
-          </a:xfrm>
-          <a:prstGeom prst="rect">
-            <a:avLst/>
-          </a:prstGeom>
-          <a:noFill/>
-        </p:spPr>
-        <p:txBody>
-          <a:bodyPr wrap="square" anchor="t" lIns="0" rIns="0" tIns="0" bIns="0">
+            <a:off x="713232" y="2901696"/>
+            <a:ext cx="1828800" cy="701040"/>
+          </a:xfrm>
+          <a:prstGeom prst="rect">
+            <a:avLst/>
+          </a:prstGeom>
+          <a:noFill/>
+        </p:spPr>
+        <p:txBody>
+          <a:bodyPr wrap="square" anchor="ctr" lIns="0" rIns="0" tIns="0" bIns="0">
             <a:spAutoFit/>
           </a:bodyPr>
           <a:lstStyle/>
@@ -51203,8 +51203,8 @@
         </p:nvSpPr>
         <p:spPr>
           <a:xfrm>
-            <a:off x="2697480" y="3099816"/>
-            <a:ext cx="8942832" cy="786384"/>
+            <a:off x="2697480" y="2901696"/>
+            <a:ext cx="8942832" cy="701040"/>
           </a:xfrm>
           <a:prstGeom prst="rect">
             <a:avLst/>
@@ -51249,16 +51249,16 @@
         </p:nvSpPr>
         <p:spPr>
           <a:xfrm>
-            <a:off x="2971800" y="3282696"/>
-            <a:ext cx="8412480" cy="548640"/>
-          </a:xfrm>
-          <a:prstGeom prst="rect">
-            <a:avLst/>
-          </a:prstGeom>
-          <a:noFill/>
-        </p:spPr>
-        <p:txBody>
-          <a:bodyPr wrap="square" anchor="t" lIns="0" rIns="0" tIns="0" bIns="0">
+            <a:off x="2971800" y="2901696"/>
+            <a:ext cx="8412480" cy="701040"/>
+          </a:xfrm>
+          <a:prstGeom prst="rect">
+            <a:avLst/>
+          </a:prstGeom>
+          <a:noFill/>
+        </p:spPr>
+        <p:txBody>
+          <a:bodyPr wrap="square" anchor="ctr" lIns="0" rIns="0" tIns="0" bIns="0">
             <a:spAutoFit/>
           </a:bodyPr>
           <a:lstStyle/>
@@ -51288,8 +51288,8 @@
         </p:nvSpPr>
         <p:spPr>
           <a:xfrm>
-            <a:off x="548640" y="4032504"/>
-            <a:ext cx="2057400" cy="786384"/>
+            <a:off x="548640" y="3749040"/>
+            <a:ext cx="2057400" cy="701040"/>
           </a:xfrm>
           <a:prstGeom prst="rect">
             <a:avLst/>
@@ -51332,16 +51332,16 @@
         </p:nvSpPr>
         <p:spPr>
           <a:xfrm>
-            <a:off x="713232" y="4288536"/>
-            <a:ext cx="1828800" cy="274320"/>
-          </a:xfrm>
-          <a:prstGeom prst="rect">
-            <a:avLst/>
-          </a:prstGeom>
-          <a:noFill/>
-        </p:spPr>
-        <p:txBody>
-          <a:bodyPr wrap="square" anchor="t" lIns="0" rIns="0" tIns="0" bIns="0">
+            <a:off x="713232" y="3749040"/>
+            <a:ext cx="1828800" cy="701040"/>
+          </a:xfrm>
+          <a:prstGeom prst="rect">
+            <a:avLst/>
+          </a:prstGeom>
+          <a:noFill/>
+        </p:spPr>
+        <p:txBody>
+          <a:bodyPr wrap="square" anchor="ctr" lIns="0" rIns="0" tIns="0" bIns="0">
             <a:spAutoFit/>
           </a:bodyPr>
           <a:lstStyle/>
@@ -51371,8 +51371,8 @@
         </p:nvSpPr>
         <p:spPr>
           <a:xfrm>
-            <a:off x="2697480" y="4032504"/>
-            <a:ext cx="8942832" cy="786384"/>
+            <a:off x="2697480" y="3749040"/>
+            <a:ext cx="8942832" cy="701040"/>
           </a:xfrm>
           <a:prstGeom prst="rect">
             <a:avLst/>
@@ -51417,16 +51417,16 @@
         </p:nvSpPr>
         <p:spPr>
           <a:xfrm>
-            <a:off x="2971800" y="4215384"/>
-            <a:ext cx="8412480" cy="548640"/>
-          </a:xfrm>
-          <a:prstGeom prst="rect">
-            <a:avLst/>
-          </a:prstGeom>
-          <a:noFill/>
-        </p:spPr>
-        <p:txBody>
-          <a:bodyPr wrap="square" anchor="t" lIns="0" rIns="0" tIns="0" bIns="0">
+            <a:off x="2971800" y="3749040"/>
+            <a:ext cx="8412480" cy="701040"/>
+          </a:xfrm>
+          <a:prstGeom prst="rect">
+            <a:avLst/>
+          </a:prstGeom>
+          <a:noFill/>
+        </p:spPr>
+        <p:txBody>
+          <a:bodyPr wrap="square" anchor="ctr" lIns="0" rIns="0" tIns="0" bIns="0">
             <a:spAutoFit/>
           </a:bodyPr>
           <a:lstStyle/>
@@ -51456,8 +51456,8 @@
         </p:nvSpPr>
         <p:spPr>
           <a:xfrm>
-            <a:off x="548640" y="4965192"/>
-            <a:ext cx="2057400" cy="786384"/>
+            <a:off x="548640" y="4596384"/>
+            <a:ext cx="2057400" cy="701040"/>
           </a:xfrm>
           <a:prstGeom prst="rect">
             <a:avLst/>
@@ -51500,16 +51500,16 @@
         </p:nvSpPr>
         <p:spPr>
           <a:xfrm>
-            <a:off x="713232" y="5221224"/>
-            <a:ext cx="1828800" cy="274320"/>
-          </a:xfrm>
-          <a:prstGeom prst="rect">
-            <a:avLst/>
-          </a:prstGeom>
-          <a:noFill/>
-        </p:spPr>
-        <p:txBody>
-          <a:bodyPr wrap="square" anchor="t" lIns="0" rIns="0" tIns="0" bIns="0">
+            <a:off x="713232" y="4596384"/>
+            <a:ext cx="1828800" cy="701040"/>
+          </a:xfrm>
+          <a:prstGeom prst="rect">
+            <a:avLst/>
+          </a:prstGeom>
+          <a:noFill/>
+        </p:spPr>
+        <p:txBody>
+          <a:bodyPr wrap="square" anchor="ctr" lIns="0" rIns="0" tIns="0" bIns="0">
             <a:spAutoFit/>
           </a:bodyPr>
           <a:lstStyle/>
@@ -51539,8 +51539,8 @@
         </p:nvSpPr>
         <p:spPr>
           <a:xfrm>
-            <a:off x="2697480" y="4965192"/>
-            <a:ext cx="8942832" cy="786384"/>
+            <a:off x="2697480" y="4596384"/>
+            <a:ext cx="8942832" cy="701040"/>
           </a:xfrm>
           <a:prstGeom prst="rect">
             <a:avLst/>
@@ -51585,16 +51585,16 @@
         </p:nvSpPr>
         <p:spPr>
           <a:xfrm>
-            <a:off x="2971800" y="5148072"/>
-            <a:ext cx="8412480" cy="548640"/>
-          </a:xfrm>
-          <a:prstGeom prst="rect">
-            <a:avLst/>
-          </a:prstGeom>
-          <a:noFill/>
-        </p:spPr>
-        <p:txBody>
-          <a:bodyPr wrap="square" anchor="t" lIns="0" rIns="0" tIns="0" bIns="0">
+            <a:off x="2971800" y="4596384"/>
+            <a:ext cx="8412480" cy="701040"/>
+          </a:xfrm>
+          <a:prstGeom prst="rect">
+            <a:avLst/>
+          </a:prstGeom>
+          <a:noFill/>
+        </p:spPr>
+        <p:txBody>
+          <a:bodyPr wrap="square" anchor="ctr" lIns="0" rIns="0" tIns="0" bIns="0">
             <a:spAutoFit/>
           </a:bodyPr>
           <a:lstStyle/>
@@ -51624,8 +51624,8 @@
         </p:nvSpPr>
         <p:spPr>
           <a:xfrm>
-            <a:off x="548640" y="5897880"/>
-            <a:ext cx="2057400" cy="786384"/>
+            <a:off x="548640" y="5443728"/>
+            <a:ext cx="2057400" cy="701040"/>
           </a:xfrm>
           <a:prstGeom prst="rect">
             <a:avLst/>
@@ -51668,16 +51668,16 @@
         </p:nvSpPr>
         <p:spPr>
           <a:xfrm>
-            <a:off x="713232" y="6153912"/>
-            <a:ext cx="1828800" cy="274320"/>
-          </a:xfrm>
-          <a:prstGeom prst="rect">
-            <a:avLst/>
-          </a:prstGeom>
-          <a:noFill/>
-        </p:spPr>
-        <p:txBody>
-          <a:bodyPr wrap="square" anchor="t" lIns="0" rIns="0" tIns="0" bIns="0">
+            <a:off x="713232" y="5443728"/>
+            <a:ext cx="1828800" cy="701040"/>
+          </a:xfrm>
+          <a:prstGeom prst="rect">
+            <a:avLst/>
+          </a:prstGeom>
+          <a:noFill/>
+        </p:spPr>
+        <p:txBody>
+          <a:bodyPr wrap="square" anchor="ctr" lIns="0" rIns="0" tIns="0" bIns="0">
             <a:spAutoFit/>
           </a:bodyPr>
           <a:lstStyle/>
@@ -51707,8 +51707,8 @@
         </p:nvSpPr>
         <p:spPr>
           <a:xfrm>
-            <a:off x="2697480" y="5897880"/>
-            <a:ext cx="8942832" cy="786384"/>
+            <a:off x="2697480" y="5443728"/>
+            <a:ext cx="8942832" cy="701040"/>
           </a:xfrm>
           <a:prstGeom prst="rect">
             <a:avLst/>
@@ -51753,16 +51753,16 @@
         </p:nvSpPr>
         <p:spPr>
           <a:xfrm>
-            <a:off x="2971800" y="6080760"/>
-            <a:ext cx="8412480" cy="548640"/>
-          </a:xfrm>
-          <a:prstGeom prst="rect">
-            <a:avLst/>
-          </a:prstGeom>
-          <a:noFill/>
-        </p:spPr>
-        <p:txBody>
-          <a:bodyPr wrap="square" anchor="t" lIns="0" rIns="0" tIns="0" bIns="0">
+            <a:off x="2971800" y="5443728"/>
+            <a:ext cx="8412480" cy="701040"/>
+          </a:xfrm>
+          <a:prstGeom prst="rect">
+            <a:avLst/>
+          </a:prstGeom>
+          <a:noFill/>
+        </p:spPr>
+        <p:txBody>
+          <a:bodyPr wrap="square" anchor="ctr" lIns="0" rIns="0" tIns="0" bIns="0">
             <a:spAutoFit/>
           </a:bodyPr>
           <a:lstStyle/>
@@ -52062,7 +52062,7 @@
         </p:nvSpPr>
         <p:spPr>
           <a:xfrm>
-            <a:off x="548640" y="1234440"/>
+            <a:off x="548640" y="1207008"/>
             <a:ext cx="2057400" cy="786384"/>
           </a:xfrm>
           <a:prstGeom prst="rect">
@@ -52106,16 +52106,16 @@
         </p:nvSpPr>
         <p:spPr>
           <a:xfrm>
-            <a:off x="713232" y="1490472"/>
-            <a:ext cx="1828800" cy="274320"/>
-          </a:xfrm>
-          <a:prstGeom prst="rect">
-            <a:avLst/>
-          </a:prstGeom>
-          <a:noFill/>
-        </p:spPr>
-        <p:txBody>
-          <a:bodyPr wrap="square" anchor="t" lIns="0" rIns="0" tIns="0" bIns="0">
+            <a:off x="713232" y="1207008"/>
+            <a:ext cx="1828800" cy="786384"/>
+          </a:xfrm>
+          <a:prstGeom prst="rect">
+            <a:avLst/>
+          </a:prstGeom>
+          <a:noFill/>
+        </p:spPr>
+        <p:txBody>
+          <a:bodyPr wrap="square" anchor="ctr" lIns="0" rIns="0" tIns="0" bIns="0">
             <a:spAutoFit/>
           </a:bodyPr>
           <a:lstStyle/>
@@ -52145,7 +52145,7 @@
         </p:nvSpPr>
         <p:spPr>
           <a:xfrm>
-            <a:off x="2697480" y="1234440"/>
+            <a:off x="2697480" y="1207008"/>
             <a:ext cx="8942832" cy="786384"/>
           </a:xfrm>
           <a:prstGeom prst="rect">
@@ -52191,16 +52191,16 @@
         </p:nvSpPr>
         <p:spPr>
           <a:xfrm>
-            <a:off x="2971800" y="1417320"/>
-            <a:ext cx="8412480" cy="548640"/>
-          </a:xfrm>
-          <a:prstGeom prst="rect">
-            <a:avLst/>
-          </a:prstGeom>
-          <a:noFill/>
-        </p:spPr>
-        <p:txBody>
-          <a:bodyPr wrap="square" anchor="t" lIns="0" rIns="0" tIns="0" bIns="0">
+            <a:off x="2971800" y="1207008"/>
+            <a:ext cx="8412480" cy="786384"/>
+          </a:xfrm>
+          <a:prstGeom prst="rect">
+            <a:avLst/>
+          </a:prstGeom>
+          <a:noFill/>
+        </p:spPr>
+        <p:txBody>
+          <a:bodyPr wrap="square" anchor="ctr" lIns="0" rIns="0" tIns="0" bIns="0">
             <a:spAutoFit/>
           </a:bodyPr>
           <a:lstStyle/>
@@ -52230,7 +52230,7 @@
         </p:nvSpPr>
         <p:spPr>
           <a:xfrm>
-            <a:off x="548640" y="2167128"/>
+            <a:off x="548640" y="2139696"/>
             <a:ext cx="2057400" cy="786384"/>
           </a:xfrm>
           <a:prstGeom prst="rect">
@@ -52274,16 +52274,16 @@
         </p:nvSpPr>
         <p:spPr>
           <a:xfrm>
-            <a:off x="713232" y="2423160"/>
-            <a:ext cx="1828800" cy="274320"/>
-          </a:xfrm>
-          <a:prstGeom prst="rect">
-            <a:avLst/>
-          </a:prstGeom>
-          <a:noFill/>
-        </p:spPr>
-        <p:txBody>
-          <a:bodyPr wrap="square" anchor="t" lIns="0" rIns="0" tIns="0" bIns="0">
+            <a:off x="713232" y="2139696"/>
+            <a:ext cx="1828800" cy="786384"/>
+          </a:xfrm>
+          <a:prstGeom prst="rect">
+            <a:avLst/>
+          </a:prstGeom>
+          <a:noFill/>
+        </p:spPr>
+        <p:txBody>
+          <a:bodyPr wrap="square" anchor="ctr" lIns="0" rIns="0" tIns="0" bIns="0">
             <a:spAutoFit/>
           </a:bodyPr>
           <a:lstStyle/>
@@ -52313,7 +52313,7 @@
         </p:nvSpPr>
         <p:spPr>
           <a:xfrm>
-            <a:off x="2697480" y="2167128"/>
+            <a:off x="2697480" y="2139696"/>
             <a:ext cx="8942832" cy="786384"/>
           </a:xfrm>
           <a:prstGeom prst="rect">
@@ -52359,16 +52359,16 @@
         </p:nvSpPr>
         <p:spPr>
           <a:xfrm>
-            <a:off x="2971800" y="2350008"/>
-            <a:ext cx="8412480" cy="548640"/>
-          </a:xfrm>
-          <a:prstGeom prst="rect">
-            <a:avLst/>
-          </a:prstGeom>
-          <a:noFill/>
-        </p:spPr>
-        <p:txBody>
-          <a:bodyPr wrap="square" anchor="t" lIns="0" rIns="0" tIns="0" bIns="0">
+            <a:off x="2971800" y="2139696"/>
+            <a:ext cx="8412480" cy="786384"/>
+          </a:xfrm>
+          <a:prstGeom prst="rect">
+            <a:avLst/>
+          </a:prstGeom>
+          <a:noFill/>
+        </p:spPr>
+        <p:txBody>
+          <a:bodyPr wrap="square" anchor="ctr" lIns="0" rIns="0" tIns="0" bIns="0">
             <a:spAutoFit/>
           </a:bodyPr>
           <a:lstStyle/>
@@ -52398,7 +52398,7 @@
         </p:nvSpPr>
         <p:spPr>
           <a:xfrm>
-            <a:off x="548640" y="3099816"/>
+            <a:off x="548640" y="3072384"/>
             <a:ext cx="2057400" cy="786384"/>
           </a:xfrm>
           <a:prstGeom prst="rect">
@@ -52442,16 +52442,16 @@
         </p:nvSpPr>
         <p:spPr>
           <a:xfrm>
-            <a:off x="713232" y="3355848"/>
-            <a:ext cx="1828800" cy="274320"/>
-          </a:xfrm>
-          <a:prstGeom prst="rect">
-            <a:avLst/>
-          </a:prstGeom>
-          <a:noFill/>
-        </p:spPr>
-        <p:txBody>
-          <a:bodyPr wrap="square" anchor="t" lIns="0" rIns="0" tIns="0" bIns="0">
+            <a:off x="713232" y="3072384"/>
+            <a:ext cx="1828800" cy="786384"/>
+          </a:xfrm>
+          <a:prstGeom prst="rect">
+            <a:avLst/>
+          </a:prstGeom>
+          <a:noFill/>
+        </p:spPr>
+        <p:txBody>
+          <a:bodyPr wrap="square" anchor="ctr" lIns="0" rIns="0" tIns="0" bIns="0">
             <a:spAutoFit/>
           </a:bodyPr>
           <a:lstStyle/>
@@ -52481,7 +52481,7 @@
         </p:nvSpPr>
         <p:spPr>
           <a:xfrm>
-            <a:off x="2697480" y="3099816"/>
+            <a:off x="2697480" y="3072384"/>
             <a:ext cx="8942832" cy="786384"/>
           </a:xfrm>
           <a:prstGeom prst="rect">
@@ -52527,16 +52527,16 @@
         </p:nvSpPr>
         <p:spPr>
           <a:xfrm>
-            <a:off x="2971800" y="3282696"/>
-            <a:ext cx="8412480" cy="548640"/>
-          </a:xfrm>
-          <a:prstGeom prst="rect">
-            <a:avLst/>
-          </a:prstGeom>
-          <a:noFill/>
-        </p:spPr>
-        <p:txBody>
-          <a:bodyPr wrap="square" anchor="t" lIns="0" rIns="0" tIns="0" bIns="0">
+            <a:off x="2971800" y="3072384"/>
+            <a:ext cx="8412480" cy="786384"/>
+          </a:xfrm>
+          <a:prstGeom prst="rect">
+            <a:avLst/>
+          </a:prstGeom>
+          <a:noFill/>
+        </p:spPr>
+        <p:txBody>
+          <a:bodyPr wrap="square" anchor="ctr" lIns="0" rIns="0" tIns="0" bIns="0">
             <a:spAutoFit/>
           </a:bodyPr>
           <a:lstStyle/>
@@ -52566,7 +52566,7 @@
         </p:nvSpPr>
         <p:spPr>
           <a:xfrm>
-            <a:off x="548640" y="4032504"/>
+            <a:off x="548640" y="4005072"/>
             <a:ext cx="2057400" cy="786384"/>
           </a:xfrm>
           <a:prstGeom prst="rect">
@@ -52610,16 +52610,16 @@
         </p:nvSpPr>
         <p:spPr>
           <a:xfrm>
-            <a:off x="713232" y="4288536"/>
-            <a:ext cx="1828800" cy="274320"/>
-          </a:xfrm>
-          <a:prstGeom prst="rect">
-            <a:avLst/>
-          </a:prstGeom>
-          <a:noFill/>
-        </p:spPr>
-        <p:txBody>
-          <a:bodyPr wrap="square" anchor="t" lIns="0" rIns="0" tIns="0" bIns="0">
+            <a:off x="713232" y="4005072"/>
+            <a:ext cx="1828800" cy="786384"/>
+          </a:xfrm>
+          <a:prstGeom prst="rect">
+            <a:avLst/>
+          </a:prstGeom>
+          <a:noFill/>
+        </p:spPr>
+        <p:txBody>
+          <a:bodyPr wrap="square" anchor="ctr" lIns="0" rIns="0" tIns="0" bIns="0">
             <a:spAutoFit/>
           </a:bodyPr>
           <a:lstStyle/>
@@ -52649,7 +52649,7 @@
         </p:nvSpPr>
         <p:spPr>
           <a:xfrm>
-            <a:off x="2697480" y="4032504"/>
+            <a:off x="2697480" y="4005072"/>
             <a:ext cx="8942832" cy="786384"/>
           </a:xfrm>
           <a:prstGeom prst="rect">
@@ -52695,16 +52695,16 @@
         </p:nvSpPr>
         <p:spPr>
           <a:xfrm>
-            <a:off x="2971800" y="4215384"/>
-            <a:ext cx="8412480" cy="548640"/>
-          </a:xfrm>
-          <a:prstGeom prst="rect">
-            <a:avLst/>
-          </a:prstGeom>
-          <a:noFill/>
-        </p:spPr>
-        <p:txBody>
-          <a:bodyPr wrap="square" anchor="t" lIns="0" rIns="0" tIns="0" bIns="0">
+            <a:off x="2971800" y="4005072"/>
+            <a:ext cx="8412480" cy="786384"/>
+          </a:xfrm>
+          <a:prstGeom prst="rect">
+            <a:avLst/>
+          </a:prstGeom>
+          <a:noFill/>
+        </p:spPr>
+        <p:txBody>
+          <a:bodyPr wrap="square" anchor="ctr" lIns="0" rIns="0" tIns="0" bIns="0">
             <a:spAutoFit/>
           </a:bodyPr>
           <a:lstStyle/>
@@ -52734,7 +52734,7 @@
         </p:nvSpPr>
         <p:spPr>
           <a:xfrm>
-            <a:off x="548640" y="4965192"/>
+            <a:off x="548640" y="4937760"/>
             <a:ext cx="2057400" cy="786384"/>
           </a:xfrm>
           <a:prstGeom prst="rect">
@@ -52778,16 +52778,16 @@
         </p:nvSpPr>
         <p:spPr>
           <a:xfrm>
-            <a:off x="713232" y="5221224"/>
-            <a:ext cx="1828800" cy="274320"/>
-          </a:xfrm>
-          <a:prstGeom prst="rect">
-            <a:avLst/>
-          </a:prstGeom>
-          <a:noFill/>
-        </p:spPr>
-        <p:txBody>
-          <a:bodyPr wrap="square" anchor="t" lIns="0" rIns="0" tIns="0" bIns="0">
+            <a:off x="713232" y="4937760"/>
+            <a:ext cx="1828800" cy="786384"/>
+          </a:xfrm>
+          <a:prstGeom prst="rect">
+            <a:avLst/>
+          </a:prstGeom>
+          <a:noFill/>
+        </p:spPr>
+        <p:txBody>
+          <a:bodyPr wrap="square" anchor="ctr" lIns="0" rIns="0" tIns="0" bIns="0">
             <a:spAutoFit/>
           </a:bodyPr>
           <a:lstStyle/>
@@ -52817,7 +52817,7 @@
         </p:nvSpPr>
         <p:spPr>
           <a:xfrm>
-            <a:off x="2697480" y="4965192"/>
+            <a:off x="2697480" y="4937760"/>
             <a:ext cx="8942832" cy="786384"/>
           </a:xfrm>
           <a:prstGeom prst="rect">
@@ -52863,16 +52863,16 @@
         </p:nvSpPr>
         <p:spPr>
           <a:xfrm>
-            <a:off x="2971800" y="5148072"/>
-            <a:ext cx="8412480" cy="548640"/>
-          </a:xfrm>
-          <a:prstGeom prst="rect">
-            <a:avLst/>
-          </a:prstGeom>
-          <a:noFill/>
-        </p:spPr>
-        <p:txBody>
-          <a:bodyPr wrap="square" anchor="t" lIns="0" rIns="0" tIns="0" bIns="0">
+            <a:off x="2971800" y="4937760"/>
+            <a:ext cx="8412480" cy="786384"/>
+          </a:xfrm>
+          <a:prstGeom prst="rect">
+            <a:avLst/>
+          </a:prstGeom>
+          <a:noFill/>
+        </p:spPr>
+        <p:txBody>
+          <a:bodyPr wrap="square" anchor="ctr" lIns="0" rIns="0" tIns="0" bIns="0">
             <a:spAutoFit/>
           </a:bodyPr>
           <a:lstStyle/>
@@ -53172,7 +53172,7 @@
         </p:nvSpPr>
         <p:spPr>
           <a:xfrm>
-            <a:off x="548640" y="1234440"/>
+            <a:off x="548640" y="1207008"/>
             <a:ext cx="2057400" cy="786384"/>
           </a:xfrm>
           <a:prstGeom prst="rect">
@@ -53216,16 +53216,16 @@
         </p:nvSpPr>
         <p:spPr>
           <a:xfrm>
-            <a:off x="713232" y="1490472"/>
-            <a:ext cx="1828800" cy="274320"/>
-          </a:xfrm>
-          <a:prstGeom prst="rect">
-            <a:avLst/>
-          </a:prstGeom>
-          <a:noFill/>
-        </p:spPr>
-        <p:txBody>
-          <a:bodyPr wrap="square" anchor="t" lIns="0" rIns="0" tIns="0" bIns="0">
+            <a:off x="713232" y="1207008"/>
+            <a:ext cx="1828800" cy="786384"/>
+          </a:xfrm>
+          <a:prstGeom prst="rect">
+            <a:avLst/>
+          </a:prstGeom>
+          <a:noFill/>
+        </p:spPr>
+        <p:txBody>
+          <a:bodyPr wrap="square" anchor="ctr" lIns="0" rIns="0" tIns="0" bIns="0">
             <a:spAutoFit/>
           </a:bodyPr>
           <a:lstStyle/>
@@ -53255,7 +53255,7 @@
         </p:nvSpPr>
         <p:spPr>
           <a:xfrm>
-            <a:off x="2697480" y="1234440"/>
+            <a:off x="2697480" y="1207008"/>
             <a:ext cx="8942832" cy="786384"/>
           </a:xfrm>
           <a:prstGeom prst="rect">
@@ -53301,16 +53301,16 @@
         </p:nvSpPr>
         <p:spPr>
           <a:xfrm>
-            <a:off x="2971800" y="1417320"/>
-            <a:ext cx="8412480" cy="548640"/>
-          </a:xfrm>
-          <a:prstGeom prst="rect">
-            <a:avLst/>
-          </a:prstGeom>
-          <a:noFill/>
-        </p:spPr>
-        <p:txBody>
-          <a:bodyPr wrap="square" anchor="t" lIns="0" rIns="0" tIns="0" bIns="0">
+            <a:off x="2971800" y="1207008"/>
+            <a:ext cx="8412480" cy="786384"/>
+          </a:xfrm>
+          <a:prstGeom prst="rect">
+            <a:avLst/>
+          </a:prstGeom>
+          <a:noFill/>
+        </p:spPr>
+        <p:txBody>
+          <a:bodyPr wrap="square" anchor="ctr" lIns="0" rIns="0" tIns="0" bIns="0">
             <a:spAutoFit/>
           </a:bodyPr>
           <a:lstStyle/>
@@ -53340,7 +53340,7 @@
         </p:nvSpPr>
         <p:spPr>
           <a:xfrm>
-            <a:off x="548640" y="2167128"/>
+            <a:off x="548640" y="2139696"/>
             <a:ext cx="2057400" cy="786384"/>
           </a:xfrm>
           <a:prstGeom prst="rect">
@@ -53384,16 +53384,16 @@
         </p:nvSpPr>
         <p:spPr>
           <a:xfrm>
-            <a:off x="713232" y="2423160"/>
-            <a:ext cx="1828800" cy="274320"/>
-          </a:xfrm>
-          <a:prstGeom prst="rect">
-            <a:avLst/>
-          </a:prstGeom>
-          <a:noFill/>
-        </p:spPr>
-        <p:txBody>
-          <a:bodyPr wrap="square" anchor="t" lIns="0" rIns="0" tIns="0" bIns="0">
+            <a:off x="713232" y="2139696"/>
+            <a:ext cx="1828800" cy="786384"/>
+          </a:xfrm>
+          <a:prstGeom prst="rect">
+            <a:avLst/>
+          </a:prstGeom>
+          <a:noFill/>
+        </p:spPr>
+        <p:txBody>
+          <a:bodyPr wrap="square" anchor="ctr" lIns="0" rIns="0" tIns="0" bIns="0">
             <a:spAutoFit/>
           </a:bodyPr>
           <a:lstStyle/>
@@ -53423,7 +53423,7 @@
         </p:nvSpPr>
         <p:spPr>
           <a:xfrm>
-            <a:off x="2697480" y="2167128"/>
+            <a:off x="2697480" y="2139696"/>
             <a:ext cx="8942832" cy="786384"/>
           </a:xfrm>
           <a:prstGeom prst="rect">
@@ -53469,16 +53469,16 @@
         </p:nvSpPr>
         <p:spPr>
           <a:xfrm>
-            <a:off x="2971800" y="2350008"/>
-            <a:ext cx="8412480" cy="548640"/>
-          </a:xfrm>
-          <a:prstGeom prst="rect">
-            <a:avLst/>
-          </a:prstGeom>
-          <a:noFill/>
-        </p:spPr>
-        <p:txBody>
-          <a:bodyPr wrap="square" anchor="t" lIns="0" rIns="0" tIns="0" bIns="0">
+            <a:off x="2971800" y="2139696"/>
+            <a:ext cx="8412480" cy="786384"/>
+          </a:xfrm>
+          <a:prstGeom prst="rect">
+            <a:avLst/>
+          </a:prstGeom>
+          <a:noFill/>
+        </p:spPr>
+        <p:txBody>
+          <a:bodyPr wrap="square" anchor="ctr" lIns="0" rIns="0" tIns="0" bIns="0">
             <a:spAutoFit/>
           </a:bodyPr>
           <a:lstStyle/>
@@ -53508,7 +53508,7 @@
         </p:nvSpPr>
         <p:spPr>
           <a:xfrm>
-            <a:off x="548640" y="3099816"/>
+            <a:off x="548640" y="3072384"/>
             <a:ext cx="2057400" cy="786384"/>
           </a:xfrm>
           <a:prstGeom prst="rect">
@@ -53552,16 +53552,16 @@
         </p:nvSpPr>
         <p:spPr>
           <a:xfrm>
-            <a:off x="713232" y="3355848"/>
-            <a:ext cx="1828800" cy="274320"/>
-          </a:xfrm>
-          <a:prstGeom prst="rect">
-            <a:avLst/>
-          </a:prstGeom>
-          <a:noFill/>
-        </p:spPr>
-        <p:txBody>
-          <a:bodyPr wrap="square" anchor="t" lIns="0" rIns="0" tIns="0" bIns="0">
+            <a:off x="713232" y="3072384"/>
+            <a:ext cx="1828800" cy="786384"/>
+          </a:xfrm>
+          <a:prstGeom prst="rect">
+            <a:avLst/>
+          </a:prstGeom>
+          <a:noFill/>
+        </p:spPr>
+        <p:txBody>
+          <a:bodyPr wrap="square" anchor="ctr" lIns="0" rIns="0" tIns="0" bIns="0">
             <a:spAutoFit/>
           </a:bodyPr>
           <a:lstStyle/>
@@ -53591,7 +53591,7 @@
         </p:nvSpPr>
         <p:spPr>
           <a:xfrm>
-            <a:off x="2697480" y="3099816"/>
+            <a:off x="2697480" y="3072384"/>
             <a:ext cx="8942832" cy="786384"/>
           </a:xfrm>
           <a:prstGeom prst="rect">
@@ -53637,16 +53637,16 @@
         </p:nvSpPr>
         <p:spPr>
           <a:xfrm>
-            <a:off x="2971800" y="3282696"/>
-            <a:ext cx="8412480" cy="548640"/>
-          </a:xfrm>
-          <a:prstGeom prst="rect">
-            <a:avLst/>
-          </a:prstGeom>
-          <a:noFill/>
-        </p:spPr>
-        <p:txBody>
-          <a:bodyPr wrap="square" anchor="t" lIns="0" rIns="0" tIns="0" bIns="0">
+            <a:off x="2971800" y="3072384"/>
+            <a:ext cx="8412480" cy="786384"/>
+          </a:xfrm>
+          <a:prstGeom prst="rect">
+            <a:avLst/>
+          </a:prstGeom>
+          <a:noFill/>
+        </p:spPr>
+        <p:txBody>
+          <a:bodyPr wrap="square" anchor="ctr" lIns="0" rIns="0" tIns="0" bIns="0">
             <a:spAutoFit/>
           </a:bodyPr>
           <a:lstStyle/>
@@ -53676,7 +53676,7 @@
         </p:nvSpPr>
         <p:spPr>
           <a:xfrm>
-            <a:off x="548640" y="4032504"/>
+            <a:off x="548640" y="4005072"/>
             <a:ext cx="2057400" cy="786384"/>
           </a:xfrm>
           <a:prstGeom prst="rect">
@@ -53720,16 +53720,16 @@
         </p:nvSpPr>
         <p:spPr>
           <a:xfrm>
-            <a:off x="713232" y="4288536"/>
-            <a:ext cx="1828800" cy="274320"/>
-          </a:xfrm>
-          <a:prstGeom prst="rect">
-            <a:avLst/>
-          </a:prstGeom>
-          <a:noFill/>
-        </p:spPr>
-        <p:txBody>
-          <a:bodyPr wrap="square" anchor="t" lIns="0" rIns="0" tIns="0" bIns="0">
+            <a:off x="713232" y="4005072"/>
+            <a:ext cx="1828800" cy="786384"/>
+          </a:xfrm>
+          <a:prstGeom prst="rect">
+            <a:avLst/>
+          </a:prstGeom>
+          <a:noFill/>
+        </p:spPr>
+        <p:txBody>
+          <a:bodyPr wrap="square" anchor="ctr" lIns="0" rIns="0" tIns="0" bIns="0">
             <a:spAutoFit/>
           </a:bodyPr>
           <a:lstStyle/>
@@ -53759,7 +53759,7 @@
         </p:nvSpPr>
         <p:spPr>
           <a:xfrm>
-            <a:off x="2697480" y="4032504"/>
+            <a:off x="2697480" y="4005072"/>
             <a:ext cx="8942832" cy="786384"/>
           </a:xfrm>
           <a:prstGeom prst="rect">
@@ -53805,16 +53805,16 @@
         </p:nvSpPr>
         <p:spPr>
           <a:xfrm>
-            <a:off x="2971800" y="4215384"/>
-            <a:ext cx="8412480" cy="548640"/>
-          </a:xfrm>
-          <a:prstGeom prst="rect">
-            <a:avLst/>
-          </a:prstGeom>
-          <a:noFill/>
-        </p:spPr>
-        <p:txBody>
-          <a:bodyPr wrap="square" anchor="t" lIns="0" rIns="0" tIns="0" bIns="0">
+            <a:off x="2971800" y="4005072"/>
+            <a:ext cx="8412480" cy="786384"/>
+          </a:xfrm>
+          <a:prstGeom prst="rect">
+            <a:avLst/>
+          </a:prstGeom>
+          <a:noFill/>
+        </p:spPr>
+        <p:txBody>
+          <a:bodyPr wrap="square" anchor="ctr" lIns="0" rIns="0" tIns="0" bIns="0">
             <a:spAutoFit/>
           </a:bodyPr>
           <a:lstStyle/>
@@ -53844,7 +53844,7 @@
         </p:nvSpPr>
         <p:spPr>
           <a:xfrm>
-            <a:off x="548640" y="4965192"/>
+            <a:off x="548640" y="4937760"/>
             <a:ext cx="2057400" cy="786384"/>
           </a:xfrm>
           <a:prstGeom prst="rect">
@@ -53888,16 +53888,16 @@
         </p:nvSpPr>
         <p:spPr>
           <a:xfrm>
-            <a:off x="713232" y="5221224"/>
-            <a:ext cx="1828800" cy="274320"/>
-          </a:xfrm>
-          <a:prstGeom prst="rect">
-            <a:avLst/>
-          </a:prstGeom>
-          <a:noFill/>
-        </p:spPr>
-        <p:txBody>
-          <a:bodyPr wrap="square" anchor="t" lIns="0" rIns="0" tIns="0" bIns="0">
+            <a:off x="713232" y="4937760"/>
+            <a:ext cx="1828800" cy="786384"/>
+          </a:xfrm>
+          <a:prstGeom prst="rect">
+            <a:avLst/>
+          </a:prstGeom>
+          <a:noFill/>
+        </p:spPr>
+        <p:txBody>
+          <a:bodyPr wrap="square" anchor="ctr" lIns="0" rIns="0" tIns="0" bIns="0">
             <a:spAutoFit/>
           </a:bodyPr>
           <a:lstStyle/>
@@ -53927,7 +53927,7 @@
         </p:nvSpPr>
         <p:spPr>
           <a:xfrm>
-            <a:off x="2697480" y="4965192"/>
+            <a:off x="2697480" y="4937760"/>
             <a:ext cx="8942832" cy="786384"/>
           </a:xfrm>
           <a:prstGeom prst="rect">
@@ -53973,16 +53973,16 @@
         </p:nvSpPr>
         <p:spPr>
           <a:xfrm>
-            <a:off x="2971800" y="5148072"/>
-            <a:ext cx="8412480" cy="548640"/>
-          </a:xfrm>
-          <a:prstGeom prst="rect">
-            <a:avLst/>
-          </a:prstGeom>
-          <a:noFill/>
-        </p:spPr>
-        <p:txBody>
-          <a:bodyPr wrap="square" anchor="t" lIns="0" rIns="0" tIns="0" bIns="0">
+            <a:off x="2971800" y="4937760"/>
+            <a:ext cx="8412480" cy="786384"/>
+          </a:xfrm>
+          <a:prstGeom prst="rect">
+            <a:avLst/>
+          </a:prstGeom>
+          <a:noFill/>
+        </p:spPr>
+        <p:txBody>
+          <a:bodyPr wrap="square" anchor="ctr" lIns="0" rIns="0" tIns="0" bIns="0">
             <a:spAutoFit/>
           </a:bodyPr>
           <a:lstStyle/>
@@ -54282,7 +54282,7 @@
         </p:nvSpPr>
         <p:spPr>
           <a:xfrm>
-            <a:off x="548640" y="1234440"/>
+            <a:off x="548640" y="1207008"/>
             <a:ext cx="2057400" cy="786384"/>
           </a:xfrm>
           <a:prstGeom prst="rect">
@@ -54326,16 +54326,16 @@
         </p:nvSpPr>
         <p:spPr>
           <a:xfrm>
-            <a:off x="713232" y="1490472"/>
-            <a:ext cx="1828800" cy="274320"/>
-          </a:xfrm>
-          <a:prstGeom prst="rect">
-            <a:avLst/>
-          </a:prstGeom>
-          <a:noFill/>
-        </p:spPr>
-        <p:txBody>
-          <a:bodyPr wrap="square" anchor="t" lIns="0" rIns="0" tIns="0" bIns="0">
+            <a:off x="713232" y="1207008"/>
+            <a:ext cx="1828800" cy="786384"/>
+          </a:xfrm>
+          <a:prstGeom prst="rect">
+            <a:avLst/>
+          </a:prstGeom>
+          <a:noFill/>
+        </p:spPr>
+        <p:txBody>
+          <a:bodyPr wrap="square" anchor="ctr" lIns="0" rIns="0" tIns="0" bIns="0">
             <a:spAutoFit/>
           </a:bodyPr>
           <a:lstStyle/>
@@ -54365,7 +54365,7 @@
         </p:nvSpPr>
         <p:spPr>
           <a:xfrm>
-            <a:off x="2697480" y="1234440"/>
+            <a:off x="2697480" y="1207008"/>
             <a:ext cx="8942832" cy="786384"/>
           </a:xfrm>
           <a:prstGeom prst="rect">
@@ -54411,16 +54411,16 @@
         </p:nvSpPr>
         <p:spPr>
           <a:xfrm>
-            <a:off x="2971800" y="1417320"/>
-            <a:ext cx="8412480" cy="548640"/>
-          </a:xfrm>
-          <a:prstGeom prst="rect">
-            <a:avLst/>
-          </a:prstGeom>
-          <a:noFill/>
-        </p:spPr>
-        <p:txBody>
-          <a:bodyPr wrap="square" anchor="t" lIns="0" rIns="0" tIns="0" bIns="0">
+            <a:off x="2971800" y="1207008"/>
+            <a:ext cx="8412480" cy="786384"/>
+          </a:xfrm>
+          <a:prstGeom prst="rect">
+            <a:avLst/>
+          </a:prstGeom>
+          <a:noFill/>
+        </p:spPr>
+        <p:txBody>
+          <a:bodyPr wrap="square" anchor="ctr" lIns="0" rIns="0" tIns="0" bIns="0">
             <a:spAutoFit/>
           </a:bodyPr>
           <a:lstStyle/>
@@ -54450,7 +54450,7 @@
         </p:nvSpPr>
         <p:spPr>
           <a:xfrm>
-            <a:off x="548640" y="2167128"/>
+            <a:off x="548640" y="2139696"/>
             <a:ext cx="2057400" cy="786384"/>
           </a:xfrm>
           <a:prstGeom prst="rect">
@@ -54494,16 +54494,16 @@
         </p:nvSpPr>
         <p:spPr>
           <a:xfrm>
-            <a:off x="713232" y="2423160"/>
-            <a:ext cx="1828800" cy="274320"/>
-          </a:xfrm>
-          <a:prstGeom prst="rect">
-            <a:avLst/>
-          </a:prstGeom>
-          <a:noFill/>
-        </p:spPr>
-        <p:txBody>
-          <a:bodyPr wrap="square" anchor="t" lIns="0" rIns="0" tIns="0" bIns="0">
+            <a:off x="713232" y="2139696"/>
+            <a:ext cx="1828800" cy="786384"/>
+          </a:xfrm>
+          <a:prstGeom prst="rect">
+            <a:avLst/>
+          </a:prstGeom>
+          <a:noFill/>
+        </p:spPr>
+        <p:txBody>
+          <a:bodyPr wrap="square" anchor="ctr" lIns="0" rIns="0" tIns="0" bIns="0">
             <a:spAutoFit/>
           </a:bodyPr>
           <a:lstStyle/>
@@ -54533,7 +54533,7 @@
         </p:nvSpPr>
         <p:spPr>
           <a:xfrm>
-            <a:off x="2697480" y="2167128"/>
+            <a:off x="2697480" y="2139696"/>
             <a:ext cx="8942832" cy="786384"/>
           </a:xfrm>
           <a:prstGeom prst="rect">
@@ -54579,16 +54579,16 @@
         </p:nvSpPr>
         <p:spPr>
           <a:xfrm>
-            <a:off x="2971800" y="2350008"/>
-            <a:ext cx="8412480" cy="548640"/>
-          </a:xfrm>
-          <a:prstGeom prst="rect">
-            <a:avLst/>
-          </a:prstGeom>
-          <a:noFill/>
-        </p:spPr>
-        <p:txBody>
-          <a:bodyPr wrap="square" anchor="t" lIns="0" rIns="0" tIns="0" bIns="0">
+            <a:off x="2971800" y="2139696"/>
+            <a:ext cx="8412480" cy="786384"/>
+          </a:xfrm>
+          <a:prstGeom prst="rect">
+            <a:avLst/>
+          </a:prstGeom>
+          <a:noFill/>
+        </p:spPr>
+        <p:txBody>
+          <a:bodyPr wrap="square" anchor="ctr" lIns="0" rIns="0" tIns="0" bIns="0">
             <a:spAutoFit/>
           </a:bodyPr>
           <a:lstStyle/>
@@ -54618,7 +54618,7 @@
         </p:nvSpPr>
         <p:spPr>
           <a:xfrm>
-            <a:off x="548640" y="3099816"/>
+            <a:off x="548640" y="3072384"/>
             <a:ext cx="2057400" cy="786384"/>
           </a:xfrm>
           <a:prstGeom prst="rect">
@@ -54662,16 +54662,16 @@
         </p:nvSpPr>
         <p:spPr>
           <a:xfrm>
-            <a:off x="713232" y="3355848"/>
-            <a:ext cx="1828800" cy="274320"/>
-          </a:xfrm>
-          <a:prstGeom prst="rect">
-            <a:avLst/>
-          </a:prstGeom>
-          <a:noFill/>
-        </p:spPr>
-        <p:txBody>
-          <a:bodyPr wrap="square" anchor="t" lIns="0" rIns="0" tIns="0" bIns="0">
+            <a:off x="713232" y="3072384"/>
+            <a:ext cx="1828800" cy="786384"/>
+          </a:xfrm>
+          <a:prstGeom prst="rect">
+            <a:avLst/>
+          </a:prstGeom>
+          <a:noFill/>
+        </p:spPr>
+        <p:txBody>
+          <a:bodyPr wrap="square" anchor="ctr" lIns="0" rIns="0" tIns="0" bIns="0">
             <a:spAutoFit/>
           </a:bodyPr>
           <a:lstStyle/>
@@ -54701,7 +54701,7 @@
         </p:nvSpPr>
         <p:spPr>
           <a:xfrm>
-            <a:off x="2697480" y="3099816"/>
+            <a:off x="2697480" y="3072384"/>
             <a:ext cx="8942832" cy="786384"/>
           </a:xfrm>
           <a:prstGeom prst="rect">
@@ -54747,16 +54747,16 @@
         </p:nvSpPr>
         <p:spPr>
           <a:xfrm>
-            <a:off x="2971800" y="3282696"/>
-            <a:ext cx="8412480" cy="548640"/>
-          </a:xfrm>
-          <a:prstGeom prst="rect">
-            <a:avLst/>
-          </a:prstGeom>
-          <a:noFill/>
-        </p:spPr>
-        <p:txBody>
-          <a:bodyPr wrap="square" anchor="t" lIns="0" rIns="0" tIns="0" bIns="0">
+            <a:off x="2971800" y="3072384"/>
+            <a:ext cx="8412480" cy="786384"/>
+          </a:xfrm>
+          <a:prstGeom prst="rect">
+            <a:avLst/>
+          </a:prstGeom>
+          <a:noFill/>
+        </p:spPr>
+        <p:txBody>
+          <a:bodyPr wrap="square" anchor="ctr" lIns="0" rIns="0" tIns="0" bIns="0">
             <a:spAutoFit/>
           </a:bodyPr>
           <a:lstStyle/>
@@ -54786,7 +54786,7 @@
         </p:nvSpPr>
         <p:spPr>
           <a:xfrm>
-            <a:off x="548640" y="4032504"/>
+            <a:off x="548640" y="4005072"/>
             <a:ext cx="2057400" cy="786384"/>
           </a:xfrm>
           <a:prstGeom prst="rect">
@@ -54830,16 +54830,16 @@
         </p:nvSpPr>
         <p:spPr>
           <a:xfrm>
-            <a:off x="713232" y="4288536"/>
-            <a:ext cx="1828800" cy="274320"/>
-          </a:xfrm>
-          <a:prstGeom prst="rect">
-            <a:avLst/>
-          </a:prstGeom>
-          <a:noFill/>
-        </p:spPr>
-        <p:txBody>
-          <a:bodyPr wrap="square" anchor="t" lIns="0" rIns="0" tIns="0" bIns="0">
+            <a:off x="713232" y="4005072"/>
+            <a:ext cx="1828800" cy="786384"/>
+          </a:xfrm>
+          <a:prstGeom prst="rect">
+            <a:avLst/>
+          </a:prstGeom>
+          <a:noFill/>
+        </p:spPr>
+        <p:txBody>
+          <a:bodyPr wrap="square" anchor="ctr" lIns="0" rIns="0" tIns="0" bIns="0">
             <a:spAutoFit/>
           </a:bodyPr>
           <a:lstStyle/>
@@ -54869,7 +54869,7 @@
         </p:nvSpPr>
         <p:spPr>
           <a:xfrm>
-            <a:off x="2697480" y="4032504"/>
+            <a:off x="2697480" y="4005072"/>
             <a:ext cx="8942832" cy="786384"/>
           </a:xfrm>
           <a:prstGeom prst="rect">
@@ -54915,16 +54915,16 @@
         </p:nvSpPr>
         <p:spPr>
           <a:xfrm>
-            <a:off x="2971800" y="4215384"/>
-            <a:ext cx="8412480" cy="548640"/>
-          </a:xfrm>
-          <a:prstGeom prst="rect">
-            <a:avLst/>
-          </a:prstGeom>
-          <a:noFill/>
-        </p:spPr>
-        <p:txBody>
-          <a:bodyPr wrap="square" anchor="t" lIns="0" rIns="0" tIns="0" bIns="0">
+            <a:off x="2971800" y="4005072"/>
+            <a:ext cx="8412480" cy="786384"/>
+          </a:xfrm>
+          <a:prstGeom prst="rect">
+            <a:avLst/>
+          </a:prstGeom>
+          <a:noFill/>
+        </p:spPr>
+        <p:txBody>
+          <a:bodyPr wrap="square" anchor="ctr" lIns="0" rIns="0" tIns="0" bIns="0">
             <a:spAutoFit/>
           </a:bodyPr>
           <a:lstStyle/>
@@ -54954,7 +54954,7 @@
         </p:nvSpPr>
         <p:spPr>
           <a:xfrm>
-            <a:off x="548640" y="4965192"/>
+            <a:off x="548640" y="4937760"/>
             <a:ext cx="2057400" cy="786384"/>
           </a:xfrm>
           <a:prstGeom prst="rect">
@@ -54998,16 +54998,16 @@
         </p:nvSpPr>
         <p:spPr>
           <a:xfrm>
-            <a:off x="713232" y="5221224"/>
-            <a:ext cx="1828800" cy="274320"/>
-          </a:xfrm>
-          <a:prstGeom prst="rect">
-            <a:avLst/>
-          </a:prstGeom>
-          <a:noFill/>
-        </p:spPr>
-        <p:txBody>
-          <a:bodyPr wrap="square" anchor="t" lIns="0" rIns="0" tIns="0" bIns="0">
+            <a:off x="713232" y="4937760"/>
+            <a:ext cx="1828800" cy="786384"/>
+          </a:xfrm>
+          <a:prstGeom prst="rect">
+            <a:avLst/>
+          </a:prstGeom>
+          <a:noFill/>
+        </p:spPr>
+        <p:txBody>
+          <a:bodyPr wrap="square" anchor="ctr" lIns="0" rIns="0" tIns="0" bIns="0">
             <a:spAutoFit/>
           </a:bodyPr>
           <a:lstStyle/>
@@ -55037,7 +55037,7 @@
         </p:nvSpPr>
         <p:spPr>
           <a:xfrm>
-            <a:off x="2697480" y="4965192"/>
+            <a:off x="2697480" y="4937760"/>
             <a:ext cx="8942832" cy="786384"/>
           </a:xfrm>
           <a:prstGeom prst="rect">
@@ -55083,16 +55083,16 @@
         </p:nvSpPr>
         <p:spPr>
           <a:xfrm>
-            <a:off x="2971800" y="5148072"/>
-            <a:ext cx="8412480" cy="548640"/>
-          </a:xfrm>
-          <a:prstGeom prst="rect">
-            <a:avLst/>
-          </a:prstGeom>
-          <a:noFill/>
-        </p:spPr>
-        <p:txBody>
-          <a:bodyPr wrap="square" anchor="t" lIns="0" rIns="0" tIns="0" bIns="0">
+            <a:off x="2971800" y="4937760"/>
+            <a:ext cx="8412480" cy="786384"/>
+          </a:xfrm>
+          <a:prstGeom prst="rect">
+            <a:avLst/>
+          </a:prstGeom>
+          <a:noFill/>
+        </p:spPr>
+        <p:txBody>
+          <a:bodyPr wrap="square" anchor="ctr" lIns="0" rIns="0" tIns="0" bIns="0">
             <a:spAutoFit/>
           </a:bodyPr>
           <a:lstStyle/>
@@ -59977,7 +59977,7 @@
                 </a:solidFill>
                 <a:latin typeface="Calibri"/>
               </a:rPr>
-              <a:t>This deck describes the application at commit 05e5f8f. If a screen has changed, the deck is wrong and not the application — raise it so this can be recaptured.</a:t>
+              <a:t>This deck describes the application at commit 9fe8bc4. If a screen has changed, the deck is wrong and not the application — raise it so this can be recaptured.</a:t>
             </a:r>
           </a:p>
           <a:p>

--- a/docs/sop/SUCCESS-Bank-Ticketing-SOP.pptx
+++ b/docs/sop/SUCCESS-Bank-Ticketing-SOP.pptx
@@ -3996,7 +3996,7 @@
                 </a:solidFill>
                 <a:latin typeface="Calibri"/>
               </a:rPr>
-              <a:t>Version 1.0  ·  Built at commit 9fe8bc4</a:t>
+              <a:t>Version 1.0  ·  Built at commit 59ff422</a:t>
             </a:r>
           </a:p>
         </p:txBody>
@@ -7503,10 +7503,16 @@
           </a:fontRef>
         </p:style>
         <p:txBody>
-          <a:bodyPr rtlCol="0" anchor="ctr" lIns="0" rIns="0" tIns="0" bIns="0" wrap="none"/>
-          <a:lstStyle/>
-          <a:p>
-            <a:pPr algn="ctr"/>
+          <a:bodyPr rtlCol="0" anchor="ctr" lIns="0" rIns="0" tIns="0" bIns="0" wrap="none">
+            <a:noAutofit/>
+          </a:bodyPr>
+          <a:lstStyle/>
+          <a:p>
+            <a:pPr algn="ctr">
+              <a:lnSpc>
+                <a:spcPct val="100000"/>
+              </a:lnSpc>
+            </a:pPr>
             <a:r>
               <a:rPr sz="1300" b="1">
                 <a:solidFill>
@@ -7556,10 +7562,16 @@
           </a:fontRef>
         </p:style>
         <p:txBody>
-          <a:bodyPr rtlCol="0" anchor="ctr" lIns="0" rIns="0" tIns="0" bIns="0" wrap="none"/>
-          <a:lstStyle/>
-          <a:p>
-            <a:pPr algn="ctr"/>
+          <a:bodyPr rtlCol="0" anchor="ctr" lIns="0" rIns="0" tIns="0" bIns="0" wrap="none">
+            <a:noAutofit/>
+          </a:bodyPr>
+          <a:lstStyle/>
+          <a:p>
+            <a:pPr algn="ctr">
+              <a:lnSpc>
+                <a:spcPct val="100000"/>
+              </a:lnSpc>
+            </a:pPr>
             <a:r>
               <a:rPr sz="1300" b="1">
                 <a:solidFill>
@@ -7609,10 +7621,16 @@
           </a:fontRef>
         </p:style>
         <p:txBody>
-          <a:bodyPr rtlCol="0" anchor="ctr" lIns="0" rIns="0" tIns="0" bIns="0" wrap="none"/>
-          <a:lstStyle/>
-          <a:p>
-            <a:pPr algn="ctr"/>
+          <a:bodyPr rtlCol="0" anchor="ctr" lIns="0" rIns="0" tIns="0" bIns="0" wrap="none">
+            <a:noAutofit/>
+          </a:bodyPr>
+          <a:lstStyle/>
+          <a:p>
+            <a:pPr algn="ctr">
+              <a:lnSpc>
+                <a:spcPct val="100000"/>
+              </a:lnSpc>
+            </a:pPr>
             <a:r>
               <a:rPr sz="1300" b="1">
                 <a:solidFill>
@@ -7701,10 +7719,16 @@
           </a:fontRef>
         </p:style>
         <p:txBody>
-          <a:bodyPr rtlCol="0" anchor="ctr" lIns="0" rIns="0" tIns="0" bIns="0" wrap="none"/>
-          <a:lstStyle/>
-          <a:p>
-            <a:pPr algn="ctr"/>
+          <a:bodyPr rtlCol="0" anchor="ctr" lIns="0" rIns="0" tIns="0" bIns="0" wrap="none">
+            <a:noAutofit/>
+          </a:bodyPr>
+          <a:lstStyle/>
+          <a:p>
+            <a:pPr algn="ctr">
+              <a:lnSpc>
+                <a:spcPct val="100000"/>
+              </a:lnSpc>
+            </a:pPr>
             <a:r>
               <a:rPr sz="1000" b="1">
                 <a:solidFill>
@@ -7793,10 +7817,16 @@
           </a:fontRef>
         </p:style>
         <p:txBody>
-          <a:bodyPr rtlCol="0" anchor="ctr" lIns="0" rIns="0" tIns="0" bIns="0" wrap="none"/>
-          <a:lstStyle/>
-          <a:p>
-            <a:pPr algn="ctr"/>
+          <a:bodyPr rtlCol="0" anchor="ctr" lIns="0" rIns="0" tIns="0" bIns="0" wrap="none">
+            <a:noAutofit/>
+          </a:bodyPr>
+          <a:lstStyle/>
+          <a:p>
+            <a:pPr algn="ctr">
+              <a:lnSpc>
+                <a:spcPct val="100000"/>
+              </a:lnSpc>
+            </a:pPr>
             <a:r>
               <a:rPr sz="1000" b="1">
                 <a:solidFill>
@@ -7885,10 +7915,16 @@
           </a:fontRef>
         </p:style>
         <p:txBody>
-          <a:bodyPr rtlCol="0" anchor="ctr" lIns="0" rIns="0" tIns="0" bIns="0" wrap="none"/>
-          <a:lstStyle/>
-          <a:p>
-            <a:pPr algn="ctr"/>
+          <a:bodyPr rtlCol="0" anchor="ctr" lIns="0" rIns="0" tIns="0" bIns="0" wrap="none">
+            <a:noAutofit/>
+          </a:bodyPr>
+          <a:lstStyle/>
+          <a:p>
+            <a:pPr algn="ctr">
+              <a:lnSpc>
+                <a:spcPct val="100000"/>
+              </a:lnSpc>
+            </a:pPr>
             <a:r>
               <a:rPr sz="1000" b="1">
                 <a:solidFill>
@@ -8764,10 +8800,16 @@
           </a:fontRef>
         </p:style>
         <p:txBody>
-          <a:bodyPr rtlCol="0" anchor="ctr" lIns="0" rIns="0" tIns="0" bIns="0" wrap="none"/>
-          <a:lstStyle/>
-          <a:p>
-            <a:pPr algn="ctr"/>
+          <a:bodyPr rtlCol="0" anchor="ctr" lIns="0" rIns="0" tIns="0" bIns="0" wrap="none">
+            <a:noAutofit/>
+          </a:bodyPr>
+          <a:lstStyle/>
+          <a:p>
+            <a:pPr algn="ctr">
+              <a:lnSpc>
+                <a:spcPct val="100000"/>
+              </a:lnSpc>
+            </a:pPr>
             <a:r>
               <a:rPr sz="1300" b="1">
                 <a:solidFill>
@@ -8782,14 +8824,53 @@
       </p:sp>
       <p:sp>
         <p:nvSpPr>
-          <p:cNvPr id="10" name="Oval 9"/>
+          <p:cNvPr id="10" name="TextBox 9"/>
+          <p:cNvSpPr txBox="1"/>
+          <p:nvPr/>
+        </p:nvSpPr>
+        <p:spPr>
+          <a:xfrm>
+            <a:off x="8458200" y="1188720"/>
+            <a:ext cx="3291840" cy="219456"/>
+          </a:xfrm>
+          <a:prstGeom prst="rect">
+            <a:avLst/>
+          </a:prstGeom>
+          <a:noFill/>
+        </p:spPr>
+        <p:txBody>
+          <a:bodyPr wrap="square" anchor="t" lIns="0" rIns="0" tIns="0" bIns="0">
+            <a:spAutoFit/>
+          </a:bodyPr>
+          <a:lstStyle/>
+          <a:p>
+            <a:pPr algn="l">
+              <a:lnSpc>
+                <a:spcPct val="115000"/>
+              </a:lnSpc>
+            </a:pPr>
+            <a:r>
+              <a:rPr sz="1000" b="1">
+                <a:solidFill>
+                  <a:srgbClr val="C25B2E"/>
+                </a:solidFill>
+                <a:latin typeface="Calibri"/>
+              </a:rPr>
+              <a:t>ON THIS SCREEN</a:t>
+            </a:r>
+          </a:p>
+        </p:txBody>
+      </p:sp>
+      <p:sp>
+        <p:nvSpPr>
+          <p:cNvPr id="11" name="Oval 10"/>
           <p:cNvSpPr/>
           <p:nvPr/>
         </p:nvSpPr>
         <p:spPr>
           <a:xfrm>
-            <a:off x="1307179" y="1572310"/>
-            <a:ext cx="274320" cy="274320"/>
+            <a:off x="8458200" y="1463040"/>
+            <a:ext cx="210312" cy="210312"/>
           </a:xfrm>
           <a:prstGeom prst="ellipse">
             <a:avLst/>
@@ -8817,109 +8898,23 @@
           </a:fontRef>
         </p:style>
         <p:txBody>
-          <a:bodyPr rtlCol="0" anchor="ctr" lIns="0" rIns="0" tIns="0" bIns="0" wrap="none"/>
-          <a:lstStyle/>
-          <a:p>
-            <a:pPr algn="ctr"/>
-            <a:r>
-              <a:rPr sz="1300" b="1">
+          <a:bodyPr rtlCol="0" anchor="ctr" lIns="0" rIns="0" tIns="0" bIns="0" wrap="none">
+            <a:noAutofit/>
+          </a:bodyPr>
+          <a:lstStyle/>
+          <a:p>
+            <a:pPr algn="ctr">
+              <a:lnSpc>
+                <a:spcPct val="100000"/>
+              </a:lnSpc>
+            </a:pPr>
+            <a:r>
+              <a:rPr sz="1000" b="1">
                 <a:solidFill>
                   <a:srgbClr val="FFFFFF"/>
                 </a:solidFill>
                 <a:latin typeface="Calibri"/>
               </a:rPr>
-              <a:t>2</a:t>
-            </a:r>
-          </a:p>
-        </p:txBody>
-      </p:sp>
-      <p:sp>
-        <p:nvSpPr>
-          <p:cNvPr id="11" name="TextBox 10"/>
-          <p:cNvSpPr txBox="1"/>
-          <p:nvPr/>
-        </p:nvSpPr>
-        <p:spPr>
-          <a:xfrm>
-            <a:off x="8458200" y="1188720"/>
-            <a:ext cx="3291840" cy="219456"/>
-          </a:xfrm>
-          <a:prstGeom prst="rect">
-            <a:avLst/>
-          </a:prstGeom>
-          <a:noFill/>
-        </p:spPr>
-        <p:txBody>
-          <a:bodyPr wrap="square" anchor="t" lIns="0" rIns="0" tIns="0" bIns="0">
-            <a:spAutoFit/>
-          </a:bodyPr>
-          <a:lstStyle/>
-          <a:p>
-            <a:pPr algn="l">
-              <a:lnSpc>
-                <a:spcPct val="115000"/>
-              </a:lnSpc>
-            </a:pPr>
-            <a:r>
-              <a:rPr sz="1000" b="1">
-                <a:solidFill>
-                  <a:srgbClr val="C25B2E"/>
-                </a:solidFill>
-                <a:latin typeface="Calibri"/>
-              </a:rPr>
-              <a:t>ON THIS SCREEN</a:t>
-            </a:r>
-          </a:p>
-        </p:txBody>
-      </p:sp>
-      <p:sp>
-        <p:nvSpPr>
-          <p:cNvPr id="12" name="Oval 11"/>
-          <p:cNvSpPr/>
-          <p:nvPr/>
-        </p:nvSpPr>
-        <p:spPr>
-          <a:xfrm>
-            <a:off x="8458200" y="1463040"/>
-            <a:ext cx="210312" cy="210312"/>
-          </a:xfrm>
-          <a:prstGeom prst="ellipse">
-            <a:avLst/>
-          </a:prstGeom>
-          <a:solidFill>
-            <a:srgbClr val="C25B2E"/>
-          </a:solidFill>
-          <a:ln>
-            <a:noFill/>
-          </a:ln>
-          <a:effectLst/>
-        </p:spPr>
-        <p:style>
-          <a:lnRef idx="1">
-            <a:schemeClr val="accent1"/>
-          </a:lnRef>
-          <a:fillRef idx="3">
-            <a:schemeClr val="accent1"/>
-          </a:fillRef>
-          <a:effectRef idx="2">
-            <a:schemeClr val="accent1"/>
-          </a:effectRef>
-          <a:fontRef idx="minor">
-            <a:schemeClr val="lt1"/>
-          </a:fontRef>
-        </p:style>
-        <p:txBody>
-          <a:bodyPr rtlCol="0" anchor="ctr" lIns="0" rIns="0" tIns="0" bIns="0" wrap="none"/>
-          <a:lstStyle/>
-          <a:p>
-            <a:pPr algn="ctr"/>
-            <a:r>
-              <a:rPr sz="1000" b="1">
-                <a:solidFill>
-                  <a:srgbClr val="FFFFFF"/>
-                </a:solidFill>
-                <a:latin typeface="Calibri"/>
-              </a:rPr>
               <a:t>1</a:t>
             </a:r>
           </a:p>
@@ -8927,7 +8922,7 @@
       </p:sp>
       <p:sp>
         <p:nvSpPr>
-          <p:cNvPr id="13" name="TextBox 12"/>
+          <p:cNvPr id="12" name="TextBox 11"/>
           <p:cNvSpPr txBox="1"/>
           <p:nvPr/>
         </p:nvSpPr>
@@ -8966,105 +8961,13 @@
       </p:sp>
       <p:sp>
         <p:nvSpPr>
-          <p:cNvPr id="14" name="Oval 13"/>
+          <p:cNvPr id="13" name="Rectangle 12"/>
           <p:cNvSpPr/>
           <p:nvPr/>
         </p:nvSpPr>
         <p:spPr>
           <a:xfrm>
-            <a:off x="8458200" y="1892808"/>
-            <a:ext cx="210312" cy="210312"/>
-          </a:xfrm>
-          <a:prstGeom prst="ellipse">
-            <a:avLst/>
-          </a:prstGeom>
-          <a:solidFill>
-            <a:srgbClr val="C25B2E"/>
-          </a:solidFill>
-          <a:ln>
-            <a:noFill/>
-          </a:ln>
-          <a:effectLst/>
-        </p:spPr>
-        <p:style>
-          <a:lnRef idx="1">
-            <a:schemeClr val="accent1"/>
-          </a:lnRef>
-          <a:fillRef idx="3">
-            <a:schemeClr val="accent1"/>
-          </a:fillRef>
-          <a:effectRef idx="2">
-            <a:schemeClr val="accent1"/>
-          </a:effectRef>
-          <a:fontRef idx="minor">
-            <a:schemeClr val="lt1"/>
-          </a:fontRef>
-        </p:style>
-        <p:txBody>
-          <a:bodyPr rtlCol="0" anchor="ctr" lIns="0" rIns="0" tIns="0" bIns="0" wrap="none"/>
-          <a:lstStyle/>
-          <a:p>
-            <a:pPr algn="ctr"/>
-            <a:r>
-              <a:rPr sz="1000" b="1">
-                <a:solidFill>
-                  <a:srgbClr val="FFFFFF"/>
-                </a:solidFill>
-                <a:latin typeface="Calibri"/>
-              </a:rPr>
-              <a:t>2</a:t>
-            </a:r>
-          </a:p>
-        </p:txBody>
-      </p:sp>
-      <p:sp>
-        <p:nvSpPr>
-          <p:cNvPr id="15" name="TextBox 14"/>
-          <p:cNvSpPr txBox="1"/>
-          <p:nvPr/>
-        </p:nvSpPr>
-        <p:spPr>
-          <a:xfrm>
-            <a:off x="8787384" y="1911096"/>
-            <a:ext cx="2962656" cy="169164"/>
-          </a:xfrm>
-          <a:prstGeom prst="rect">
-            <a:avLst/>
-          </a:prstGeom>
-          <a:noFill/>
-        </p:spPr>
-        <p:txBody>
-          <a:bodyPr wrap="square" anchor="t" lIns="0" rIns="0" tIns="0" bIns="0">
-            <a:spAutoFit/>
-          </a:bodyPr>
-          <a:lstStyle/>
-          <a:p>
-            <a:pPr algn="l">
-              <a:lnSpc>
-                <a:spcPct val="105000"/>
-              </a:lnSpc>
-            </a:pPr>
-            <a:r>
-              <a:rPr sz="1050" b="0">
-                <a:solidFill>
-                  <a:srgbClr val="1B2A33"/>
-                </a:solidFill>
-                <a:latin typeface="Calibri"/>
-              </a:rPr>
-              <a:t>Your ticket counts</a:t>
-            </a:r>
-          </a:p>
-        </p:txBody>
-      </p:sp>
-      <p:sp>
-        <p:nvSpPr>
-          <p:cNvPr id="16" name="Rectangle 15"/>
-          <p:cNvSpPr/>
-          <p:nvPr/>
-        </p:nvSpPr>
-        <p:spPr>
-          <a:xfrm>
-            <a:off x="8458200" y="2299716"/>
+            <a:off x="8458200" y="2039112"/>
             <a:ext cx="45720" cy="502920"/>
           </a:xfrm>
           <a:prstGeom prst="rect">
@@ -9102,13 +9005,13 @@
       </p:sp>
       <p:sp>
         <p:nvSpPr>
-          <p:cNvPr id="17" name="TextBox 16"/>
-          <p:cNvSpPr txBox="1"/>
-          <p:nvPr/>
-        </p:nvSpPr>
-        <p:spPr>
-          <a:xfrm>
-            <a:off x="8622792" y="2299716"/>
+          <p:cNvPr id="14" name="TextBox 13"/>
+          <p:cNvSpPr txBox="1"/>
+          <p:nvPr/>
+        </p:nvSpPr>
+        <p:spPr>
+          <a:xfrm>
+            <a:off x="8622792" y="2039112"/>
             <a:ext cx="3127248" cy="164592"/>
           </a:xfrm>
           <a:prstGeom prst="rect">
@@ -9141,13 +9044,13 @@
       </p:sp>
       <p:sp>
         <p:nvSpPr>
-          <p:cNvPr id="18" name="TextBox 17"/>
-          <p:cNvSpPr txBox="1"/>
-          <p:nvPr/>
-        </p:nvSpPr>
-        <p:spPr>
-          <a:xfrm>
-            <a:off x="8622792" y="2491740"/>
+          <p:cNvPr id="15" name="TextBox 14"/>
+          <p:cNvSpPr txBox="1"/>
+          <p:nvPr/>
+        </p:nvSpPr>
+        <p:spPr>
+          <a:xfrm>
+            <a:off x="8622792" y="2231136"/>
             <a:ext cx="3127248" cy="320040"/>
           </a:xfrm>
           <a:prstGeom prst="rect">
@@ -9180,13 +9083,13 @@
       </p:sp>
       <p:sp>
         <p:nvSpPr>
-          <p:cNvPr id="19" name="Rectangle 18"/>
+          <p:cNvPr id="16" name="Rectangle 15"/>
           <p:cNvSpPr/>
           <p:nvPr/>
         </p:nvSpPr>
         <p:spPr>
           <a:xfrm>
-            <a:off x="8458200" y="3003804"/>
+            <a:off x="8458200" y="2743200"/>
             <a:ext cx="45720" cy="502920"/>
           </a:xfrm>
           <a:prstGeom prst="rect">
@@ -9224,13 +9127,13 @@
       </p:sp>
       <p:sp>
         <p:nvSpPr>
-          <p:cNvPr id="20" name="TextBox 19"/>
-          <p:cNvSpPr txBox="1"/>
-          <p:nvPr/>
-        </p:nvSpPr>
-        <p:spPr>
-          <a:xfrm>
-            <a:off x="8622792" y="3003804"/>
+          <p:cNvPr id="17" name="TextBox 16"/>
+          <p:cNvSpPr txBox="1"/>
+          <p:nvPr/>
+        </p:nvSpPr>
+        <p:spPr>
+          <a:xfrm>
+            <a:off x="8622792" y="2743200"/>
             <a:ext cx="3127248" cy="164592"/>
           </a:xfrm>
           <a:prstGeom prst="rect">
@@ -9263,13 +9166,13 @@
       </p:sp>
       <p:sp>
         <p:nvSpPr>
-          <p:cNvPr id="21" name="TextBox 20"/>
-          <p:cNvSpPr txBox="1"/>
-          <p:nvPr/>
-        </p:nvSpPr>
-        <p:spPr>
-          <a:xfrm>
-            <a:off x="8622792" y="3195828"/>
+          <p:cNvPr id="18" name="TextBox 17"/>
+          <p:cNvSpPr txBox="1"/>
+          <p:nvPr/>
+        </p:nvSpPr>
+        <p:spPr>
+          <a:xfrm>
+            <a:off x="8622792" y="2935224"/>
             <a:ext cx="3127248" cy="320040"/>
           </a:xfrm>
           <a:prstGeom prst="rect">
@@ -9302,13 +9205,13 @@
       </p:sp>
       <p:sp>
         <p:nvSpPr>
-          <p:cNvPr id="22" name="Rectangle 21"/>
+          <p:cNvPr id="19" name="Rectangle 18"/>
           <p:cNvSpPr/>
           <p:nvPr/>
         </p:nvSpPr>
         <p:spPr>
           <a:xfrm>
-            <a:off x="8458200" y="3707892"/>
+            <a:off x="8458200" y="3447288"/>
             <a:ext cx="45720" cy="342900"/>
           </a:xfrm>
           <a:prstGeom prst="rect">
@@ -9346,13 +9249,13 @@
       </p:sp>
       <p:sp>
         <p:nvSpPr>
-          <p:cNvPr id="23" name="TextBox 22"/>
-          <p:cNvSpPr txBox="1"/>
-          <p:nvPr/>
-        </p:nvSpPr>
-        <p:spPr>
-          <a:xfrm>
-            <a:off x="8622792" y="3707892"/>
+          <p:cNvPr id="20" name="TextBox 19"/>
+          <p:cNvSpPr txBox="1"/>
+          <p:nvPr/>
+        </p:nvSpPr>
+        <p:spPr>
+          <a:xfrm>
+            <a:off x="8622792" y="3447288"/>
             <a:ext cx="3127248" cy="164592"/>
           </a:xfrm>
           <a:prstGeom prst="rect">
@@ -9385,13 +9288,13 @@
       </p:sp>
       <p:sp>
         <p:nvSpPr>
-          <p:cNvPr id="24" name="TextBox 23"/>
-          <p:cNvSpPr txBox="1"/>
-          <p:nvPr/>
-        </p:nvSpPr>
-        <p:spPr>
-          <a:xfrm>
-            <a:off x="8622792" y="3899916"/>
+          <p:cNvPr id="21" name="TextBox 20"/>
+          <p:cNvSpPr txBox="1"/>
+          <p:nvPr/>
+        </p:nvSpPr>
+        <p:spPr>
+          <a:xfrm>
+            <a:off x="8622792" y="3639312"/>
             <a:ext cx="3127248" cy="160020"/>
           </a:xfrm>
           <a:prstGeom prst="rect">
@@ -9424,7 +9327,7 @@
       </p:sp>
       <p:sp>
         <p:nvSpPr>
-          <p:cNvPr id="25" name="Rectangle 24"/>
+          <p:cNvPr id="22" name="Rectangle 21"/>
           <p:cNvSpPr/>
           <p:nvPr/>
         </p:nvSpPr>
@@ -9468,7 +9371,7 @@
       </p:sp>
       <p:sp>
         <p:nvSpPr>
-          <p:cNvPr id="26" name="TextBox 25"/>
+          <p:cNvPr id="23" name="TextBox 22"/>
           <p:cNvSpPr txBox="1"/>
           <p:nvPr/>
         </p:nvSpPr>
@@ -9507,7 +9410,7 @@
       </p:sp>
       <p:sp>
         <p:nvSpPr>
-          <p:cNvPr id="27" name="TextBox 26"/>
+          <p:cNvPr id="24" name="TextBox 23"/>
           <p:cNvSpPr txBox="1"/>
           <p:nvPr/>
         </p:nvSpPr>
@@ -9851,7 +9754,7 @@
         </p:nvSpPr>
         <p:spPr>
           <a:xfrm>
-            <a:off x="6927402" y="1607286"/>
+            <a:off x="1436979" y="1915267"/>
             <a:ext cx="274320" cy="274320"/>
           </a:xfrm>
           <a:prstGeom prst="ellipse">
@@ -9880,10 +9783,16 @@
           </a:fontRef>
         </p:style>
         <p:txBody>
-          <a:bodyPr rtlCol="0" anchor="ctr" lIns="0" rIns="0" tIns="0" bIns="0" wrap="none"/>
-          <a:lstStyle/>
-          <a:p>
-            <a:pPr algn="ctr"/>
+          <a:bodyPr rtlCol="0" anchor="ctr" lIns="0" rIns="0" tIns="0" bIns="0" wrap="none">
+            <a:noAutofit/>
+          </a:bodyPr>
+          <a:lstStyle/>
+          <a:p>
+            <a:pPr algn="ctr">
+              <a:lnSpc>
+                <a:spcPct val="100000"/>
+              </a:lnSpc>
+            </a:pPr>
             <a:r>
               <a:rPr sz="1300" b="1">
                 <a:solidFill>
@@ -9904,7 +9813,7 @@
         </p:nvSpPr>
         <p:spPr>
           <a:xfrm>
-            <a:off x="1436979" y="1915267"/>
+            <a:off x="6927402" y="1607286"/>
             <a:ext cx="274320" cy="274320"/>
           </a:xfrm>
           <a:prstGeom prst="ellipse">
@@ -9933,10 +9842,16 @@
           </a:fontRef>
         </p:style>
         <p:txBody>
-          <a:bodyPr rtlCol="0" anchor="ctr" lIns="0" rIns="0" tIns="0" bIns="0" wrap="none"/>
-          <a:lstStyle/>
-          <a:p>
-            <a:pPr algn="ctr"/>
+          <a:bodyPr rtlCol="0" anchor="ctr" lIns="0" rIns="0" tIns="0" bIns="0" wrap="none">
+            <a:noAutofit/>
+          </a:bodyPr>
+          <a:lstStyle/>
+          <a:p>
+            <a:pPr algn="ctr">
+              <a:lnSpc>
+                <a:spcPct val="100000"/>
+              </a:lnSpc>
+            </a:pPr>
             <a:r>
               <a:rPr sz="1300" b="1">
                 <a:solidFill>
@@ -10025,10 +9940,16 @@
           </a:fontRef>
         </p:style>
         <p:txBody>
-          <a:bodyPr rtlCol="0" anchor="ctr" lIns="0" rIns="0" tIns="0" bIns="0" wrap="none"/>
-          <a:lstStyle/>
-          <a:p>
-            <a:pPr algn="ctr"/>
+          <a:bodyPr rtlCol="0" anchor="ctr" lIns="0" rIns="0" tIns="0" bIns="0" wrap="none">
+            <a:noAutofit/>
+          </a:bodyPr>
+          <a:lstStyle/>
+          <a:p>
+            <a:pPr algn="ctr">
+              <a:lnSpc>
+                <a:spcPct val="100000"/>
+              </a:lnSpc>
+            </a:pPr>
             <a:r>
               <a:rPr sz="1000" b="1">
                 <a:solidFill>
@@ -10075,7 +9996,7 @@
                 </a:solidFill>
                 <a:latin typeface="Calibri"/>
               </a:rPr>
-              <a:t>New Ticket</a:t>
+              <a:t>Search and filters</a:t>
             </a:r>
           </a:p>
         </p:txBody>
@@ -10117,10 +10038,16 @@
           </a:fontRef>
         </p:style>
         <p:txBody>
-          <a:bodyPr rtlCol="0" anchor="ctr" lIns="0" rIns="0" tIns="0" bIns="0" wrap="none"/>
-          <a:lstStyle/>
-          <a:p>
-            <a:pPr algn="ctr"/>
+          <a:bodyPr rtlCol="0" anchor="ctr" lIns="0" rIns="0" tIns="0" bIns="0" wrap="none">
+            <a:noAutofit/>
+          </a:bodyPr>
+          <a:lstStyle/>
+          <a:p>
+            <a:pPr algn="ctr">
+              <a:lnSpc>
+                <a:spcPct val="100000"/>
+              </a:lnSpc>
+            </a:pPr>
             <a:r>
               <a:rPr sz="1000" b="1">
                 <a:solidFill>
@@ -10167,7 +10094,7 @@
                 </a:solidFill>
                 <a:latin typeface="Calibri"/>
               </a:rPr>
-              <a:t>Search and filters</a:t>
+              <a:t>New Ticket</a:t>
             </a:r>
           </a:p>
         </p:txBody>
@@ -10996,10 +10923,16 @@
           </a:fontRef>
         </p:style>
         <p:txBody>
-          <a:bodyPr rtlCol="0" anchor="ctr" lIns="0" rIns="0" tIns="0" bIns="0" wrap="none"/>
-          <a:lstStyle/>
-          <a:p>
-            <a:pPr algn="ctr"/>
+          <a:bodyPr rtlCol="0" anchor="ctr" lIns="0" rIns="0" tIns="0" bIns="0" wrap="none">
+            <a:noAutofit/>
+          </a:bodyPr>
+          <a:lstStyle/>
+          <a:p>
+            <a:pPr algn="ctr">
+              <a:lnSpc>
+                <a:spcPct val="100000"/>
+              </a:lnSpc>
+            </a:pPr>
             <a:r>
               <a:rPr sz="1300" b="1">
                 <a:solidFill>
@@ -11049,10 +10982,16 @@
           </a:fontRef>
         </p:style>
         <p:txBody>
-          <a:bodyPr rtlCol="0" anchor="ctr" lIns="0" rIns="0" tIns="0" bIns="0" wrap="none"/>
-          <a:lstStyle/>
-          <a:p>
-            <a:pPr algn="ctr"/>
+          <a:bodyPr rtlCol="0" anchor="ctr" lIns="0" rIns="0" tIns="0" bIns="0" wrap="none">
+            <a:noAutofit/>
+          </a:bodyPr>
+          <a:lstStyle/>
+          <a:p>
+            <a:pPr algn="ctr">
+              <a:lnSpc>
+                <a:spcPct val="100000"/>
+              </a:lnSpc>
+            </a:pPr>
             <a:r>
               <a:rPr sz="1300" b="1">
                 <a:solidFill>
@@ -11102,10 +11041,16 @@
           </a:fontRef>
         </p:style>
         <p:txBody>
-          <a:bodyPr rtlCol="0" anchor="ctr" lIns="0" rIns="0" tIns="0" bIns="0" wrap="none"/>
-          <a:lstStyle/>
-          <a:p>
-            <a:pPr algn="ctr"/>
+          <a:bodyPr rtlCol="0" anchor="ctr" lIns="0" rIns="0" tIns="0" bIns="0" wrap="none">
+            <a:noAutofit/>
+          </a:bodyPr>
+          <a:lstStyle/>
+          <a:p>
+            <a:pPr algn="ctr">
+              <a:lnSpc>
+                <a:spcPct val="100000"/>
+              </a:lnSpc>
+            </a:pPr>
             <a:r>
               <a:rPr sz="1300" b="1">
                 <a:solidFill>
@@ -11194,10 +11139,16 @@
           </a:fontRef>
         </p:style>
         <p:txBody>
-          <a:bodyPr rtlCol="0" anchor="ctr" lIns="0" rIns="0" tIns="0" bIns="0" wrap="none"/>
-          <a:lstStyle/>
-          <a:p>
-            <a:pPr algn="ctr"/>
+          <a:bodyPr rtlCol="0" anchor="ctr" lIns="0" rIns="0" tIns="0" bIns="0" wrap="none">
+            <a:noAutofit/>
+          </a:bodyPr>
+          <a:lstStyle/>
+          <a:p>
+            <a:pPr algn="ctr">
+              <a:lnSpc>
+                <a:spcPct val="100000"/>
+              </a:lnSpc>
+            </a:pPr>
             <a:r>
               <a:rPr sz="1000" b="1">
                 <a:solidFill>
@@ -11286,10 +11237,16 @@
           </a:fontRef>
         </p:style>
         <p:txBody>
-          <a:bodyPr rtlCol="0" anchor="ctr" lIns="0" rIns="0" tIns="0" bIns="0" wrap="none"/>
-          <a:lstStyle/>
-          <a:p>
-            <a:pPr algn="ctr"/>
+          <a:bodyPr rtlCol="0" anchor="ctr" lIns="0" rIns="0" tIns="0" bIns="0" wrap="none">
+            <a:noAutofit/>
+          </a:bodyPr>
+          <a:lstStyle/>
+          <a:p>
+            <a:pPr algn="ctr">
+              <a:lnSpc>
+                <a:spcPct val="100000"/>
+              </a:lnSpc>
+            </a:pPr>
             <a:r>
               <a:rPr sz="1000" b="1">
                 <a:solidFill>
@@ -11378,10 +11335,16 @@
           </a:fontRef>
         </p:style>
         <p:txBody>
-          <a:bodyPr rtlCol="0" anchor="ctr" lIns="0" rIns="0" tIns="0" bIns="0" wrap="none"/>
-          <a:lstStyle/>
-          <a:p>
-            <a:pPr algn="ctr"/>
+          <a:bodyPr rtlCol="0" anchor="ctr" lIns="0" rIns="0" tIns="0" bIns="0" wrap="none">
+            <a:noAutofit/>
+          </a:bodyPr>
+          <a:lstStyle/>
+          <a:p>
+            <a:pPr algn="ctr">
+              <a:lnSpc>
+                <a:spcPct val="100000"/>
+              </a:lnSpc>
+            </a:pPr>
             <a:r>
               <a:rPr sz="1000" b="1">
                 <a:solidFill>
@@ -12257,10 +12220,16 @@
           </a:fontRef>
         </p:style>
         <p:txBody>
-          <a:bodyPr rtlCol="0" anchor="ctr" lIns="0" rIns="0" tIns="0" bIns="0" wrap="none"/>
-          <a:lstStyle/>
-          <a:p>
-            <a:pPr algn="ctr"/>
+          <a:bodyPr rtlCol="0" anchor="ctr" lIns="0" rIns="0" tIns="0" bIns="0" wrap="none">
+            <a:noAutofit/>
+          </a:bodyPr>
+          <a:lstStyle/>
+          <a:p>
+            <a:pPr algn="ctr">
+              <a:lnSpc>
+                <a:spcPct val="100000"/>
+              </a:lnSpc>
+            </a:pPr>
             <a:r>
               <a:rPr sz="1300" b="1">
                 <a:solidFill>
@@ -12310,10 +12279,16 @@
           </a:fontRef>
         </p:style>
         <p:txBody>
-          <a:bodyPr rtlCol="0" anchor="ctr" lIns="0" rIns="0" tIns="0" bIns="0" wrap="none"/>
-          <a:lstStyle/>
-          <a:p>
-            <a:pPr algn="ctr"/>
+          <a:bodyPr rtlCol="0" anchor="ctr" lIns="0" rIns="0" tIns="0" bIns="0" wrap="none">
+            <a:noAutofit/>
+          </a:bodyPr>
+          <a:lstStyle/>
+          <a:p>
+            <a:pPr algn="ctr">
+              <a:lnSpc>
+                <a:spcPct val="100000"/>
+              </a:lnSpc>
+            </a:pPr>
             <a:r>
               <a:rPr sz="1300" b="1">
                 <a:solidFill>
@@ -12363,10 +12338,16 @@
           </a:fontRef>
         </p:style>
         <p:txBody>
-          <a:bodyPr rtlCol="0" anchor="ctr" lIns="0" rIns="0" tIns="0" bIns="0" wrap="none"/>
-          <a:lstStyle/>
-          <a:p>
-            <a:pPr algn="ctr"/>
+          <a:bodyPr rtlCol="0" anchor="ctr" lIns="0" rIns="0" tIns="0" bIns="0" wrap="none">
+            <a:noAutofit/>
+          </a:bodyPr>
+          <a:lstStyle/>
+          <a:p>
+            <a:pPr algn="ctr">
+              <a:lnSpc>
+                <a:spcPct val="100000"/>
+              </a:lnSpc>
+            </a:pPr>
             <a:r>
               <a:rPr sz="1300" b="1">
                 <a:solidFill>
@@ -12416,10 +12397,16 @@
           </a:fontRef>
         </p:style>
         <p:txBody>
-          <a:bodyPr rtlCol="0" anchor="ctr" lIns="0" rIns="0" tIns="0" bIns="0" wrap="none"/>
-          <a:lstStyle/>
-          <a:p>
-            <a:pPr algn="ctr"/>
+          <a:bodyPr rtlCol="0" anchor="ctr" lIns="0" rIns="0" tIns="0" bIns="0" wrap="none">
+            <a:noAutofit/>
+          </a:bodyPr>
+          <a:lstStyle/>
+          <a:p>
+            <a:pPr algn="ctr">
+              <a:lnSpc>
+                <a:spcPct val="100000"/>
+              </a:lnSpc>
+            </a:pPr>
             <a:r>
               <a:rPr sz="1300" b="1">
                 <a:solidFill>
@@ -12508,10 +12495,16 @@
           </a:fontRef>
         </p:style>
         <p:txBody>
-          <a:bodyPr rtlCol="0" anchor="ctr" lIns="0" rIns="0" tIns="0" bIns="0" wrap="none"/>
-          <a:lstStyle/>
-          <a:p>
-            <a:pPr algn="ctr"/>
+          <a:bodyPr rtlCol="0" anchor="ctr" lIns="0" rIns="0" tIns="0" bIns="0" wrap="none">
+            <a:noAutofit/>
+          </a:bodyPr>
+          <a:lstStyle/>
+          <a:p>
+            <a:pPr algn="ctr">
+              <a:lnSpc>
+                <a:spcPct val="100000"/>
+              </a:lnSpc>
+            </a:pPr>
             <a:r>
               <a:rPr sz="1000" b="1">
                 <a:solidFill>
@@ -12600,10 +12593,16 @@
           </a:fontRef>
         </p:style>
         <p:txBody>
-          <a:bodyPr rtlCol="0" anchor="ctr" lIns="0" rIns="0" tIns="0" bIns="0" wrap="none"/>
-          <a:lstStyle/>
-          <a:p>
-            <a:pPr algn="ctr"/>
+          <a:bodyPr rtlCol="0" anchor="ctr" lIns="0" rIns="0" tIns="0" bIns="0" wrap="none">
+            <a:noAutofit/>
+          </a:bodyPr>
+          <a:lstStyle/>
+          <a:p>
+            <a:pPr algn="ctr">
+              <a:lnSpc>
+                <a:spcPct val="100000"/>
+              </a:lnSpc>
+            </a:pPr>
             <a:r>
               <a:rPr sz="1000" b="1">
                 <a:solidFill>
@@ -12692,10 +12691,16 @@
           </a:fontRef>
         </p:style>
         <p:txBody>
-          <a:bodyPr rtlCol="0" anchor="ctr" lIns="0" rIns="0" tIns="0" bIns="0" wrap="none"/>
-          <a:lstStyle/>
-          <a:p>
-            <a:pPr algn="ctr"/>
+          <a:bodyPr rtlCol="0" anchor="ctr" lIns="0" rIns="0" tIns="0" bIns="0" wrap="none">
+            <a:noAutofit/>
+          </a:bodyPr>
+          <a:lstStyle/>
+          <a:p>
+            <a:pPr algn="ctr">
+              <a:lnSpc>
+                <a:spcPct val="100000"/>
+              </a:lnSpc>
+            </a:pPr>
             <a:r>
               <a:rPr sz="1000" b="1">
                 <a:solidFill>
@@ -12784,10 +12789,16 @@
           </a:fontRef>
         </p:style>
         <p:txBody>
-          <a:bodyPr rtlCol="0" anchor="ctr" lIns="0" rIns="0" tIns="0" bIns="0" wrap="none"/>
-          <a:lstStyle/>
-          <a:p>
-            <a:pPr algn="ctr"/>
+          <a:bodyPr rtlCol="0" anchor="ctr" lIns="0" rIns="0" tIns="0" bIns="0" wrap="none">
+            <a:noAutofit/>
+          </a:bodyPr>
+          <a:lstStyle/>
+          <a:p>
+            <a:pPr algn="ctr">
+              <a:lnSpc>
+                <a:spcPct val="100000"/>
+              </a:lnSpc>
+            </a:pPr>
             <a:r>
               <a:rPr sz="1000" b="1">
                 <a:solidFill>
@@ -13663,10 +13674,16 @@
           </a:fontRef>
         </p:style>
         <p:txBody>
-          <a:bodyPr rtlCol="0" anchor="ctr" lIns="0" rIns="0" tIns="0" bIns="0" wrap="none"/>
-          <a:lstStyle/>
-          <a:p>
-            <a:pPr algn="ctr"/>
+          <a:bodyPr rtlCol="0" anchor="ctr" lIns="0" rIns="0" tIns="0" bIns="0" wrap="none">
+            <a:noAutofit/>
+          </a:bodyPr>
+          <a:lstStyle/>
+          <a:p>
+            <a:pPr algn="ctr">
+              <a:lnSpc>
+                <a:spcPct val="100000"/>
+              </a:lnSpc>
+            </a:pPr>
             <a:r>
               <a:rPr sz="1300" b="1">
                 <a:solidFill>
@@ -13716,10 +13733,16 @@
           </a:fontRef>
         </p:style>
         <p:txBody>
-          <a:bodyPr rtlCol="0" anchor="ctr" lIns="0" rIns="0" tIns="0" bIns="0" wrap="none"/>
-          <a:lstStyle/>
-          <a:p>
-            <a:pPr algn="ctr"/>
+          <a:bodyPr rtlCol="0" anchor="ctr" lIns="0" rIns="0" tIns="0" bIns="0" wrap="none">
+            <a:noAutofit/>
+          </a:bodyPr>
+          <a:lstStyle/>
+          <a:p>
+            <a:pPr algn="ctr">
+              <a:lnSpc>
+                <a:spcPct val="100000"/>
+              </a:lnSpc>
+            </a:pPr>
             <a:r>
               <a:rPr sz="1300" b="1">
                 <a:solidFill>
@@ -13769,10 +13792,16 @@
           </a:fontRef>
         </p:style>
         <p:txBody>
-          <a:bodyPr rtlCol="0" anchor="ctr" lIns="0" rIns="0" tIns="0" bIns="0" wrap="none"/>
-          <a:lstStyle/>
-          <a:p>
-            <a:pPr algn="ctr"/>
+          <a:bodyPr rtlCol="0" anchor="ctr" lIns="0" rIns="0" tIns="0" bIns="0" wrap="none">
+            <a:noAutofit/>
+          </a:bodyPr>
+          <a:lstStyle/>
+          <a:p>
+            <a:pPr algn="ctr">
+              <a:lnSpc>
+                <a:spcPct val="100000"/>
+              </a:lnSpc>
+            </a:pPr>
             <a:r>
               <a:rPr sz="1300" b="1">
                 <a:solidFill>
@@ -13822,10 +13851,16 @@
           </a:fontRef>
         </p:style>
         <p:txBody>
-          <a:bodyPr rtlCol="0" anchor="ctr" lIns="0" rIns="0" tIns="0" bIns="0" wrap="none"/>
-          <a:lstStyle/>
-          <a:p>
-            <a:pPr algn="ctr"/>
+          <a:bodyPr rtlCol="0" anchor="ctr" lIns="0" rIns="0" tIns="0" bIns="0" wrap="none">
+            <a:noAutofit/>
+          </a:bodyPr>
+          <a:lstStyle/>
+          <a:p>
+            <a:pPr algn="ctr">
+              <a:lnSpc>
+                <a:spcPct val="100000"/>
+              </a:lnSpc>
+            </a:pPr>
             <a:r>
               <a:rPr sz="1300" b="1">
                 <a:solidFill>
@@ -13914,10 +13949,16 @@
           </a:fontRef>
         </p:style>
         <p:txBody>
-          <a:bodyPr rtlCol="0" anchor="ctr" lIns="0" rIns="0" tIns="0" bIns="0" wrap="none"/>
-          <a:lstStyle/>
-          <a:p>
-            <a:pPr algn="ctr"/>
+          <a:bodyPr rtlCol="0" anchor="ctr" lIns="0" rIns="0" tIns="0" bIns="0" wrap="none">
+            <a:noAutofit/>
+          </a:bodyPr>
+          <a:lstStyle/>
+          <a:p>
+            <a:pPr algn="ctr">
+              <a:lnSpc>
+                <a:spcPct val="100000"/>
+              </a:lnSpc>
+            </a:pPr>
             <a:r>
               <a:rPr sz="1000" b="1">
                 <a:solidFill>
@@ -14006,10 +14047,16 @@
           </a:fontRef>
         </p:style>
         <p:txBody>
-          <a:bodyPr rtlCol="0" anchor="ctr" lIns="0" rIns="0" tIns="0" bIns="0" wrap="none"/>
-          <a:lstStyle/>
-          <a:p>
-            <a:pPr algn="ctr"/>
+          <a:bodyPr rtlCol="0" anchor="ctr" lIns="0" rIns="0" tIns="0" bIns="0" wrap="none">
+            <a:noAutofit/>
+          </a:bodyPr>
+          <a:lstStyle/>
+          <a:p>
+            <a:pPr algn="ctr">
+              <a:lnSpc>
+                <a:spcPct val="100000"/>
+              </a:lnSpc>
+            </a:pPr>
             <a:r>
               <a:rPr sz="1000" b="1">
                 <a:solidFill>
@@ -14098,10 +14145,16 @@
           </a:fontRef>
         </p:style>
         <p:txBody>
-          <a:bodyPr rtlCol="0" anchor="ctr" lIns="0" rIns="0" tIns="0" bIns="0" wrap="none"/>
-          <a:lstStyle/>
-          <a:p>
-            <a:pPr algn="ctr"/>
+          <a:bodyPr rtlCol="0" anchor="ctr" lIns="0" rIns="0" tIns="0" bIns="0" wrap="none">
+            <a:noAutofit/>
+          </a:bodyPr>
+          <a:lstStyle/>
+          <a:p>
+            <a:pPr algn="ctr">
+              <a:lnSpc>
+                <a:spcPct val="100000"/>
+              </a:lnSpc>
+            </a:pPr>
             <a:r>
               <a:rPr sz="1000" b="1">
                 <a:solidFill>
@@ -14190,10 +14243,16 @@
           </a:fontRef>
         </p:style>
         <p:txBody>
-          <a:bodyPr rtlCol="0" anchor="ctr" lIns="0" rIns="0" tIns="0" bIns="0" wrap="none"/>
-          <a:lstStyle/>
-          <a:p>
-            <a:pPr algn="ctr"/>
+          <a:bodyPr rtlCol="0" anchor="ctr" lIns="0" rIns="0" tIns="0" bIns="0" wrap="none">
+            <a:noAutofit/>
+          </a:bodyPr>
+          <a:lstStyle/>
+          <a:p>
+            <a:pPr algn="ctr">
+              <a:lnSpc>
+                <a:spcPct val="100000"/>
+              </a:lnSpc>
+            </a:pPr>
             <a:r>
               <a:rPr sz="1000" b="1">
                 <a:solidFill>
@@ -15069,10 +15128,16 @@
           </a:fontRef>
         </p:style>
         <p:txBody>
-          <a:bodyPr rtlCol="0" anchor="ctr" lIns="0" rIns="0" tIns="0" bIns="0" wrap="none"/>
-          <a:lstStyle/>
-          <a:p>
-            <a:pPr algn="ctr"/>
+          <a:bodyPr rtlCol="0" anchor="ctr" lIns="0" rIns="0" tIns="0" bIns="0" wrap="none">
+            <a:noAutofit/>
+          </a:bodyPr>
+          <a:lstStyle/>
+          <a:p>
+            <a:pPr algn="ctr">
+              <a:lnSpc>
+                <a:spcPct val="100000"/>
+              </a:lnSpc>
+            </a:pPr>
             <a:r>
               <a:rPr sz="1300" b="1">
                 <a:solidFill>
@@ -15122,10 +15187,16 @@
           </a:fontRef>
         </p:style>
         <p:txBody>
-          <a:bodyPr rtlCol="0" anchor="ctr" lIns="0" rIns="0" tIns="0" bIns="0" wrap="none"/>
-          <a:lstStyle/>
-          <a:p>
-            <a:pPr algn="ctr"/>
+          <a:bodyPr rtlCol="0" anchor="ctr" lIns="0" rIns="0" tIns="0" bIns="0" wrap="none">
+            <a:noAutofit/>
+          </a:bodyPr>
+          <a:lstStyle/>
+          <a:p>
+            <a:pPr algn="ctr">
+              <a:lnSpc>
+                <a:spcPct val="100000"/>
+              </a:lnSpc>
+            </a:pPr>
             <a:r>
               <a:rPr sz="1300" b="1">
                 <a:solidFill>
@@ -15214,10 +15285,16 @@
           </a:fontRef>
         </p:style>
         <p:txBody>
-          <a:bodyPr rtlCol="0" anchor="ctr" lIns="0" rIns="0" tIns="0" bIns="0" wrap="none"/>
-          <a:lstStyle/>
-          <a:p>
-            <a:pPr algn="ctr"/>
+          <a:bodyPr rtlCol="0" anchor="ctr" lIns="0" rIns="0" tIns="0" bIns="0" wrap="none">
+            <a:noAutofit/>
+          </a:bodyPr>
+          <a:lstStyle/>
+          <a:p>
+            <a:pPr algn="ctr">
+              <a:lnSpc>
+                <a:spcPct val="100000"/>
+              </a:lnSpc>
+            </a:pPr>
             <a:r>
               <a:rPr sz="1000" b="1">
                 <a:solidFill>
@@ -15306,10 +15383,16 @@
           </a:fontRef>
         </p:style>
         <p:txBody>
-          <a:bodyPr rtlCol="0" anchor="ctr" lIns="0" rIns="0" tIns="0" bIns="0" wrap="none"/>
-          <a:lstStyle/>
-          <a:p>
-            <a:pPr algn="ctr"/>
+          <a:bodyPr rtlCol="0" anchor="ctr" lIns="0" rIns="0" tIns="0" bIns="0" wrap="none">
+            <a:noAutofit/>
+          </a:bodyPr>
+          <a:lstStyle/>
+          <a:p>
+            <a:pPr algn="ctr">
+              <a:lnSpc>
+                <a:spcPct val="100000"/>
+              </a:lnSpc>
+            </a:pPr>
             <a:r>
               <a:rPr sz="1000" b="1">
                 <a:solidFill>
@@ -18638,10 +18721,16 @@
           </a:fontRef>
         </p:style>
         <p:txBody>
-          <a:bodyPr rtlCol="0" anchor="ctr" lIns="0" rIns="0" tIns="0" bIns="0" wrap="none"/>
-          <a:lstStyle/>
-          <a:p>
-            <a:pPr algn="ctr"/>
+          <a:bodyPr rtlCol="0" anchor="ctr" lIns="0" rIns="0" tIns="0" bIns="0" wrap="none">
+            <a:noAutofit/>
+          </a:bodyPr>
+          <a:lstStyle/>
+          <a:p>
+            <a:pPr algn="ctr">
+              <a:lnSpc>
+                <a:spcPct val="100000"/>
+              </a:lnSpc>
+            </a:pPr>
             <a:r>
               <a:rPr sz="1300" b="1">
                 <a:solidFill>
@@ -18691,10 +18780,16 @@
           </a:fontRef>
         </p:style>
         <p:txBody>
-          <a:bodyPr rtlCol="0" anchor="ctr" lIns="0" rIns="0" tIns="0" bIns="0" wrap="none"/>
-          <a:lstStyle/>
-          <a:p>
-            <a:pPr algn="ctr"/>
+          <a:bodyPr rtlCol="0" anchor="ctr" lIns="0" rIns="0" tIns="0" bIns="0" wrap="none">
+            <a:noAutofit/>
+          </a:bodyPr>
+          <a:lstStyle/>
+          <a:p>
+            <a:pPr algn="ctr">
+              <a:lnSpc>
+                <a:spcPct val="100000"/>
+              </a:lnSpc>
+            </a:pPr>
             <a:r>
               <a:rPr sz="1300" b="1">
                 <a:solidFill>
@@ -18744,10 +18839,16 @@
           </a:fontRef>
         </p:style>
         <p:txBody>
-          <a:bodyPr rtlCol="0" anchor="ctr" lIns="0" rIns="0" tIns="0" bIns="0" wrap="none"/>
-          <a:lstStyle/>
-          <a:p>
-            <a:pPr algn="ctr"/>
+          <a:bodyPr rtlCol="0" anchor="ctr" lIns="0" rIns="0" tIns="0" bIns="0" wrap="none">
+            <a:noAutofit/>
+          </a:bodyPr>
+          <a:lstStyle/>
+          <a:p>
+            <a:pPr algn="ctr">
+              <a:lnSpc>
+                <a:spcPct val="100000"/>
+              </a:lnSpc>
+            </a:pPr>
             <a:r>
               <a:rPr sz="1300" b="1">
                 <a:solidFill>
@@ -18836,10 +18937,16 @@
           </a:fontRef>
         </p:style>
         <p:txBody>
-          <a:bodyPr rtlCol="0" anchor="ctr" lIns="0" rIns="0" tIns="0" bIns="0" wrap="none"/>
-          <a:lstStyle/>
-          <a:p>
-            <a:pPr algn="ctr"/>
+          <a:bodyPr rtlCol="0" anchor="ctr" lIns="0" rIns="0" tIns="0" bIns="0" wrap="none">
+            <a:noAutofit/>
+          </a:bodyPr>
+          <a:lstStyle/>
+          <a:p>
+            <a:pPr algn="ctr">
+              <a:lnSpc>
+                <a:spcPct val="100000"/>
+              </a:lnSpc>
+            </a:pPr>
             <a:r>
               <a:rPr sz="1000" b="1">
                 <a:solidFill>
@@ -18928,10 +19035,16 @@
           </a:fontRef>
         </p:style>
         <p:txBody>
-          <a:bodyPr rtlCol="0" anchor="ctr" lIns="0" rIns="0" tIns="0" bIns="0" wrap="none"/>
-          <a:lstStyle/>
-          <a:p>
-            <a:pPr algn="ctr"/>
+          <a:bodyPr rtlCol="0" anchor="ctr" lIns="0" rIns="0" tIns="0" bIns="0" wrap="none">
+            <a:noAutofit/>
+          </a:bodyPr>
+          <a:lstStyle/>
+          <a:p>
+            <a:pPr algn="ctr">
+              <a:lnSpc>
+                <a:spcPct val="100000"/>
+              </a:lnSpc>
+            </a:pPr>
             <a:r>
               <a:rPr sz="1000" b="1">
                 <a:solidFill>
@@ -19020,10 +19133,16 @@
           </a:fontRef>
         </p:style>
         <p:txBody>
-          <a:bodyPr rtlCol="0" anchor="ctr" lIns="0" rIns="0" tIns="0" bIns="0" wrap="none"/>
-          <a:lstStyle/>
-          <a:p>
-            <a:pPr algn="ctr"/>
+          <a:bodyPr rtlCol="0" anchor="ctr" lIns="0" rIns="0" tIns="0" bIns="0" wrap="none">
+            <a:noAutofit/>
+          </a:bodyPr>
+          <a:lstStyle/>
+          <a:p>
+            <a:pPr algn="ctr">
+              <a:lnSpc>
+                <a:spcPct val="100000"/>
+              </a:lnSpc>
+            </a:pPr>
             <a:r>
               <a:rPr sz="1000" b="1">
                 <a:solidFill>
@@ -19870,7 +19989,7 @@
         </p:nvSpPr>
         <p:spPr>
           <a:xfrm>
-            <a:off x="1307179" y="1572310"/>
+            <a:off x="7036215" y="1915267"/>
             <a:ext cx="274320" cy="274320"/>
           </a:xfrm>
           <a:prstGeom prst="ellipse">
@@ -19899,10 +20018,16 @@
           </a:fontRef>
         </p:style>
         <p:txBody>
-          <a:bodyPr rtlCol="0" anchor="ctr" lIns="0" rIns="0" tIns="0" bIns="0" wrap="none"/>
-          <a:lstStyle/>
-          <a:p>
-            <a:pPr algn="ctr"/>
+          <a:bodyPr rtlCol="0" anchor="ctr" lIns="0" rIns="0" tIns="0" bIns="0" wrap="none">
+            <a:noAutofit/>
+          </a:bodyPr>
+          <a:lstStyle/>
+          <a:p>
+            <a:pPr algn="ctr">
+              <a:lnSpc>
+                <a:spcPct val="100000"/>
+              </a:lnSpc>
+            </a:pPr>
             <a:r>
               <a:rPr sz="1300" b="1">
                 <a:solidFill>
@@ -19917,14 +20042,53 @@
       </p:sp>
       <p:sp>
         <p:nvSpPr>
-          <p:cNvPr id="10" name="Oval 9"/>
+          <p:cNvPr id="10" name="TextBox 9"/>
+          <p:cNvSpPr txBox="1"/>
+          <p:nvPr/>
+        </p:nvSpPr>
+        <p:spPr>
+          <a:xfrm>
+            <a:off x="8458200" y="1188720"/>
+            <a:ext cx="3291840" cy="219456"/>
+          </a:xfrm>
+          <a:prstGeom prst="rect">
+            <a:avLst/>
+          </a:prstGeom>
+          <a:noFill/>
+        </p:spPr>
+        <p:txBody>
+          <a:bodyPr wrap="square" anchor="t" lIns="0" rIns="0" tIns="0" bIns="0">
+            <a:spAutoFit/>
+          </a:bodyPr>
+          <a:lstStyle/>
+          <a:p>
+            <a:pPr algn="l">
+              <a:lnSpc>
+                <a:spcPct val="115000"/>
+              </a:lnSpc>
+            </a:pPr>
+            <a:r>
+              <a:rPr sz="1000" b="1">
+                <a:solidFill>
+                  <a:srgbClr val="C25B2E"/>
+                </a:solidFill>
+                <a:latin typeface="Calibri"/>
+              </a:rPr>
+              <a:t>ON THIS SCREEN</a:t>
+            </a:r>
+          </a:p>
+        </p:txBody>
+      </p:sp>
+      <p:sp>
+        <p:nvSpPr>
+          <p:cNvPr id="11" name="Oval 10"/>
           <p:cNvSpPr/>
           <p:nvPr/>
         </p:nvSpPr>
         <p:spPr>
           <a:xfrm>
-            <a:off x="7036215" y="1915267"/>
-            <a:ext cx="274320" cy="274320"/>
+            <a:off x="8458200" y="1463040"/>
+            <a:ext cx="210312" cy="210312"/>
           </a:xfrm>
           <a:prstGeom prst="ellipse">
             <a:avLst/>
@@ -19952,109 +20116,23 @@
           </a:fontRef>
         </p:style>
         <p:txBody>
-          <a:bodyPr rtlCol="0" anchor="ctr" lIns="0" rIns="0" tIns="0" bIns="0" wrap="none"/>
-          <a:lstStyle/>
-          <a:p>
-            <a:pPr algn="ctr"/>
-            <a:r>
-              <a:rPr sz="1300" b="1">
+          <a:bodyPr rtlCol="0" anchor="ctr" lIns="0" rIns="0" tIns="0" bIns="0" wrap="none">
+            <a:noAutofit/>
+          </a:bodyPr>
+          <a:lstStyle/>
+          <a:p>
+            <a:pPr algn="ctr">
+              <a:lnSpc>
+                <a:spcPct val="100000"/>
+              </a:lnSpc>
+            </a:pPr>
+            <a:r>
+              <a:rPr sz="1000" b="1">
                 <a:solidFill>
                   <a:srgbClr val="FFFFFF"/>
                 </a:solidFill>
                 <a:latin typeface="Calibri"/>
               </a:rPr>
-              <a:t>2</a:t>
-            </a:r>
-          </a:p>
-        </p:txBody>
-      </p:sp>
-      <p:sp>
-        <p:nvSpPr>
-          <p:cNvPr id="11" name="TextBox 10"/>
-          <p:cNvSpPr txBox="1"/>
-          <p:nvPr/>
-        </p:nvSpPr>
-        <p:spPr>
-          <a:xfrm>
-            <a:off x="8458200" y="1188720"/>
-            <a:ext cx="3291840" cy="219456"/>
-          </a:xfrm>
-          <a:prstGeom prst="rect">
-            <a:avLst/>
-          </a:prstGeom>
-          <a:noFill/>
-        </p:spPr>
-        <p:txBody>
-          <a:bodyPr wrap="square" anchor="t" lIns="0" rIns="0" tIns="0" bIns="0">
-            <a:spAutoFit/>
-          </a:bodyPr>
-          <a:lstStyle/>
-          <a:p>
-            <a:pPr algn="l">
-              <a:lnSpc>
-                <a:spcPct val="115000"/>
-              </a:lnSpc>
-            </a:pPr>
-            <a:r>
-              <a:rPr sz="1000" b="1">
-                <a:solidFill>
-                  <a:srgbClr val="C25B2E"/>
-                </a:solidFill>
-                <a:latin typeface="Calibri"/>
-              </a:rPr>
-              <a:t>ON THIS SCREEN</a:t>
-            </a:r>
-          </a:p>
-        </p:txBody>
-      </p:sp>
-      <p:sp>
-        <p:nvSpPr>
-          <p:cNvPr id="12" name="Oval 11"/>
-          <p:cNvSpPr/>
-          <p:nvPr/>
-        </p:nvSpPr>
-        <p:spPr>
-          <a:xfrm>
-            <a:off x="8458200" y="1463040"/>
-            <a:ext cx="210312" cy="210312"/>
-          </a:xfrm>
-          <a:prstGeom prst="ellipse">
-            <a:avLst/>
-          </a:prstGeom>
-          <a:solidFill>
-            <a:srgbClr val="C25B2E"/>
-          </a:solidFill>
-          <a:ln>
-            <a:noFill/>
-          </a:ln>
-          <a:effectLst/>
-        </p:spPr>
-        <p:style>
-          <a:lnRef idx="1">
-            <a:schemeClr val="accent1"/>
-          </a:lnRef>
-          <a:fillRef idx="3">
-            <a:schemeClr val="accent1"/>
-          </a:fillRef>
-          <a:effectRef idx="2">
-            <a:schemeClr val="accent1"/>
-          </a:effectRef>
-          <a:fontRef idx="minor">
-            <a:schemeClr val="lt1"/>
-          </a:fontRef>
-        </p:style>
-        <p:txBody>
-          <a:bodyPr rtlCol="0" anchor="ctr" lIns="0" rIns="0" tIns="0" bIns="0" wrap="none"/>
-          <a:lstStyle/>
-          <a:p>
-            <a:pPr algn="ctr"/>
-            <a:r>
-              <a:rPr sz="1000" b="1">
-                <a:solidFill>
-                  <a:srgbClr val="FFFFFF"/>
-                </a:solidFill>
-                <a:latin typeface="Calibri"/>
-              </a:rPr>
               <a:t>1</a:t>
             </a:r>
           </a:p>
@@ -20062,7 +20140,7 @@
       </p:sp>
       <p:sp>
         <p:nvSpPr>
-          <p:cNvPr id="13" name="TextBox 12"/>
+          <p:cNvPr id="12" name="TextBox 11"/>
           <p:cNvSpPr txBox="1"/>
           <p:nvPr/>
         </p:nvSpPr>
@@ -20094,112 +20172,20 @@
                 </a:solidFill>
                 <a:latin typeface="Calibri"/>
               </a:rPr>
-              <a:t>Every ticket in your scope</a:t>
-            </a:r>
-          </a:p>
-        </p:txBody>
-      </p:sp>
-      <p:sp>
-        <p:nvSpPr>
-          <p:cNvPr id="14" name="Oval 13"/>
+              <a:t>Filter by status, priority or owner</a:t>
+            </a:r>
+          </a:p>
+        </p:txBody>
+      </p:sp>
+      <p:sp>
+        <p:nvSpPr>
+          <p:cNvPr id="13" name="Rectangle 12"/>
           <p:cNvSpPr/>
           <p:nvPr/>
         </p:nvSpPr>
         <p:spPr>
           <a:xfrm>
-            <a:off x="8458200" y="1723644"/>
-            <a:ext cx="210312" cy="210312"/>
-          </a:xfrm>
-          <a:prstGeom prst="ellipse">
-            <a:avLst/>
-          </a:prstGeom>
-          <a:solidFill>
-            <a:srgbClr val="C25B2E"/>
-          </a:solidFill>
-          <a:ln>
-            <a:noFill/>
-          </a:ln>
-          <a:effectLst/>
-        </p:spPr>
-        <p:style>
-          <a:lnRef idx="1">
-            <a:schemeClr val="accent1"/>
-          </a:lnRef>
-          <a:fillRef idx="3">
-            <a:schemeClr val="accent1"/>
-          </a:fillRef>
-          <a:effectRef idx="2">
-            <a:schemeClr val="accent1"/>
-          </a:effectRef>
-          <a:fontRef idx="minor">
-            <a:schemeClr val="lt1"/>
-          </a:fontRef>
-        </p:style>
-        <p:txBody>
-          <a:bodyPr rtlCol="0" anchor="ctr" lIns="0" rIns="0" tIns="0" bIns="0" wrap="none"/>
-          <a:lstStyle/>
-          <a:p>
-            <a:pPr algn="ctr"/>
-            <a:r>
-              <a:rPr sz="1000" b="1">
-                <a:solidFill>
-                  <a:srgbClr val="FFFFFF"/>
-                </a:solidFill>
-                <a:latin typeface="Calibri"/>
-              </a:rPr>
-              <a:t>2</a:t>
-            </a:r>
-          </a:p>
-        </p:txBody>
-      </p:sp>
-      <p:sp>
-        <p:nvSpPr>
-          <p:cNvPr id="15" name="TextBox 14"/>
-          <p:cNvSpPr txBox="1"/>
-          <p:nvPr/>
-        </p:nvSpPr>
-        <p:spPr>
-          <a:xfrm>
-            <a:off x="8787384" y="1741932"/>
-            <a:ext cx="2962656" cy="169164"/>
-          </a:xfrm>
-          <a:prstGeom prst="rect">
-            <a:avLst/>
-          </a:prstGeom>
-          <a:noFill/>
-        </p:spPr>
-        <p:txBody>
-          <a:bodyPr wrap="square" anchor="t" lIns="0" rIns="0" tIns="0" bIns="0">
-            <a:spAutoFit/>
-          </a:bodyPr>
-          <a:lstStyle/>
-          <a:p>
-            <a:pPr algn="l">
-              <a:lnSpc>
-                <a:spcPct val="105000"/>
-              </a:lnSpc>
-            </a:pPr>
-            <a:r>
-              <a:rPr sz="1050" b="0">
-                <a:solidFill>
-                  <a:srgbClr val="1B2A33"/>
-                </a:solidFill>
-                <a:latin typeface="Calibri"/>
-              </a:rPr>
-              <a:t>Filter by status, priority or owner</a:t>
-            </a:r>
-          </a:p>
-        </p:txBody>
-      </p:sp>
-      <p:sp>
-        <p:nvSpPr>
-          <p:cNvPr id="16" name="Rectangle 15"/>
-          <p:cNvSpPr/>
-          <p:nvPr/>
-        </p:nvSpPr>
-        <p:spPr>
-          <a:xfrm>
-            <a:off x="8458200" y="2130552"/>
+            <a:off x="8458200" y="1869948"/>
             <a:ext cx="45720" cy="502920"/>
           </a:xfrm>
           <a:prstGeom prst="rect">
@@ -20237,13 +20223,13 @@
       </p:sp>
       <p:sp>
         <p:nvSpPr>
-          <p:cNvPr id="17" name="TextBox 16"/>
-          <p:cNvSpPr txBox="1"/>
-          <p:nvPr/>
-        </p:nvSpPr>
-        <p:spPr>
-          <a:xfrm>
-            <a:off x="8622792" y="2130552"/>
+          <p:cNvPr id="14" name="TextBox 13"/>
+          <p:cNvSpPr txBox="1"/>
+          <p:nvPr/>
+        </p:nvSpPr>
+        <p:spPr>
+          <a:xfrm>
+            <a:off x="8622792" y="1869948"/>
             <a:ext cx="3127248" cy="164592"/>
           </a:xfrm>
           <a:prstGeom prst="rect">
@@ -20276,13 +20262,13 @@
       </p:sp>
       <p:sp>
         <p:nvSpPr>
-          <p:cNvPr id="18" name="TextBox 17"/>
-          <p:cNvSpPr txBox="1"/>
-          <p:nvPr/>
-        </p:nvSpPr>
-        <p:spPr>
-          <a:xfrm>
-            <a:off x="8622792" y="2322576"/>
+          <p:cNvPr id="15" name="TextBox 14"/>
+          <p:cNvSpPr txBox="1"/>
+          <p:nvPr/>
+        </p:nvSpPr>
+        <p:spPr>
+          <a:xfrm>
+            <a:off x="8622792" y="2061972"/>
             <a:ext cx="3127248" cy="320040"/>
           </a:xfrm>
           <a:prstGeom prst="rect">
@@ -20315,13 +20301,13 @@
       </p:sp>
       <p:sp>
         <p:nvSpPr>
-          <p:cNvPr id="19" name="Rectangle 18"/>
+          <p:cNvPr id="16" name="Rectangle 15"/>
           <p:cNvSpPr/>
           <p:nvPr/>
         </p:nvSpPr>
         <p:spPr>
           <a:xfrm>
-            <a:off x="8458200" y="2834640"/>
+            <a:off x="8458200" y="2574036"/>
             <a:ext cx="45720" cy="502920"/>
           </a:xfrm>
           <a:prstGeom prst="rect">
@@ -20359,13 +20345,13 @@
       </p:sp>
       <p:sp>
         <p:nvSpPr>
-          <p:cNvPr id="20" name="TextBox 19"/>
-          <p:cNvSpPr txBox="1"/>
-          <p:nvPr/>
-        </p:nvSpPr>
-        <p:spPr>
-          <a:xfrm>
-            <a:off x="8622792" y="2834640"/>
+          <p:cNvPr id="17" name="TextBox 16"/>
+          <p:cNvSpPr txBox="1"/>
+          <p:nvPr/>
+        </p:nvSpPr>
+        <p:spPr>
+          <a:xfrm>
+            <a:off x="8622792" y="2574036"/>
             <a:ext cx="3127248" cy="164592"/>
           </a:xfrm>
           <a:prstGeom prst="rect">
@@ -20398,13 +20384,13 @@
       </p:sp>
       <p:sp>
         <p:nvSpPr>
-          <p:cNvPr id="21" name="TextBox 20"/>
-          <p:cNvSpPr txBox="1"/>
-          <p:nvPr/>
-        </p:nvSpPr>
-        <p:spPr>
-          <a:xfrm>
-            <a:off x="8622792" y="3026664"/>
+          <p:cNvPr id="18" name="TextBox 17"/>
+          <p:cNvSpPr txBox="1"/>
+          <p:nvPr/>
+        </p:nvSpPr>
+        <p:spPr>
+          <a:xfrm>
+            <a:off x="8622792" y="2766060"/>
             <a:ext cx="3127248" cy="320040"/>
           </a:xfrm>
           <a:prstGeom prst="rect">
@@ -20437,13 +20423,13 @@
       </p:sp>
       <p:sp>
         <p:nvSpPr>
-          <p:cNvPr id="22" name="Rectangle 21"/>
+          <p:cNvPr id="19" name="Rectangle 18"/>
           <p:cNvSpPr/>
           <p:nvPr/>
         </p:nvSpPr>
         <p:spPr>
           <a:xfrm>
-            <a:off x="8458200" y="3538728"/>
+            <a:off x="8458200" y="3278124"/>
             <a:ext cx="45720" cy="342900"/>
           </a:xfrm>
           <a:prstGeom prst="rect">
@@ -20481,13 +20467,13 @@
       </p:sp>
       <p:sp>
         <p:nvSpPr>
-          <p:cNvPr id="23" name="TextBox 22"/>
-          <p:cNvSpPr txBox="1"/>
-          <p:nvPr/>
-        </p:nvSpPr>
-        <p:spPr>
-          <a:xfrm>
-            <a:off x="8622792" y="3538728"/>
+          <p:cNvPr id="20" name="TextBox 19"/>
+          <p:cNvSpPr txBox="1"/>
+          <p:nvPr/>
+        </p:nvSpPr>
+        <p:spPr>
+          <a:xfrm>
+            <a:off x="8622792" y="3278124"/>
             <a:ext cx="3127248" cy="164592"/>
           </a:xfrm>
           <a:prstGeom prst="rect">
@@ -20520,13 +20506,13 @@
       </p:sp>
       <p:sp>
         <p:nvSpPr>
-          <p:cNvPr id="24" name="TextBox 23"/>
-          <p:cNvSpPr txBox="1"/>
-          <p:nvPr/>
-        </p:nvSpPr>
-        <p:spPr>
-          <a:xfrm>
-            <a:off x="8622792" y="3730752"/>
+          <p:cNvPr id="21" name="TextBox 20"/>
+          <p:cNvSpPr txBox="1"/>
+          <p:nvPr/>
+        </p:nvSpPr>
+        <p:spPr>
+          <a:xfrm>
+            <a:off x="8622792" y="3470148"/>
             <a:ext cx="3127248" cy="160020"/>
           </a:xfrm>
           <a:prstGeom prst="rect">
@@ -20559,7 +20545,7 @@
       </p:sp>
       <p:sp>
         <p:nvSpPr>
-          <p:cNvPr id="25" name="Rectangle 24"/>
+          <p:cNvPr id="22" name="Rectangle 21"/>
           <p:cNvSpPr/>
           <p:nvPr/>
         </p:nvSpPr>
@@ -20603,7 +20589,7 @@
       </p:sp>
       <p:sp>
         <p:nvSpPr>
-          <p:cNvPr id="26" name="TextBox 25"/>
+          <p:cNvPr id="23" name="TextBox 22"/>
           <p:cNvSpPr txBox="1"/>
           <p:nvPr/>
         </p:nvSpPr>
@@ -20642,7 +20628,7 @@
       </p:sp>
       <p:sp>
         <p:nvSpPr>
-          <p:cNvPr id="27" name="TextBox 26"/>
+          <p:cNvPr id="24" name="TextBox 23"/>
           <p:cNvSpPr txBox="1"/>
           <p:nvPr/>
         </p:nvSpPr>
@@ -21015,10 +21001,16 @@
           </a:fontRef>
         </p:style>
         <p:txBody>
-          <a:bodyPr rtlCol="0" anchor="ctr" lIns="0" rIns="0" tIns="0" bIns="0" wrap="none"/>
-          <a:lstStyle/>
-          <a:p>
-            <a:pPr algn="ctr"/>
+          <a:bodyPr rtlCol="0" anchor="ctr" lIns="0" rIns="0" tIns="0" bIns="0" wrap="none">
+            <a:noAutofit/>
+          </a:bodyPr>
+          <a:lstStyle/>
+          <a:p>
+            <a:pPr algn="ctr">
+              <a:lnSpc>
+                <a:spcPct val="100000"/>
+              </a:lnSpc>
+            </a:pPr>
             <a:r>
               <a:rPr sz="1300" b="1">
                 <a:solidFill>
@@ -21107,10 +21099,16 @@
           </a:fontRef>
         </p:style>
         <p:txBody>
-          <a:bodyPr rtlCol="0" anchor="ctr" lIns="0" rIns="0" tIns="0" bIns="0" wrap="none"/>
-          <a:lstStyle/>
-          <a:p>
-            <a:pPr algn="ctr"/>
+          <a:bodyPr rtlCol="0" anchor="ctr" lIns="0" rIns="0" tIns="0" bIns="0" wrap="none">
+            <a:noAutofit/>
+          </a:bodyPr>
+          <a:lstStyle/>
+          <a:p>
+            <a:pPr algn="ctr">
+              <a:lnSpc>
+                <a:spcPct val="100000"/>
+              </a:lnSpc>
+            </a:pPr>
             <a:r>
               <a:rPr sz="1000" b="1">
                 <a:solidFill>
@@ -21986,10 +21984,16 @@
           </a:fontRef>
         </p:style>
         <p:txBody>
-          <a:bodyPr rtlCol="0" anchor="ctr" lIns="0" rIns="0" tIns="0" bIns="0" wrap="none"/>
-          <a:lstStyle/>
-          <a:p>
-            <a:pPr algn="ctr"/>
+          <a:bodyPr rtlCol="0" anchor="ctr" lIns="0" rIns="0" tIns="0" bIns="0" wrap="none">
+            <a:noAutofit/>
+          </a:bodyPr>
+          <a:lstStyle/>
+          <a:p>
+            <a:pPr algn="ctr">
+              <a:lnSpc>
+                <a:spcPct val="100000"/>
+              </a:lnSpc>
+            </a:pPr>
             <a:r>
               <a:rPr sz="1300" b="1">
                 <a:solidFill>
@@ -22039,10 +22043,16 @@
           </a:fontRef>
         </p:style>
         <p:txBody>
-          <a:bodyPr rtlCol="0" anchor="ctr" lIns="0" rIns="0" tIns="0" bIns="0" wrap="none"/>
-          <a:lstStyle/>
-          <a:p>
-            <a:pPr algn="ctr"/>
+          <a:bodyPr rtlCol="0" anchor="ctr" lIns="0" rIns="0" tIns="0" bIns="0" wrap="none">
+            <a:noAutofit/>
+          </a:bodyPr>
+          <a:lstStyle/>
+          <a:p>
+            <a:pPr algn="ctr">
+              <a:lnSpc>
+                <a:spcPct val="100000"/>
+              </a:lnSpc>
+            </a:pPr>
             <a:r>
               <a:rPr sz="1300" b="1">
                 <a:solidFill>
@@ -22092,10 +22102,16 @@
           </a:fontRef>
         </p:style>
         <p:txBody>
-          <a:bodyPr rtlCol="0" anchor="ctr" lIns="0" rIns="0" tIns="0" bIns="0" wrap="none"/>
-          <a:lstStyle/>
-          <a:p>
-            <a:pPr algn="ctr"/>
+          <a:bodyPr rtlCol="0" anchor="ctr" lIns="0" rIns="0" tIns="0" bIns="0" wrap="none">
+            <a:noAutofit/>
+          </a:bodyPr>
+          <a:lstStyle/>
+          <a:p>
+            <a:pPr algn="ctr">
+              <a:lnSpc>
+                <a:spcPct val="100000"/>
+              </a:lnSpc>
+            </a:pPr>
             <a:r>
               <a:rPr sz="1300" b="1">
                 <a:solidFill>
@@ -22145,10 +22161,16 @@
           </a:fontRef>
         </p:style>
         <p:txBody>
-          <a:bodyPr rtlCol="0" anchor="ctr" lIns="0" rIns="0" tIns="0" bIns="0" wrap="none"/>
-          <a:lstStyle/>
-          <a:p>
-            <a:pPr algn="ctr"/>
+          <a:bodyPr rtlCol="0" anchor="ctr" lIns="0" rIns="0" tIns="0" bIns="0" wrap="none">
+            <a:noAutofit/>
+          </a:bodyPr>
+          <a:lstStyle/>
+          <a:p>
+            <a:pPr algn="ctr">
+              <a:lnSpc>
+                <a:spcPct val="100000"/>
+              </a:lnSpc>
+            </a:pPr>
             <a:r>
               <a:rPr sz="1300" b="1">
                 <a:solidFill>
@@ -22237,10 +22259,16 @@
           </a:fontRef>
         </p:style>
         <p:txBody>
-          <a:bodyPr rtlCol="0" anchor="ctr" lIns="0" rIns="0" tIns="0" bIns="0" wrap="none"/>
-          <a:lstStyle/>
-          <a:p>
-            <a:pPr algn="ctr"/>
+          <a:bodyPr rtlCol="0" anchor="ctr" lIns="0" rIns="0" tIns="0" bIns="0" wrap="none">
+            <a:noAutofit/>
+          </a:bodyPr>
+          <a:lstStyle/>
+          <a:p>
+            <a:pPr algn="ctr">
+              <a:lnSpc>
+                <a:spcPct val="100000"/>
+              </a:lnSpc>
+            </a:pPr>
             <a:r>
               <a:rPr sz="1000" b="1">
                 <a:solidFill>
@@ -22329,10 +22357,16 @@
           </a:fontRef>
         </p:style>
         <p:txBody>
-          <a:bodyPr rtlCol="0" anchor="ctr" lIns="0" rIns="0" tIns="0" bIns="0" wrap="none"/>
-          <a:lstStyle/>
-          <a:p>
-            <a:pPr algn="ctr"/>
+          <a:bodyPr rtlCol="0" anchor="ctr" lIns="0" rIns="0" tIns="0" bIns="0" wrap="none">
+            <a:noAutofit/>
+          </a:bodyPr>
+          <a:lstStyle/>
+          <a:p>
+            <a:pPr algn="ctr">
+              <a:lnSpc>
+                <a:spcPct val="100000"/>
+              </a:lnSpc>
+            </a:pPr>
             <a:r>
               <a:rPr sz="1000" b="1">
                 <a:solidFill>
@@ -22421,10 +22455,16 @@
           </a:fontRef>
         </p:style>
         <p:txBody>
-          <a:bodyPr rtlCol="0" anchor="ctr" lIns="0" rIns="0" tIns="0" bIns="0" wrap="none"/>
-          <a:lstStyle/>
-          <a:p>
-            <a:pPr algn="ctr"/>
+          <a:bodyPr rtlCol="0" anchor="ctr" lIns="0" rIns="0" tIns="0" bIns="0" wrap="none">
+            <a:noAutofit/>
+          </a:bodyPr>
+          <a:lstStyle/>
+          <a:p>
+            <a:pPr algn="ctr">
+              <a:lnSpc>
+                <a:spcPct val="100000"/>
+              </a:lnSpc>
+            </a:pPr>
             <a:r>
               <a:rPr sz="1000" b="1">
                 <a:solidFill>
@@ -22513,10 +22553,16 @@
           </a:fontRef>
         </p:style>
         <p:txBody>
-          <a:bodyPr rtlCol="0" anchor="ctr" lIns="0" rIns="0" tIns="0" bIns="0" wrap="none"/>
-          <a:lstStyle/>
-          <a:p>
-            <a:pPr algn="ctr"/>
+          <a:bodyPr rtlCol="0" anchor="ctr" lIns="0" rIns="0" tIns="0" bIns="0" wrap="none">
+            <a:noAutofit/>
+          </a:bodyPr>
+          <a:lstStyle/>
+          <a:p>
+            <a:pPr algn="ctr">
+              <a:lnSpc>
+                <a:spcPct val="100000"/>
+              </a:lnSpc>
+            </a:pPr>
             <a:r>
               <a:rPr sz="1000" b="1">
                 <a:solidFill>
@@ -23392,10 +23438,16 @@
           </a:fontRef>
         </p:style>
         <p:txBody>
-          <a:bodyPr rtlCol="0" anchor="ctr" lIns="0" rIns="0" tIns="0" bIns="0" wrap="none"/>
-          <a:lstStyle/>
-          <a:p>
-            <a:pPr algn="ctr"/>
+          <a:bodyPr rtlCol="0" anchor="ctr" lIns="0" rIns="0" tIns="0" bIns="0" wrap="none">
+            <a:noAutofit/>
+          </a:bodyPr>
+          <a:lstStyle/>
+          <a:p>
+            <a:pPr algn="ctr">
+              <a:lnSpc>
+                <a:spcPct val="100000"/>
+              </a:lnSpc>
+            </a:pPr>
             <a:r>
               <a:rPr sz="1300" b="1">
                 <a:solidFill>
@@ -23445,10 +23497,16 @@
           </a:fontRef>
         </p:style>
         <p:txBody>
-          <a:bodyPr rtlCol="0" anchor="ctr" lIns="0" rIns="0" tIns="0" bIns="0" wrap="none"/>
-          <a:lstStyle/>
-          <a:p>
-            <a:pPr algn="ctr"/>
+          <a:bodyPr rtlCol="0" anchor="ctr" lIns="0" rIns="0" tIns="0" bIns="0" wrap="none">
+            <a:noAutofit/>
+          </a:bodyPr>
+          <a:lstStyle/>
+          <a:p>
+            <a:pPr algn="ctr">
+              <a:lnSpc>
+                <a:spcPct val="100000"/>
+              </a:lnSpc>
+            </a:pPr>
             <a:r>
               <a:rPr sz="1300" b="1">
                 <a:solidFill>
@@ -23537,10 +23595,16 @@
           </a:fontRef>
         </p:style>
         <p:txBody>
-          <a:bodyPr rtlCol="0" anchor="ctr" lIns="0" rIns="0" tIns="0" bIns="0" wrap="none"/>
-          <a:lstStyle/>
-          <a:p>
-            <a:pPr algn="ctr"/>
+          <a:bodyPr rtlCol="0" anchor="ctr" lIns="0" rIns="0" tIns="0" bIns="0" wrap="none">
+            <a:noAutofit/>
+          </a:bodyPr>
+          <a:lstStyle/>
+          <a:p>
+            <a:pPr algn="ctr">
+              <a:lnSpc>
+                <a:spcPct val="100000"/>
+              </a:lnSpc>
+            </a:pPr>
             <a:r>
               <a:rPr sz="1000" b="1">
                 <a:solidFill>
@@ -23629,10 +23693,16 @@
           </a:fontRef>
         </p:style>
         <p:txBody>
-          <a:bodyPr rtlCol="0" anchor="ctr" lIns="0" rIns="0" tIns="0" bIns="0" wrap="none"/>
-          <a:lstStyle/>
-          <a:p>
-            <a:pPr algn="ctr"/>
+          <a:bodyPr rtlCol="0" anchor="ctr" lIns="0" rIns="0" tIns="0" bIns="0" wrap="none">
+            <a:noAutofit/>
+          </a:bodyPr>
+          <a:lstStyle/>
+          <a:p>
+            <a:pPr algn="ctr">
+              <a:lnSpc>
+                <a:spcPct val="100000"/>
+              </a:lnSpc>
+            </a:pPr>
             <a:r>
               <a:rPr sz="1000" b="1">
                 <a:solidFill>
@@ -25630,10 +25700,16 @@
           </a:fontRef>
         </p:style>
         <p:txBody>
-          <a:bodyPr rtlCol="0" anchor="ctr" lIns="0" rIns="0" tIns="0" bIns="0" wrap="none"/>
-          <a:lstStyle/>
-          <a:p>
-            <a:pPr algn="ctr"/>
+          <a:bodyPr rtlCol="0" anchor="ctr" lIns="0" rIns="0" tIns="0" bIns="0" wrap="none">
+            <a:noAutofit/>
+          </a:bodyPr>
+          <a:lstStyle/>
+          <a:p>
+            <a:pPr algn="ctr">
+              <a:lnSpc>
+                <a:spcPct val="100000"/>
+              </a:lnSpc>
+            </a:pPr>
             <a:r>
               <a:rPr sz="1300" b="1">
                 <a:solidFill>
@@ -25683,10 +25759,16 @@
           </a:fontRef>
         </p:style>
         <p:txBody>
-          <a:bodyPr rtlCol="0" anchor="ctr" lIns="0" rIns="0" tIns="0" bIns="0" wrap="none"/>
-          <a:lstStyle/>
-          <a:p>
-            <a:pPr algn="ctr"/>
+          <a:bodyPr rtlCol="0" anchor="ctr" lIns="0" rIns="0" tIns="0" bIns="0" wrap="none">
+            <a:noAutofit/>
+          </a:bodyPr>
+          <a:lstStyle/>
+          <a:p>
+            <a:pPr algn="ctr">
+              <a:lnSpc>
+                <a:spcPct val="100000"/>
+              </a:lnSpc>
+            </a:pPr>
             <a:r>
               <a:rPr sz="1300" b="1">
                 <a:solidFill>
@@ -25775,10 +25857,16 @@
           </a:fontRef>
         </p:style>
         <p:txBody>
-          <a:bodyPr rtlCol="0" anchor="ctr" lIns="0" rIns="0" tIns="0" bIns="0" wrap="none"/>
-          <a:lstStyle/>
-          <a:p>
-            <a:pPr algn="ctr"/>
+          <a:bodyPr rtlCol="0" anchor="ctr" lIns="0" rIns="0" tIns="0" bIns="0" wrap="none">
+            <a:noAutofit/>
+          </a:bodyPr>
+          <a:lstStyle/>
+          <a:p>
+            <a:pPr algn="ctr">
+              <a:lnSpc>
+                <a:spcPct val="100000"/>
+              </a:lnSpc>
+            </a:pPr>
             <a:r>
               <a:rPr sz="1000" b="1">
                 <a:solidFill>
@@ -25867,10 +25955,16 @@
           </a:fontRef>
         </p:style>
         <p:txBody>
-          <a:bodyPr rtlCol="0" anchor="ctr" lIns="0" rIns="0" tIns="0" bIns="0" wrap="none"/>
-          <a:lstStyle/>
-          <a:p>
-            <a:pPr algn="ctr"/>
+          <a:bodyPr rtlCol="0" anchor="ctr" lIns="0" rIns="0" tIns="0" bIns="0" wrap="none">
+            <a:noAutofit/>
+          </a:bodyPr>
+          <a:lstStyle/>
+          <a:p>
+            <a:pPr algn="ctr">
+              <a:lnSpc>
+                <a:spcPct val="100000"/>
+              </a:lnSpc>
+            </a:pPr>
             <a:r>
               <a:rPr sz="1000" b="1">
                 <a:solidFill>
@@ -26711,197 +26805,13 @@
       </p:pic>
       <p:sp>
         <p:nvSpPr>
-          <p:cNvPr id="9" name="Oval 8"/>
+          <p:cNvPr id="9" name="Rectangle 8"/>
           <p:cNvSpPr/>
           <p:nvPr/>
         </p:nvSpPr>
         <p:spPr>
           <a:xfrm>
-            <a:off x="1307179" y="1572310"/>
-            <a:ext cx="274320" cy="274320"/>
-          </a:xfrm>
-          <a:prstGeom prst="ellipse">
-            <a:avLst/>
-          </a:prstGeom>
-          <a:solidFill>
-            <a:srgbClr val="C25B2E"/>
-          </a:solidFill>
-          <a:ln>
-            <a:noFill/>
-          </a:ln>
-          <a:effectLst/>
-        </p:spPr>
-        <p:style>
-          <a:lnRef idx="1">
-            <a:schemeClr val="accent1"/>
-          </a:lnRef>
-          <a:fillRef idx="3">
-            <a:schemeClr val="accent1"/>
-          </a:fillRef>
-          <a:effectRef idx="2">
-            <a:schemeClr val="accent1"/>
-          </a:effectRef>
-          <a:fontRef idx="minor">
-            <a:schemeClr val="lt1"/>
-          </a:fontRef>
-        </p:style>
-        <p:txBody>
-          <a:bodyPr rtlCol="0" anchor="ctr" lIns="0" rIns="0" tIns="0" bIns="0" wrap="none"/>
-          <a:lstStyle/>
-          <a:p>
-            <a:pPr algn="ctr"/>
-            <a:r>
-              <a:rPr sz="1300" b="1">
-                <a:solidFill>
-                  <a:srgbClr val="FFFFFF"/>
-                </a:solidFill>
-                <a:latin typeface="Calibri"/>
-              </a:rPr>
-              <a:t>1</a:t>
-            </a:r>
-          </a:p>
-        </p:txBody>
-      </p:sp>
-      <p:sp>
-        <p:nvSpPr>
-          <p:cNvPr id="10" name="TextBox 9"/>
-          <p:cNvSpPr txBox="1"/>
-          <p:nvPr/>
-        </p:nvSpPr>
-        <p:spPr>
-          <a:xfrm>
             <a:off x="8458200" y="1188720"/>
-            <a:ext cx="3291840" cy="219456"/>
-          </a:xfrm>
-          <a:prstGeom prst="rect">
-            <a:avLst/>
-          </a:prstGeom>
-          <a:noFill/>
-        </p:spPr>
-        <p:txBody>
-          <a:bodyPr wrap="square" anchor="t" lIns="0" rIns="0" tIns="0" bIns="0">
-            <a:spAutoFit/>
-          </a:bodyPr>
-          <a:lstStyle/>
-          <a:p>
-            <a:pPr algn="l">
-              <a:lnSpc>
-                <a:spcPct val="115000"/>
-              </a:lnSpc>
-            </a:pPr>
-            <a:r>
-              <a:rPr sz="1000" b="1">
-                <a:solidFill>
-                  <a:srgbClr val="C25B2E"/>
-                </a:solidFill>
-                <a:latin typeface="Calibri"/>
-              </a:rPr>
-              <a:t>ON THIS SCREEN</a:t>
-            </a:r>
-          </a:p>
-        </p:txBody>
-      </p:sp>
-      <p:sp>
-        <p:nvSpPr>
-          <p:cNvPr id="11" name="Oval 10"/>
-          <p:cNvSpPr/>
-          <p:nvPr/>
-        </p:nvSpPr>
-        <p:spPr>
-          <a:xfrm>
-            <a:off x="8458200" y="1463040"/>
-            <a:ext cx="210312" cy="210312"/>
-          </a:xfrm>
-          <a:prstGeom prst="ellipse">
-            <a:avLst/>
-          </a:prstGeom>
-          <a:solidFill>
-            <a:srgbClr val="C25B2E"/>
-          </a:solidFill>
-          <a:ln>
-            <a:noFill/>
-          </a:ln>
-          <a:effectLst/>
-        </p:spPr>
-        <p:style>
-          <a:lnRef idx="1">
-            <a:schemeClr val="accent1"/>
-          </a:lnRef>
-          <a:fillRef idx="3">
-            <a:schemeClr val="accent1"/>
-          </a:fillRef>
-          <a:effectRef idx="2">
-            <a:schemeClr val="accent1"/>
-          </a:effectRef>
-          <a:fontRef idx="minor">
-            <a:schemeClr val="lt1"/>
-          </a:fontRef>
-        </p:style>
-        <p:txBody>
-          <a:bodyPr rtlCol="0" anchor="ctr" lIns="0" rIns="0" tIns="0" bIns="0" wrap="none"/>
-          <a:lstStyle/>
-          <a:p>
-            <a:pPr algn="ctr"/>
-            <a:r>
-              <a:rPr sz="1000" b="1">
-                <a:solidFill>
-                  <a:srgbClr val="FFFFFF"/>
-                </a:solidFill>
-                <a:latin typeface="Calibri"/>
-              </a:rPr>
-              <a:t>1</a:t>
-            </a:r>
-          </a:p>
-        </p:txBody>
-      </p:sp>
-      <p:sp>
-        <p:nvSpPr>
-          <p:cNvPr id="12" name="TextBox 11"/>
-          <p:cNvSpPr txBox="1"/>
-          <p:nvPr/>
-        </p:nvSpPr>
-        <p:spPr>
-          <a:xfrm>
-            <a:off x="8787384" y="1481328"/>
-            <a:ext cx="2962656" cy="169164"/>
-          </a:xfrm>
-          <a:prstGeom prst="rect">
-            <a:avLst/>
-          </a:prstGeom>
-          <a:noFill/>
-        </p:spPr>
-        <p:txBody>
-          <a:bodyPr wrap="square" anchor="t" lIns="0" rIns="0" tIns="0" bIns="0">
-            <a:spAutoFit/>
-          </a:bodyPr>
-          <a:lstStyle/>
-          <a:p>
-            <a:pPr algn="l">
-              <a:lnSpc>
-                <a:spcPct val="105000"/>
-              </a:lnSpc>
-            </a:pPr>
-            <a:r>
-              <a:rPr sz="1050" b="0">
-                <a:solidFill>
-                  <a:srgbClr val="1B2A33"/>
-                </a:solidFill>
-                <a:latin typeface="Calibri"/>
-              </a:rPr>
-              <a:t>On time, at risk, breached</a:t>
-            </a:r>
-          </a:p>
-        </p:txBody>
-      </p:sp>
-      <p:sp>
-        <p:nvSpPr>
-          <p:cNvPr id="13" name="Rectangle 12"/>
-          <p:cNvSpPr/>
-          <p:nvPr/>
-        </p:nvSpPr>
-        <p:spPr>
-          <a:xfrm>
-            <a:off x="8458200" y="1869948"/>
             <a:ext cx="45720" cy="502920"/>
           </a:xfrm>
           <a:prstGeom prst="rect">
@@ -26939,13 +26849,13 @@
       </p:sp>
       <p:sp>
         <p:nvSpPr>
-          <p:cNvPr id="14" name="TextBox 13"/>
-          <p:cNvSpPr txBox="1"/>
-          <p:nvPr/>
-        </p:nvSpPr>
-        <p:spPr>
-          <a:xfrm>
-            <a:off x="8622792" y="1869948"/>
+          <p:cNvPr id="10" name="TextBox 9"/>
+          <p:cNvSpPr txBox="1"/>
+          <p:nvPr/>
+        </p:nvSpPr>
+        <p:spPr>
+          <a:xfrm>
+            <a:off x="8622792" y="1188720"/>
             <a:ext cx="3127248" cy="164592"/>
           </a:xfrm>
           <a:prstGeom prst="rect">
@@ -26978,13 +26888,13 @@
       </p:sp>
       <p:sp>
         <p:nvSpPr>
-          <p:cNvPr id="15" name="TextBox 14"/>
-          <p:cNvSpPr txBox="1"/>
-          <p:nvPr/>
-        </p:nvSpPr>
-        <p:spPr>
-          <a:xfrm>
-            <a:off x="8622792" y="2061972"/>
+          <p:cNvPr id="11" name="TextBox 10"/>
+          <p:cNvSpPr txBox="1"/>
+          <p:nvPr/>
+        </p:nvSpPr>
+        <p:spPr>
+          <a:xfrm>
+            <a:off x="8622792" y="1380744"/>
             <a:ext cx="3127248" cy="320040"/>
           </a:xfrm>
           <a:prstGeom prst="rect">
@@ -27017,13 +26927,13 @@
       </p:sp>
       <p:sp>
         <p:nvSpPr>
-          <p:cNvPr id="16" name="Rectangle 15"/>
+          <p:cNvPr id="12" name="Rectangle 11"/>
           <p:cNvSpPr/>
           <p:nvPr/>
         </p:nvSpPr>
         <p:spPr>
           <a:xfrm>
-            <a:off x="8458200" y="2574036"/>
+            <a:off x="8458200" y="1892808"/>
             <a:ext cx="45720" cy="822960"/>
           </a:xfrm>
           <a:prstGeom prst="rect">
@@ -27061,13 +26971,13 @@
       </p:sp>
       <p:sp>
         <p:nvSpPr>
-          <p:cNvPr id="17" name="TextBox 16"/>
-          <p:cNvSpPr txBox="1"/>
-          <p:nvPr/>
-        </p:nvSpPr>
-        <p:spPr>
-          <a:xfrm>
-            <a:off x="8622792" y="2574036"/>
+          <p:cNvPr id="13" name="TextBox 12"/>
+          <p:cNvSpPr txBox="1"/>
+          <p:nvPr/>
+        </p:nvSpPr>
+        <p:spPr>
+          <a:xfrm>
+            <a:off x="8622792" y="1892808"/>
             <a:ext cx="3127248" cy="164592"/>
           </a:xfrm>
           <a:prstGeom prst="rect">
@@ -27100,13 +27010,13 @@
       </p:sp>
       <p:sp>
         <p:nvSpPr>
-          <p:cNvPr id="18" name="TextBox 17"/>
-          <p:cNvSpPr txBox="1"/>
-          <p:nvPr/>
-        </p:nvSpPr>
-        <p:spPr>
-          <a:xfrm>
-            <a:off x="8622792" y="2766060"/>
+          <p:cNvPr id="14" name="TextBox 13"/>
+          <p:cNvSpPr txBox="1"/>
+          <p:nvPr/>
+        </p:nvSpPr>
+        <p:spPr>
+          <a:xfrm>
+            <a:off x="8622792" y="2084832"/>
             <a:ext cx="3127248" cy="640080"/>
           </a:xfrm>
           <a:prstGeom prst="rect">
@@ -27139,13 +27049,13 @@
       </p:sp>
       <p:sp>
         <p:nvSpPr>
-          <p:cNvPr id="19" name="Rectangle 18"/>
+          <p:cNvPr id="15" name="Rectangle 14"/>
           <p:cNvSpPr/>
           <p:nvPr/>
         </p:nvSpPr>
         <p:spPr>
           <a:xfrm>
-            <a:off x="8458200" y="3598164"/>
+            <a:off x="8458200" y="2916936"/>
             <a:ext cx="45720" cy="342900"/>
           </a:xfrm>
           <a:prstGeom prst="rect">
@@ -27183,13 +27093,13 @@
       </p:sp>
       <p:sp>
         <p:nvSpPr>
-          <p:cNvPr id="20" name="TextBox 19"/>
-          <p:cNvSpPr txBox="1"/>
-          <p:nvPr/>
-        </p:nvSpPr>
-        <p:spPr>
-          <a:xfrm>
-            <a:off x="8622792" y="3598164"/>
+          <p:cNvPr id="16" name="TextBox 15"/>
+          <p:cNvSpPr txBox="1"/>
+          <p:nvPr/>
+        </p:nvSpPr>
+        <p:spPr>
+          <a:xfrm>
+            <a:off x="8622792" y="2916936"/>
             <a:ext cx="3127248" cy="164592"/>
           </a:xfrm>
           <a:prstGeom prst="rect">
@@ -27222,13 +27132,13 @@
       </p:sp>
       <p:sp>
         <p:nvSpPr>
-          <p:cNvPr id="21" name="TextBox 20"/>
-          <p:cNvSpPr txBox="1"/>
-          <p:nvPr/>
-        </p:nvSpPr>
-        <p:spPr>
-          <a:xfrm>
-            <a:off x="8622792" y="3790188"/>
+          <p:cNvPr id="17" name="TextBox 16"/>
+          <p:cNvSpPr txBox="1"/>
+          <p:nvPr/>
+        </p:nvSpPr>
+        <p:spPr>
+          <a:xfrm>
+            <a:off x="8622792" y="3108960"/>
             <a:ext cx="3127248" cy="160020"/>
           </a:xfrm>
           <a:prstGeom prst="rect">
@@ -27261,7 +27171,7 @@
       </p:sp>
       <p:sp>
         <p:nvSpPr>
-          <p:cNvPr id="22" name="Rectangle 21"/>
+          <p:cNvPr id="18" name="Rectangle 17"/>
           <p:cNvSpPr/>
           <p:nvPr/>
         </p:nvSpPr>
@@ -27305,7 +27215,7 @@
       </p:sp>
       <p:sp>
         <p:nvSpPr>
-          <p:cNvPr id="23" name="TextBox 22"/>
+          <p:cNvPr id="19" name="TextBox 18"/>
           <p:cNvSpPr txBox="1"/>
           <p:nvPr/>
         </p:nvSpPr>
@@ -27344,7 +27254,7 @@
       </p:sp>
       <p:sp>
         <p:nvSpPr>
-          <p:cNvPr id="24" name="TextBox 23"/>
+          <p:cNvPr id="20" name="TextBox 19"/>
           <p:cNvSpPr txBox="1"/>
           <p:nvPr/>
         </p:nvSpPr>
@@ -27991,197 +27901,13 @@
       </p:pic>
       <p:sp>
         <p:nvSpPr>
-          <p:cNvPr id="9" name="Oval 8"/>
+          <p:cNvPr id="9" name="Rectangle 8"/>
           <p:cNvSpPr/>
           <p:nvPr/>
         </p:nvSpPr>
         <p:spPr>
           <a:xfrm>
-            <a:off x="1307179" y="1572310"/>
-            <a:ext cx="274320" cy="274320"/>
-          </a:xfrm>
-          <a:prstGeom prst="ellipse">
-            <a:avLst/>
-          </a:prstGeom>
-          <a:solidFill>
-            <a:srgbClr val="C25B2E"/>
-          </a:solidFill>
-          <a:ln>
-            <a:noFill/>
-          </a:ln>
-          <a:effectLst/>
-        </p:spPr>
-        <p:style>
-          <a:lnRef idx="1">
-            <a:schemeClr val="accent1"/>
-          </a:lnRef>
-          <a:fillRef idx="3">
-            <a:schemeClr val="accent1"/>
-          </a:fillRef>
-          <a:effectRef idx="2">
-            <a:schemeClr val="accent1"/>
-          </a:effectRef>
-          <a:fontRef idx="minor">
-            <a:schemeClr val="lt1"/>
-          </a:fontRef>
-        </p:style>
-        <p:txBody>
-          <a:bodyPr rtlCol="0" anchor="ctr" lIns="0" rIns="0" tIns="0" bIns="0" wrap="none"/>
-          <a:lstStyle/>
-          <a:p>
-            <a:pPr algn="ctr"/>
-            <a:r>
-              <a:rPr sz="1300" b="1">
-                <a:solidFill>
-                  <a:srgbClr val="FFFFFF"/>
-                </a:solidFill>
-                <a:latin typeface="Calibri"/>
-              </a:rPr>
-              <a:t>1</a:t>
-            </a:r>
-          </a:p>
-        </p:txBody>
-      </p:sp>
-      <p:sp>
-        <p:nvSpPr>
-          <p:cNvPr id="10" name="TextBox 9"/>
-          <p:cNvSpPr txBox="1"/>
-          <p:nvPr/>
-        </p:nvSpPr>
-        <p:spPr>
-          <a:xfrm>
             <a:off x="8458200" y="1188720"/>
-            <a:ext cx="3291840" cy="219456"/>
-          </a:xfrm>
-          <a:prstGeom prst="rect">
-            <a:avLst/>
-          </a:prstGeom>
-          <a:noFill/>
-        </p:spPr>
-        <p:txBody>
-          <a:bodyPr wrap="square" anchor="t" lIns="0" rIns="0" tIns="0" bIns="0">
-            <a:spAutoFit/>
-          </a:bodyPr>
-          <a:lstStyle/>
-          <a:p>
-            <a:pPr algn="l">
-              <a:lnSpc>
-                <a:spcPct val="115000"/>
-              </a:lnSpc>
-            </a:pPr>
-            <a:r>
-              <a:rPr sz="1000" b="1">
-                <a:solidFill>
-                  <a:srgbClr val="C25B2E"/>
-                </a:solidFill>
-                <a:latin typeface="Calibri"/>
-              </a:rPr>
-              <a:t>ON THIS SCREEN</a:t>
-            </a:r>
-          </a:p>
-        </p:txBody>
-      </p:sp>
-      <p:sp>
-        <p:nvSpPr>
-          <p:cNvPr id="11" name="Oval 10"/>
-          <p:cNvSpPr/>
-          <p:nvPr/>
-        </p:nvSpPr>
-        <p:spPr>
-          <a:xfrm>
-            <a:off x="8458200" y="1463040"/>
-            <a:ext cx="210312" cy="210312"/>
-          </a:xfrm>
-          <a:prstGeom prst="ellipse">
-            <a:avLst/>
-          </a:prstGeom>
-          <a:solidFill>
-            <a:srgbClr val="C25B2E"/>
-          </a:solidFill>
-          <a:ln>
-            <a:noFill/>
-          </a:ln>
-          <a:effectLst/>
-        </p:spPr>
-        <p:style>
-          <a:lnRef idx="1">
-            <a:schemeClr val="accent1"/>
-          </a:lnRef>
-          <a:fillRef idx="3">
-            <a:schemeClr val="accent1"/>
-          </a:fillRef>
-          <a:effectRef idx="2">
-            <a:schemeClr val="accent1"/>
-          </a:effectRef>
-          <a:fontRef idx="minor">
-            <a:schemeClr val="lt1"/>
-          </a:fontRef>
-        </p:style>
-        <p:txBody>
-          <a:bodyPr rtlCol="0" anchor="ctr" lIns="0" rIns="0" tIns="0" bIns="0" wrap="none"/>
-          <a:lstStyle/>
-          <a:p>
-            <a:pPr algn="ctr"/>
-            <a:r>
-              <a:rPr sz="1000" b="1">
-                <a:solidFill>
-                  <a:srgbClr val="FFFFFF"/>
-                </a:solidFill>
-                <a:latin typeface="Calibri"/>
-              </a:rPr>
-              <a:t>1</a:t>
-            </a:r>
-          </a:p>
-        </p:txBody>
-      </p:sp>
-      <p:sp>
-        <p:nvSpPr>
-          <p:cNvPr id="12" name="TextBox 11"/>
-          <p:cNvSpPr txBox="1"/>
-          <p:nvPr/>
-        </p:nvSpPr>
-        <p:spPr>
-          <a:xfrm>
-            <a:off x="8787384" y="1481328"/>
-            <a:ext cx="2962656" cy="169164"/>
-          </a:xfrm>
-          <a:prstGeom prst="rect">
-            <a:avLst/>
-          </a:prstGeom>
-          <a:noFill/>
-        </p:spPr>
-        <p:txBody>
-          <a:bodyPr wrap="square" anchor="t" lIns="0" rIns="0" tIns="0" bIns="0">
-            <a:spAutoFit/>
-          </a:bodyPr>
-          <a:lstStyle/>
-          <a:p>
-            <a:pPr algn="l">
-              <a:lnSpc>
-                <a:spcPct val="105000"/>
-              </a:lnSpc>
-            </a:pPr>
-            <a:r>
-              <a:rPr sz="1050" b="0">
-                <a:solidFill>
-                  <a:srgbClr val="1B2A33"/>
-                </a:solidFill>
-                <a:latin typeface="Calibri"/>
-              </a:rPr>
-              <a:t>Escalation events, newest first</a:t>
-            </a:r>
-          </a:p>
-        </p:txBody>
-      </p:sp>
-      <p:sp>
-        <p:nvSpPr>
-          <p:cNvPr id="13" name="Rectangle 12"/>
-          <p:cNvSpPr/>
-          <p:nvPr/>
-        </p:nvSpPr>
-        <p:spPr>
-          <a:xfrm>
-            <a:off x="8458200" y="1869948"/>
             <a:ext cx="45720" cy="502920"/>
           </a:xfrm>
           <a:prstGeom prst="rect">
@@ -28219,13 +27945,13 @@
       </p:sp>
       <p:sp>
         <p:nvSpPr>
-          <p:cNvPr id="14" name="TextBox 13"/>
-          <p:cNvSpPr txBox="1"/>
-          <p:nvPr/>
-        </p:nvSpPr>
-        <p:spPr>
-          <a:xfrm>
-            <a:off x="8622792" y="1869948"/>
+          <p:cNvPr id="10" name="TextBox 9"/>
+          <p:cNvSpPr txBox="1"/>
+          <p:nvPr/>
+        </p:nvSpPr>
+        <p:spPr>
+          <a:xfrm>
+            <a:off x="8622792" y="1188720"/>
             <a:ext cx="3127248" cy="164592"/>
           </a:xfrm>
           <a:prstGeom prst="rect">
@@ -28258,13 +27984,13 @@
       </p:sp>
       <p:sp>
         <p:nvSpPr>
-          <p:cNvPr id="15" name="TextBox 14"/>
-          <p:cNvSpPr txBox="1"/>
-          <p:nvPr/>
-        </p:nvSpPr>
-        <p:spPr>
-          <a:xfrm>
-            <a:off x="8622792" y="2061972"/>
+          <p:cNvPr id="11" name="TextBox 10"/>
+          <p:cNvSpPr txBox="1"/>
+          <p:nvPr/>
+        </p:nvSpPr>
+        <p:spPr>
+          <a:xfrm>
+            <a:off x="8622792" y="1380744"/>
             <a:ext cx="3127248" cy="320040"/>
           </a:xfrm>
           <a:prstGeom prst="rect">
@@ -28297,13 +28023,13 @@
       </p:sp>
       <p:sp>
         <p:nvSpPr>
-          <p:cNvPr id="16" name="Rectangle 15"/>
+          <p:cNvPr id="12" name="Rectangle 11"/>
           <p:cNvSpPr/>
           <p:nvPr/>
         </p:nvSpPr>
         <p:spPr>
           <a:xfrm>
-            <a:off x="8458200" y="2574036"/>
+            <a:off x="8458200" y="1892808"/>
             <a:ext cx="45720" cy="822960"/>
           </a:xfrm>
           <a:prstGeom prst="rect">
@@ -28341,13 +28067,13 @@
       </p:sp>
       <p:sp>
         <p:nvSpPr>
-          <p:cNvPr id="17" name="TextBox 16"/>
-          <p:cNvSpPr txBox="1"/>
-          <p:nvPr/>
-        </p:nvSpPr>
-        <p:spPr>
-          <a:xfrm>
-            <a:off x="8622792" y="2574036"/>
+          <p:cNvPr id="13" name="TextBox 12"/>
+          <p:cNvSpPr txBox="1"/>
+          <p:nvPr/>
+        </p:nvSpPr>
+        <p:spPr>
+          <a:xfrm>
+            <a:off x="8622792" y="1892808"/>
             <a:ext cx="3127248" cy="164592"/>
           </a:xfrm>
           <a:prstGeom prst="rect">
@@ -28380,13 +28106,13 @@
       </p:sp>
       <p:sp>
         <p:nvSpPr>
-          <p:cNvPr id="18" name="TextBox 17"/>
-          <p:cNvSpPr txBox="1"/>
-          <p:nvPr/>
-        </p:nvSpPr>
-        <p:spPr>
-          <a:xfrm>
-            <a:off x="8622792" y="2766060"/>
+          <p:cNvPr id="14" name="TextBox 13"/>
+          <p:cNvSpPr txBox="1"/>
+          <p:nvPr/>
+        </p:nvSpPr>
+        <p:spPr>
+          <a:xfrm>
+            <a:off x="8622792" y="2084832"/>
             <a:ext cx="3127248" cy="640080"/>
           </a:xfrm>
           <a:prstGeom prst="rect">
@@ -28419,13 +28145,13 @@
       </p:sp>
       <p:sp>
         <p:nvSpPr>
-          <p:cNvPr id="19" name="Rectangle 18"/>
+          <p:cNvPr id="15" name="Rectangle 14"/>
           <p:cNvSpPr/>
           <p:nvPr/>
         </p:nvSpPr>
         <p:spPr>
           <a:xfrm>
-            <a:off x="8458200" y="3598164"/>
+            <a:off x="8458200" y="2916936"/>
             <a:ext cx="45720" cy="502920"/>
           </a:xfrm>
           <a:prstGeom prst="rect">
@@ -28463,13 +28189,13 @@
       </p:sp>
       <p:sp>
         <p:nvSpPr>
-          <p:cNvPr id="20" name="TextBox 19"/>
-          <p:cNvSpPr txBox="1"/>
-          <p:nvPr/>
-        </p:nvSpPr>
-        <p:spPr>
-          <a:xfrm>
-            <a:off x="8622792" y="3598164"/>
+          <p:cNvPr id="16" name="TextBox 15"/>
+          <p:cNvSpPr txBox="1"/>
+          <p:nvPr/>
+        </p:nvSpPr>
+        <p:spPr>
+          <a:xfrm>
+            <a:off x="8622792" y="2916936"/>
             <a:ext cx="3127248" cy="164592"/>
           </a:xfrm>
           <a:prstGeom prst="rect">
@@ -28502,13 +28228,13 @@
       </p:sp>
       <p:sp>
         <p:nvSpPr>
-          <p:cNvPr id="21" name="TextBox 20"/>
-          <p:cNvSpPr txBox="1"/>
-          <p:nvPr/>
-        </p:nvSpPr>
-        <p:spPr>
-          <a:xfrm>
-            <a:off x="8622792" y="3790188"/>
+          <p:cNvPr id="17" name="TextBox 16"/>
+          <p:cNvSpPr txBox="1"/>
+          <p:nvPr/>
+        </p:nvSpPr>
+        <p:spPr>
+          <a:xfrm>
+            <a:off x="8622792" y="3108960"/>
             <a:ext cx="3127248" cy="320040"/>
           </a:xfrm>
           <a:prstGeom prst="rect">
@@ -28541,7 +28267,7 @@
       </p:sp>
       <p:sp>
         <p:nvSpPr>
-          <p:cNvPr id="22" name="Rectangle 21"/>
+          <p:cNvPr id="18" name="Rectangle 17"/>
           <p:cNvSpPr/>
           <p:nvPr/>
         </p:nvSpPr>
@@ -28585,7 +28311,7 @@
       </p:sp>
       <p:sp>
         <p:nvSpPr>
-          <p:cNvPr id="23" name="TextBox 22"/>
+          <p:cNvPr id="19" name="TextBox 18"/>
           <p:cNvSpPr txBox="1"/>
           <p:nvPr/>
         </p:nvSpPr>
@@ -28624,7 +28350,7 @@
       </p:sp>
       <p:sp>
         <p:nvSpPr>
-          <p:cNvPr id="24" name="TextBox 23"/>
+          <p:cNvPr id="20" name="TextBox 19"/>
           <p:cNvSpPr txBox="1"/>
           <p:nvPr/>
         </p:nvSpPr>
@@ -28997,10 +28723,16 @@
           </a:fontRef>
         </p:style>
         <p:txBody>
-          <a:bodyPr rtlCol="0" anchor="ctr" lIns="0" rIns="0" tIns="0" bIns="0" wrap="none"/>
-          <a:lstStyle/>
-          <a:p>
-            <a:pPr algn="ctr"/>
+          <a:bodyPr rtlCol="0" anchor="ctr" lIns="0" rIns="0" tIns="0" bIns="0" wrap="none">
+            <a:noAutofit/>
+          </a:bodyPr>
+          <a:lstStyle/>
+          <a:p>
+            <a:pPr algn="ctr">
+              <a:lnSpc>
+                <a:spcPct val="100000"/>
+              </a:lnSpc>
+            </a:pPr>
             <a:r>
               <a:rPr sz="1300" b="1">
                 <a:solidFill>
@@ -29050,10 +28782,16 @@
           </a:fontRef>
         </p:style>
         <p:txBody>
-          <a:bodyPr rtlCol="0" anchor="ctr" lIns="0" rIns="0" tIns="0" bIns="0" wrap="none"/>
-          <a:lstStyle/>
-          <a:p>
-            <a:pPr algn="ctr"/>
+          <a:bodyPr rtlCol="0" anchor="ctr" lIns="0" rIns="0" tIns="0" bIns="0" wrap="none">
+            <a:noAutofit/>
+          </a:bodyPr>
+          <a:lstStyle/>
+          <a:p>
+            <a:pPr algn="ctr">
+              <a:lnSpc>
+                <a:spcPct val="100000"/>
+              </a:lnSpc>
+            </a:pPr>
             <a:r>
               <a:rPr sz="1300" b="1">
                 <a:solidFill>
@@ -29142,10 +28880,16 @@
           </a:fontRef>
         </p:style>
         <p:txBody>
-          <a:bodyPr rtlCol="0" anchor="ctr" lIns="0" rIns="0" tIns="0" bIns="0" wrap="none"/>
-          <a:lstStyle/>
-          <a:p>
-            <a:pPr algn="ctr"/>
+          <a:bodyPr rtlCol="0" anchor="ctr" lIns="0" rIns="0" tIns="0" bIns="0" wrap="none">
+            <a:noAutofit/>
+          </a:bodyPr>
+          <a:lstStyle/>
+          <a:p>
+            <a:pPr algn="ctr">
+              <a:lnSpc>
+                <a:spcPct val="100000"/>
+              </a:lnSpc>
+            </a:pPr>
             <a:r>
               <a:rPr sz="1000" b="1">
                 <a:solidFill>
@@ -29234,10 +28978,16 @@
           </a:fontRef>
         </p:style>
         <p:txBody>
-          <a:bodyPr rtlCol="0" anchor="ctr" lIns="0" rIns="0" tIns="0" bIns="0" wrap="none"/>
-          <a:lstStyle/>
-          <a:p>
-            <a:pPr algn="ctr"/>
+          <a:bodyPr rtlCol="0" anchor="ctr" lIns="0" rIns="0" tIns="0" bIns="0" wrap="none">
+            <a:noAutofit/>
+          </a:bodyPr>
+          <a:lstStyle/>
+          <a:p>
+            <a:pPr algn="ctr">
+              <a:lnSpc>
+                <a:spcPct val="100000"/>
+              </a:lnSpc>
+            </a:pPr>
             <a:r>
               <a:rPr sz="1000" b="1">
                 <a:solidFill>
@@ -30113,10 +29863,16 @@
           </a:fontRef>
         </p:style>
         <p:txBody>
-          <a:bodyPr rtlCol="0" anchor="ctr" lIns="0" rIns="0" tIns="0" bIns="0" wrap="none"/>
-          <a:lstStyle/>
-          <a:p>
-            <a:pPr algn="ctr"/>
+          <a:bodyPr rtlCol="0" anchor="ctr" lIns="0" rIns="0" tIns="0" bIns="0" wrap="none">
+            <a:noAutofit/>
+          </a:bodyPr>
+          <a:lstStyle/>
+          <a:p>
+            <a:pPr algn="ctr">
+              <a:lnSpc>
+                <a:spcPct val="100000"/>
+              </a:lnSpc>
+            </a:pPr>
             <a:r>
               <a:rPr sz="1300" b="1">
                 <a:solidFill>
@@ -30166,10 +29922,16 @@
           </a:fontRef>
         </p:style>
         <p:txBody>
-          <a:bodyPr rtlCol="0" anchor="ctr" lIns="0" rIns="0" tIns="0" bIns="0" wrap="none"/>
-          <a:lstStyle/>
-          <a:p>
-            <a:pPr algn="ctr"/>
+          <a:bodyPr rtlCol="0" anchor="ctr" lIns="0" rIns="0" tIns="0" bIns="0" wrap="none">
+            <a:noAutofit/>
+          </a:bodyPr>
+          <a:lstStyle/>
+          <a:p>
+            <a:pPr algn="ctr">
+              <a:lnSpc>
+                <a:spcPct val="100000"/>
+              </a:lnSpc>
+            </a:pPr>
             <a:r>
               <a:rPr sz="1300" b="1">
                 <a:solidFill>
@@ -30219,10 +29981,16 @@
           </a:fontRef>
         </p:style>
         <p:txBody>
-          <a:bodyPr rtlCol="0" anchor="ctr" lIns="0" rIns="0" tIns="0" bIns="0" wrap="none"/>
-          <a:lstStyle/>
-          <a:p>
-            <a:pPr algn="ctr"/>
+          <a:bodyPr rtlCol="0" anchor="ctr" lIns="0" rIns="0" tIns="0" bIns="0" wrap="none">
+            <a:noAutofit/>
+          </a:bodyPr>
+          <a:lstStyle/>
+          <a:p>
+            <a:pPr algn="ctr">
+              <a:lnSpc>
+                <a:spcPct val="100000"/>
+              </a:lnSpc>
+            </a:pPr>
             <a:r>
               <a:rPr sz="1300" b="1">
                 <a:solidFill>
@@ -30311,10 +30079,16 @@
           </a:fontRef>
         </p:style>
         <p:txBody>
-          <a:bodyPr rtlCol="0" anchor="ctr" lIns="0" rIns="0" tIns="0" bIns="0" wrap="none"/>
-          <a:lstStyle/>
-          <a:p>
-            <a:pPr algn="ctr"/>
+          <a:bodyPr rtlCol="0" anchor="ctr" lIns="0" rIns="0" tIns="0" bIns="0" wrap="none">
+            <a:noAutofit/>
+          </a:bodyPr>
+          <a:lstStyle/>
+          <a:p>
+            <a:pPr algn="ctr">
+              <a:lnSpc>
+                <a:spcPct val="100000"/>
+              </a:lnSpc>
+            </a:pPr>
             <a:r>
               <a:rPr sz="1000" b="1">
                 <a:solidFill>
@@ -30403,10 +30177,16 @@
           </a:fontRef>
         </p:style>
         <p:txBody>
-          <a:bodyPr rtlCol="0" anchor="ctr" lIns="0" rIns="0" tIns="0" bIns="0" wrap="none"/>
-          <a:lstStyle/>
-          <a:p>
-            <a:pPr algn="ctr"/>
+          <a:bodyPr rtlCol="0" anchor="ctr" lIns="0" rIns="0" tIns="0" bIns="0" wrap="none">
+            <a:noAutofit/>
+          </a:bodyPr>
+          <a:lstStyle/>
+          <a:p>
+            <a:pPr algn="ctr">
+              <a:lnSpc>
+                <a:spcPct val="100000"/>
+              </a:lnSpc>
+            </a:pPr>
             <a:r>
               <a:rPr sz="1000" b="1">
                 <a:solidFill>
@@ -30495,10 +30275,16 @@
           </a:fontRef>
         </p:style>
         <p:txBody>
-          <a:bodyPr rtlCol="0" anchor="ctr" lIns="0" rIns="0" tIns="0" bIns="0" wrap="none"/>
-          <a:lstStyle/>
-          <a:p>
-            <a:pPr algn="ctr"/>
+          <a:bodyPr rtlCol="0" anchor="ctr" lIns="0" rIns="0" tIns="0" bIns="0" wrap="none">
+            <a:noAutofit/>
+          </a:bodyPr>
+          <a:lstStyle/>
+          <a:p>
+            <a:pPr algn="ctr">
+              <a:lnSpc>
+                <a:spcPct val="100000"/>
+              </a:lnSpc>
+            </a:pPr>
             <a:r>
               <a:rPr sz="1000" b="1">
                 <a:solidFill>
@@ -34391,7 +34177,7 @@
         </p:nvSpPr>
         <p:spPr>
           <a:xfrm>
-            <a:off x="1307179" y="1572310"/>
+            <a:off x="7094508" y="1607286"/>
             <a:ext cx="274320" cy="274320"/>
           </a:xfrm>
           <a:prstGeom prst="ellipse">
@@ -34420,10 +34206,16 @@
           </a:fontRef>
         </p:style>
         <p:txBody>
-          <a:bodyPr rtlCol="0" anchor="ctr" lIns="0" rIns="0" tIns="0" bIns="0" wrap="none"/>
-          <a:lstStyle/>
-          <a:p>
-            <a:pPr algn="ctr"/>
+          <a:bodyPr rtlCol="0" anchor="ctr" lIns="0" rIns="0" tIns="0" bIns="0" wrap="none">
+            <a:noAutofit/>
+          </a:bodyPr>
+          <a:lstStyle/>
+          <a:p>
+            <a:pPr algn="ctr">
+              <a:lnSpc>
+                <a:spcPct val="100000"/>
+              </a:lnSpc>
+            </a:pPr>
             <a:r>
               <a:rPr sz="1300" b="1">
                 <a:solidFill>
@@ -34438,14 +34230,53 @@
       </p:sp>
       <p:sp>
         <p:nvSpPr>
-          <p:cNvPr id="10" name="Oval 9"/>
+          <p:cNvPr id="10" name="TextBox 9"/>
+          <p:cNvSpPr txBox="1"/>
+          <p:nvPr/>
+        </p:nvSpPr>
+        <p:spPr>
+          <a:xfrm>
+            <a:off x="8458200" y="1188720"/>
+            <a:ext cx="3291840" cy="219456"/>
+          </a:xfrm>
+          <a:prstGeom prst="rect">
+            <a:avLst/>
+          </a:prstGeom>
+          <a:noFill/>
+        </p:spPr>
+        <p:txBody>
+          <a:bodyPr wrap="square" anchor="t" lIns="0" rIns="0" tIns="0" bIns="0">
+            <a:spAutoFit/>
+          </a:bodyPr>
+          <a:lstStyle/>
+          <a:p>
+            <a:pPr algn="l">
+              <a:lnSpc>
+                <a:spcPct val="115000"/>
+              </a:lnSpc>
+            </a:pPr>
+            <a:r>
+              <a:rPr sz="1000" b="1">
+                <a:solidFill>
+                  <a:srgbClr val="C25B2E"/>
+                </a:solidFill>
+                <a:latin typeface="Calibri"/>
+              </a:rPr>
+              <a:t>ON THIS SCREEN</a:t>
+            </a:r>
+          </a:p>
+        </p:txBody>
+      </p:sp>
+      <p:sp>
+        <p:nvSpPr>
+          <p:cNvPr id="11" name="Oval 10"/>
           <p:cNvSpPr/>
           <p:nvPr/>
         </p:nvSpPr>
         <p:spPr>
           <a:xfrm>
-            <a:off x="7094508" y="1607286"/>
-            <a:ext cx="274320" cy="274320"/>
+            <a:off x="8458200" y="1463040"/>
+            <a:ext cx="210312" cy="210312"/>
           </a:xfrm>
           <a:prstGeom prst="ellipse">
             <a:avLst/>
@@ -34473,109 +34304,23 @@
           </a:fontRef>
         </p:style>
         <p:txBody>
-          <a:bodyPr rtlCol="0" anchor="ctr" lIns="0" rIns="0" tIns="0" bIns="0" wrap="none"/>
-          <a:lstStyle/>
-          <a:p>
-            <a:pPr algn="ctr"/>
-            <a:r>
-              <a:rPr sz="1300" b="1">
+          <a:bodyPr rtlCol="0" anchor="ctr" lIns="0" rIns="0" tIns="0" bIns="0" wrap="none">
+            <a:noAutofit/>
+          </a:bodyPr>
+          <a:lstStyle/>
+          <a:p>
+            <a:pPr algn="ctr">
+              <a:lnSpc>
+                <a:spcPct val="100000"/>
+              </a:lnSpc>
+            </a:pPr>
+            <a:r>
+              <a:rPr sz="1000" b="1">
                 <a:solidFill>
                   <a:srgbClr val="FFFFFF"/>
                 </a:solidFill>
                 <a:latin typeface="Calibri"/>
               </a:rPr>
-              <a:t>2</a:t>
-            </a:r>
-          </a:p>
-        </p:txBody>
-      </p:sp>
-      <p:sp>
-        <p:nvSpPr>
-          <p:cNvPr id="11" name="TextBox 10"/>
-          <p:cNvSpPr txBox="1"/>
-          <p:nvPr/>
-        </p:nvSpPr>
-        <p:spPr>
-          <a:xfrm>
-            <a:off x="8458200" y="1188720"/>
-            <a:ext cx="3291840" cy="219456"/>
-          </a:xfrm>
-          <a:prstGeom prst="rect">
-            <a:avLst/>
-          </a:prstGeom>
-          <a:noFill/>
-        </p:spPr>
-        <p:txBody>
-          <a:bodyPr wrap="square" anchor="t" lIns="0" rIns="0" tIns="0" bIns="0">
-            <a:spAutoFit/>
-          </a:bodyPr>
-          <a:lstStyle/>
-          <a:p>
-            <a:pPr algn="l">
-              <a:lnSpc>
-                <a:spcPct val="115000"/>
-              </a:lnSpc>
-            </a:pPr>
-            <a:r>
-              <a:rPr sz="1000" b="1">
-                <a:solidFill>
-                  <a:srgbClr val="C25B2E"/>
-                </a:solidFill>
-                <a:latin typeface="Calibri"/>
-              </a:rPr>
-              <a:t>ON THIS SCREEN</a:t>
-            </a:r>
-          </a:p>
-        </p:txBody>
-      </p:sp>
-      <p:sp>
-        <p:nvSpPr>
-          <p:cNvPr id="12" name="Oval 11"/>
-          <p:cNvSpPr/>
-          <p:nvPr/>
-        </p:nvSpPr>
-        <p:spPr>
-          <a:xfrm>
-            <a:off x="8458200" y="1463040"/>
-            <a:ext cx="210312" cy="210312"/>
-          </a:xfrm>
-          <a:prstGeom prst="ellipse">
-            <a:avLst/>
-          </a:prstGeom>
-          <a:solidFill>
-            <a:srgbClr val="C25B2E"/>
-          </a:solidFill>
-          <a:ln>
-            <a:noFill/>
-          </a:ln>
-          <a:effectLst/>
-        </p:spPr>
-        <p:style>
-          <a:lnRef idx="1">
-            <a:schemeClr val="accent1"/>
-          </a:lnRef>
-          <a:fillRef idx="3">
-            <a:schemeClr val="accent1"/>
-          </a:fillRef>
-          <a:effectRef idx="2">
-            <a:schemeClr val="accent1"/>
-          </a:effectRef>
-          <a:fontRef idx="minor">
-            <a:schemeClr val="lt1"/>
-          </a:fontRef>
-        </p:style>
-        <p:txBody>
-          <a:bodyPr rtlCol="0" anchor="ctr" lIns="0" rIns="0" tIns="0" bIns="0" wrap="none"/>
-          <a:lstStyle/>
-          <a:p>
-            <a:pPr algn="ctr"/>
-            <a:r>
-              <a:rPr sz="1000" b="1">
-                <a:solidFill>
-                  <a:srgbClr val="FFFFFF"/>
-                </a:solidFill>
-                <a:latin typeface="Calibri"/>
-              </a:rPr>
               <a:t>1</a:t>
             </a:r>
           </a:p>
@@ -34583,7 +34328,7 @@
       </p:sp>
       <p:sp>
         <p:nvSpPr>
-          <p:cNvPr id="13" name="TextBox 12"/>
+          <p:cNvPr id="12" name="TextBox 11"/>
           <p:cNvSpPr txBox="1"/>
           <p:nvPr/>
         </p:nvSpPr>
@@ -34615,112 +34360,20 @@
                 </a:solidFill>
                 <a:latin typeface="Calibri"/>
               </a:rPr>
-              <a:t>Everyone with an account</a:t>
-            </a:r>
-          </a:p>
-        </p:txBody>
-      </p:sp>
-      <p:sp>
-        <p:nvSpPr>
-          <p:cNvPr id="14" name="Oval 13"/>
+              <a:t>Add a user</a:t>
+            </a:r>
+          </a:p>
+        </p:txBody>
+      </p:sp>
+      <p:sp>
+        <p:nvSpPr>
+          <p:cNvPr id="13" name="Rectangle 12"/>
           <p:cNvSpPr/>
           <p:nvPr/>
         </p:nvSpPr>
         <p:spPr>
           <a:xfrm>
-            <a:off x="8458200" y="1723644"/>
-            <a:ext cx="210312" cy="210312"/>
-          </a:xfrm>
-          <a:prstGeom prst="ellipse">
-            <a:avLst/>
-          </a:prstGeom>
-          <a:solidFill>
-            <a:srgbClr val="C25B2E"/>
-          </a:solidFill>
-          <a:ln>
-            <a:noFill/>
-          </a:ln>
-          <a:effectLst/>
-        </p:spPr>
-        <p:style>
-          <a:lnRef idx="1">
-            <a:schemeClr val="accent1"/>
-          </a:lnRef>
-          <a:fillRef idx="3">
-            <a:schemeClr val="accent1"/>
-          </a:fillRef>
-          <a:effectRef idx="2">
-            <a:schemeClr val="accent1"/>
-          </a:effectRef>
-          <a:fontRef idx="minor">
-            <a:schemeClr val="lt1"/>
-          </a:fontRef>
-        </p:style>
-        <p:txBody>
-          <a:bodyPr rtlCol="0" anchor="ctr" lIns="0" rIns="0" tIns="0" bIns="0" wrap="none"/>
-          <a:lstStyle/>
-          <a:p>
-            <a:pPr algn="ctr"/>
-            <a:r>
-              <a:rPr sz="1000" b="1">
-                <a:solidFill>
-                  <a:srgbClr val="FFFFFF"/>
-                </a:solidFill>
-                <a:latin typeface="Calibri"/>
-              </a:rPr>
-              <a:t>2</a:t>
-            </a:r>
-          </a:p>
-        </p:txBody>
-      </p:sp>
-      <p:sp>
-        <p:nvSpPr>
-          <p:cNvPr id="15" name="TextBox 14"/>
-          <p:cNvSpPr txBox="1"/>
-          <p:nvPr/>
-        </p:nvSpPr>
-        <p:spPr>
-          <a:xfrm>
-            <a:off x="8787384" y="1741932"/>
-            <a:ext cx="2962656" cy="169164"/>
-          </a:xfrm>
-          <a:prstGeom prst="rect">
-            <a:avLst/>
-          </a:prstGeom>
-          <a:noFill/>
-        </p:spPr>
-        <p:txBody>
-          <a:bodyPr wrap="square" anchor="t" lIns="0" rIns="0" tIns="0" bIns="0">
-            <a:spAutoFit/>
-          </a:bodyPr>
-          <a:lstStyle/>
-          <a:p>
-            <a:pPr algn="l">
-              <a:lnSpc>
-                <a:spcPct val="105000"/>
-              </a:lnSpc>
-            </a:pPr>
-            <a:r>
-              <a:rPr sz="1050" b="0">
-                <a:solidFill>
-                  <a:srgbClr val="1B2A33"/>
-                </a:solidFill>
-                <a:latin typeface="Calibri"/>
-              </a:rPr>
-              <a:t>Add a user</a:t>
-            </a:r>
-          </a:p>
-        </p:txBody>
-      </p:sp>
-      <p:sp>
-        <p:nvSpPr>
-          <p:cNvPr id="16" name="Rectangle 15"/>
-          <p:cNvSpPr/>
-          <p:nvPr/>
-        </p:nvSpPr>
-        <p:spPr>
-          <a:xfrm>
-            <a:off x="8458200" y="2130552"/>
+            <a:off x="8458200" y="1869948"/>
             <a:ext cx="45720" cy="502920"/>
           </a:xfrm>
           <a:prstGeom prst="rect">
@@ -34758,13 +34411,13 @@
       </p:sp>
       <p:sp>
         <p:nvSpPr>
-          <p:cNvPr id="17" name="TextBox 16"/>
-          <p:cNvSpPr txBox="1"/>
-          <p:nvPr/>
-        </p:nvSpPr>
-        <p:spPr>
-          <a:xfrm>
-            <a:off x="8622792" y="2130552"/>
+          <p:cNvPr id="14" name="TextBox 13"/>
+          <p:cNvSpPr txBox="1"/>
+          <p:nvPr/>
+        </p:nvSpPr>
+        <p:spPr>
+          <a:xfrm>
+            <a:off x="8622792" y="1869948"/>
             <a:ext cx="3127248" cy="164592"/>
           </a:xfrm>
           <a:prstGeom prst="rect">
@@ -34797,13 +34450,13 @@
       </p:sp>
       <p:sp>
         <p:nvSpPr>
-          <p:cNvPr id="18" name="TextBox 17"/>
-          <p:cNvSpPr txBox="1"/>
-          <p:nvPr/>
-        </p:nvSpPr>
-        <p:spPr>
-          <a:xfrm>
-            <a:off x="8622792" y="2322576"/>
+          <p:cNvPr id="15" name="TextBox 14"/>
+          <p:cNvSpPr txBox="1"/>
+          <p:nvPr/>
+        </p:nvSpPr>
+        <p:spPr>
+          <a:xfrm>
+            <a:off x="8622792" y="2061972"/>
             <a:ext cx="3127248" cy="320040"/>
           </a:xfrm>
           <a:prstGeom prst="rect">
@@ -34836,13 +34489,13 @@
       </p:sp>
       <p:sp>
         <p:nvSpPr>
-          <p:cNvPr id="19" name="Rectangle 18"/>
+          <p:cNvPr id="16" name="Rectangle 15"/>
           <p:cNvSpPr/>
           <p:nvPr/>
         </p:nvSpPr>
         <p:spPr>
           <a:xfrm>
-            <a:off x="8458200" y="2834640"/>
+            <a:off x="8458200" y="2574036"/>
             <a:ext cx="45720" cy="502920"/>
           </a:xfrm>
           <a:prstGeom prst="rect">
@@ -34880,13 +34533,13 @@
       </p:sp>
       <p:sp>
         <p:nvSpPr>
-          <p:cNvPr id="20" name="TextBox 19"/>
-          <p:cNvSpPr txBox="1"/>
-          <p:nvPr/>
-        </p:nvSpPr>
-        <p:spPr>
-          <a:xfrm>
-            <a:off x="8622792" y="2834640"/>
+          <p:cNvPr id="17" name="TextBox 16"/>
+          <p:cNvSpPr txBox="1"/>
+          <p:nvPr/>
+        </p:nvSpPr>
+        <p:spPr>
+          <a:xfrm>
+            <a:off x="8622792" y="2574036"/>
             <a:ext cx="3127248" cy="164592"/>
           </a:xfrm>
           <a:prstGeom prst="rect">
@@ -34919,13 +34572,13 @@
       </p:sp>
       <p:sp>
         <p:nvSpPr>
-          <p:cNvPr id="21" name="TextBox 20"/>
-          <p:cNvSpPr txBox="1"/>
-          <p:nvPr/>
-        </p:nvSpPr>
-        <p:spPr>
-          <a:xfrm>
-            <a:off x="8622792" y="3026664"/>
+          <p:cNvPr id="18" name="TextBox 17"/>
+          <p:cNvSpPr txBox="1"/>
+          <p:nvPr/>
+        </p:nvSpPr>
+        <p:spPr>
+          <a:xfrm>
+            <a:off x="8622792" y="2766060"/>
             <a:ext cx="3127248" cy="320040"/>
           </a:xfrm>
           <a:prstGeom prst="rect">
@@ -34958,13 +34611,13 @@
       </p:sp>
       <p:sp>
         <p:nvSpPr>
-          <p:cNvPr id="22" name="Rectangle 21"/>
+          <p:cNvPr id="19" name="Rectangle 18"/>
           <p:cNvSpPr/>
           <p:nvPr/>
         </p:nvSpPr>
         <p:spPr>
           <a:xfrm>
-            <a:off x="8458200" y="3538728"/>
+            <a:off x="8458200" y="3278124"/>
             <a:ext cx="45720" cy="342900"/>
           </a:xfrm>
           <a:prstGeom prst="rect">
@@ -35002,13 +34655,13 @@
       </p:sp>
       <p:sp>
         <p:nvSpPr>
-          <p:cNvPr id="23" name="TextBox 22"/>
-          <p:cNvSpPr txBox="1"/>
-          <p:nvPr/>
-        </p:nvSpPr>
-        <p:spPr>
-          <a:xfrm>
-            <a:off x="8622792" y="3538728"/>
+          <p:cNvPr id="20" name="TextBox 19"/>
+          <p:cNvSpPr txBox="1"/>
+          <p:nvPr/>
+        </p:nvSpPr>
+        <p:spPr>
+          <a:xfrm>
+            <a:off x="8622792" y="3278124"/>
             <a:ext cx="3127248" cy="164592"/>
           </a:xfrm>
           <a:prstGeom prst="rect">
@@ -35041,13 +34694,13 @@
       </p:sp>
       <p:sp>
         <p:nvSpPr>
-          <p:cNvPr id="24" name="TextBox 23"/>
-          <p:cNvSpPr txBox="1"/>
-          <p:nvPr/>
-        </p:nvSpPr>
-        <p:spPr>
-          <a:xfrm>
-            <a:off x="8622792" y="3730752"/>
+          <p:cNvPr id="21" name="TextBox 20"/>
+          <p:cNvSpPr txBox="1"/>
+          <p:nvPr/>
+        </p:nvSpPr>
+        <p:spPr>
+          <a:xfrm>
+            <a:off x="8622792" y="3470148"/>
             <a:ext cx="3127248" cy="160020"/>
           </a:xfrm>
           <a:prstGeom prst="rect">
@@ -35080,7 +34733,7 @@
       </p:sp>
       <p:sp>
         <p:nvSpPr>
-          <p:cNvPr id="25" name="Rectangle 24"/>
+          <p:cNvPr id="22" name="Rectangle 21"/>
           <p:cNvSpPr/>
           <p:nvPr/>
         </p:nvSpPr>
@@ -35124,7 +34777,7 @@
       </p:sp>
       <p:sp>
         <p:nvSpPr>
-          <p:cNvPr id="26" name="TextBox 25"/>
+          <p:cNvPr id="23" name="TextBox 22"/>
           <p:cNvSpPr txBox="1"/>
           <p:nvPr/>
         </p:nvSpPr>
@@ -35163,7 +34816,7 @@
       </p:sp>
       <p:sp>
         <p:nvSpPr>
-          <p:cNvPr id="27" name="TextBox 26"/>
+          <p:cNvPr id="24" name="TextBox 23"/>
           <p:cNvSpPr txBox="1"/>
           <p:nvPr/>
         </p:nvSpPr>
@@ -35536,10 +35189,16 @@
           </a:fontRef>
         </p:style>
         <p:txBody>
-          <a:bodyPr rtlCol="0" anchor="ctr" lIns="0" rIns="0" tIns="0" bIns="0" wrap="none"/>
-          <a:lstStyle/>
-          <a:p>
-            <a:pPr algn="ctr"/>
+          <a:bodyPr rtlCol="0" anchor="ctr" lIns="0" rIns="0" tIns="0" bIns="0" wrap="none">
+            <a:noAutofit/>
+          </a:bodyPr>
+          <a:lstStyle/>
+          <a:p>
+            <a:pPr algn="ctr">
+              <a:lnSpc>
+                <a:spcPct val="100000"/>
+              </a:lnSpc>
+            </a:pPr>
             <a:r>
               <a:rPr sz="1300" b="1">
                 <a:solidFill>
@@ -35589,10 +35248,16 @@
           </a:fontRef>
         </p:style>
         <p:txBody>
-          <a:bodyPr rtlCol="0" anchor="ctr" lIns="0" rIns="0" tIns="0" bIns="0" wrap="none"/>
-          <a:lstStyle/>
-          <a:p>
-            <a:pPr algn="ctr"/>
+          <a:bodyPr rtlCol="0" anchor="ctr" lIns="0" rIns="0" tIns="0" bIns="0" wrap="none">
+            <a:noAutofit/>
+          </a:bodyPr>
+          <a:lstStyle/>
+          <a:p>
+            <a:pPr algn="ctr">
+              <a:lnSpc>
+                <a:spcPct val="100000"/>
+              </a:lnSpc>
+            </a:pPr>
             <a:r>
               <a:rPr sz="1300" b="1">
                 <a:solidFill>
@@ -35681,10 +35346,16 @@
           </a:fontRef>
         </p:style>
         <p:txBody>
-          <a:bodyPr rtlCol="0" anchor="ctr" lIns="0" rIns="0" tIns="0" bIns="0" wrap="none"/>
-          <a:lstStyle/>
-          <a:p>
-            <a:pPr algn="ctr"/>
+          <a:bodyPr rtlCol="0" anchor="ctr" lIns="0" rIns="0" tIns="0" bIns="0" wrap="none">
+            <a:noAutofit/>
+          </a:bodyPr>
+          <a:lstStyle/>
+          <a:p>
+            <a:pPr algn="ctr">
+              <a:lnSpc>
+                <a:spcPct val="100000"/>
+              </a:lnSpc>
+            </a:pPr>
             <a:r>
               <a:rPr sz="1000" b="1">
                 <a:solidFill>
@@ -35773,10 +35444,16 @@
           </a:fontRef>
         </p:style>
         <p:txBody>
-          <a:bodyPr rtlCol="0" anchor="ctr" lIns="0" rIns="0" tIns="0" bIns="0" wrap="none"/>
-          <a:lstStyle/>
-          <a:p>
-            <a:pPr algn="ctr"/>
+          <a:bodyPr rtlCol="0" anchor="ctr" lIns="0" rIns="0" tIns="0" bIns="0" wrap="none">
+            <a:noAutofit/>
+          </a:bodyPr>
+          <a:lstStyle/>
+          <a:p>
+            <a:pPr algn="ctr">
+              <a:lnSpc>
+                <a:spcPct val="100000"/>
+              </a:lnSpc>
+            </a:pPr>
             <a:r>
               <a:rPr sz="1000" b="1">
                 <a:solidFill>
@@ -36652,10 +36329,16 @@
           </a:fontRef>
         </p:style>
         <p:txBody>
-          <a:bodyPr rtlCol="0" anchor="ctr" lIns="0" rIns="0" tIns="0" bIns="0" wrap="none"/>
-          <a:lstStyle/>
-          <a:p>
-            <a:pPr algn="ctr"/>
+          <a:bodyPr rtlCol="0" anchor="ctr" lIns="0" rIns="0" tIns="0" bIns="0" wrap="none">
+            <a:noAutofit/>
+          </a:bodyPr>
+          <a:lstStyle/>
+          <a:p>
+            <a:pPr algn="ctr">
+              <a:lnSpc>
+                <a:spcPct val="100000"/>
+              </a:lnSpc>
+            </a:pPr>
             <a:r>
               <a:rPr sz="1300" b="1">
                 <a:solidFill>
@@ -36705,10 +36388,16 @@
           </a:fontRef>
         </p:style>
         <p:txBody>
-          <a:bodyPr rtlCol="0" anchor="ctr" lIns="0" rIns="0" tIns="0" bIns="0" wrap="none"/>
-          <a:lstStyle/>
-          <a:p>
-            <a:pPr algn="ctr"/>
+          <a:bodyPr rtlCol="0" anchor="ctr" lIns="0" rIns="0" tIns="0" bIns="0" wrap="none">
+            <a:noAutofit/>
+          </a:bodyPr>
+          <a:lstStyle/>
+          <a:p>
+            <a:pPr algn="ctr">
+              <a:lnSpc>
+                <a:spcPct val="100000"/>
+              </a:lnSpc>
+            </a:pPr>
             <a:r>
               <a:rPr sz="1300" b="1">
                 <a:solidFill>
@@ -36758,10 +36447,16 @@
           </a:fontRef>
         </p:style>
         <p:txBody>
-          <a:bodyPr rtlCol="0" anchor="ctr" lIns="0" rIns="0" tIns="0" bIns="0" wrap="none"/>
-          <a:lstStyle/>
-          <a:p>
-            <a:pPr algn="ctr"/>
+          <a:bodyPr rtlCol="0" anchor="ctr" lIns="0" rIns="0" tIns="0" bIns="0" wrap="none">
+            <a:noAutofit/>
+          </a:bodyPr>
+          <a:lstStyle/>
+          <a:p>
+            <a:pPr algn="ctr">
+              <a:lnSpc>
+                <a:spcPct val="100000"/>
+              </a:lnSpc>
+            </a:pPr>
             <a:r>
               <a:rPr sz="1300" b="1">
                 <a:solidFill>
@@ -36850,10 +36545,16 @@
           </a:fontRef>
         </p:style>
         <p:txBody>
-          <a:bodyPr rtlCol="0" anchor="ctr" lIns="0" rIns="0" tIns="0" bIns="0" wrap="none"/>
-          <a:lstStyle/>
-          <a:p>
-            <a:pPr algn="ctr"/>
+          <a:bodyPr rtlCol="0" anchor="ctr" lIns="0" rIns="0" tIns="0" bIns="0" wrap="none">
+            <a:noAutofit/>
+          </a:bodyPr>
+          <a:lstStyle/>
+          <a:p>
+            <a:pPr algn="ctr">
+              <a:lnSpc>
+                <a:spcPct val="100000"/>
+              </a:lnSpc>
+            </a:pPr>
             <a:r>
               <a:rPr sz="1000" b="1">
                 <a:solidFill>
@@ -36942,10 +36643,16 @@
           </a:fontRef>
         </p:style>
         <p:txBody>
-          <a:bodyPr rtlCol="0" anchor="ctr" lIns="0" rIns="0" tIns="0" bIns="0" wrap="none"/>
-          <a:lstStyle/>
-          <a:p>
-            <a:pPr algn="ctr"/>
+          <a:bodyPr rtlCol="0" anchor="ctr" lIns="0" rIns="0" tIns="0" bIns="0" wrap="none">
+            <a:noAutofit/>
+          </a:bodyPr>
+          <a:lstStyle/>
+          <a:p>
+            <a:pPr algn="ctr">
+              <a:lnSpc>
+                <a:spcPct val="100000"/>
+              </a:lnSpc>
+            </a:pPr>
             <a:r>
               <a:rPr sz="1000" b="1">
                 <a:solidFill>
@@ -37034,10 +36741,16 @@
           </a:fontRef>
         </p:style>
         <p:txBody>
-          <a:bodyPr rtlCol="0" anchor="ctr" lIns="0" rIns="0" tIns="0" bIns="0" wrap="none"/>
-          <a:lstStyle/>
-          <a:p>
-            <a:pPr algn="ctr"/>
+          <a:bodyPr rtlCol="0" anchor="ctr" lIns="0" rIns="0" tIns="0" bIns="0" wrap="none">
+            <a:noAutofit/>
+          </a:bodyPr>
+          <a:lstStyle/>
+          <a:p>
+            <a:pPr algn="ctr">
+              <a:lnSpc>
+                <a:spcPct val="100000"/>
+              </a:lnSpc>
+            </a:pPr>
             <a:r>
               <a:rPr sz="1000" b="1">
                 <a:solidFill>
@@ -38889,197 +38602,13 @@
       </p:pic>
       <p:sp>
         <p:nvSpPr>
-          <p:cNvPr id="9" name="Oval 8"/>
+          <p:cNvPr id="9" name="Rectangle 8"/>
           <p:cNvSpPr/>
           <p:nvPr/>
         </p:nvSpPr>
         <p:spPr>
           <a:xfrm>
-            <a:off x="1307179" y="1572310"/>
-            <a:ext cx="274320" cy="274320"/>
-          </a:xfrm>
-          <a:prstGeom prst="ellipse">
-            <a:avLst/>
-          </a:prstGeom>
-          <a:solidFill>
-            <a:srgbClr val="C25B2E"/>
-          </a:solidFill>
-          <a:ln>
-            <a:noFill/>
-          </a:ln>
-          <a:effectLst/>
-        </p:spPr>
-        <p:style>
-          <a:lnRef idx="1">
-            <a:schemeClr val="accent1"/>
-          </a:lnRef>
-          <a:fillRef idx="3">
-            <a:schemeClr val="accent1"/>
-          </a:fillRef>
-          <a:effectRef idx="2">
-            <a:schemeClr val="accent1"/>
-          </a:effectRef>
-          <a:fontRef idx="minor">
-            <a:schemeClr val="lt1"/>
-          </a:fontRef>
-        </p:style>
-        <p:txBody>
-          <a:bodyPr rtlCol="0" anchor="ctr" lIns="0" rIns="0" tIns="0" bIns="0" wrap="none"/>
-          <a:lstStyle/>
-          <a:p>
-            <a:pPr algn="ctr"/>
-            <a:r>
-              <a:rPr sz="1300" b="1">
-                <a:solidFill>
-                  <a:srgbClr val="FFFFFF"/>
-                </a:solidFill>
-                <a:latin typeface="Calibri"/>
-              </a:rPr>
-              <a:t>1</a:t>
-            </a:r>
-          </a:p>
-        </p:txBody>
-      </p:sp>
-      <p:sp>
-        <p:nvSpPr>
-          <p:cNvPr id="10" name="TextBox 9"/>
-          <p:cNvSpPr txBox="1"/>
-          <p:nvPr/>
-        </p:nvSpPr>
-        <p:spPr>
-          <a:xfrm>
             <a:off x="8458200" y="1188720"/>
-            <a:ext cx="3291840" cy="219456"/>
-          </a:xfrm>
-          <a:prstGeom prst="rect">
-            <a:avLst/>
-          </a:prstGeom>
-          <a:noFill/>
-        </p:spPr>
-        <p:txBody>
-          <a:bodyPr wrap="square" anchor="t" lIns="0" rIns="0" tIns="0" bIns="0">
-            <a:spAutoFit/>
-          </a:bodyPr>
-          <a:lstStyle/>
-          <a:p>
-            <a:pPr algn="l">
-              <a:lnSpc>
-                <a:spcPct val="115000"/>
-              </a:lnSpc>
-            </a:pPr>
-            <a:r>
-              <a:rPr sz="1000" b="1">
-                <a:solidFill>
-                  <a:srgbClr val="C25B2E"/>
-                </a:solidFill>
-                <a:latin typeface="Calibri"/>
-              </a:rPr>
-              <a:t>ON THIS SCREEN</a:t>
-            </a:r>
-          </a:p>
-        </p:txBody>
-      </p:sp>
-      <p:sp>
-        <p:nvSpPr>
-          <p:cNvPr id="11" name="Oval 10"/>
-          <p:cNvSpPr/>
-          <p:nvPr/>
-        </p:nvSpPr>
-        <p:spPr>
-          <a:xfrm>
-            <a:off x="8458200" y="1463040"/>
-            <a:ext cx="210312" cy="210312"/>
-          </a:xfrm>
-          <a:prstGeom prst="ellipse">
-            <a:avLst/>
-          </a:prstGeom>
-          <a:solidFill>
-            <a:srgbClr val="C25B2E"/>
-          </a:solidFill>
-          <a:ln>
-            <a:noFill/>
-          </a:ln>
-          <a:effectLst/>
-        </p:spPr>
-        <p:style>
-          <a:lnRef idx="1">
-            <a:schemeClr val="accent1"/>
-          </a:lnRef>
-          <a:fillRef idx="3">
-            <a:schemeClr val="accent1"/>
-          </a:fillRef>
-          <a:effectRef idx="2">
-            <a:schemeClr val="accent1"/>
-          </a:effectRef>
-          <a:fontRef idx="minor">
-            <a:schemeClr val="lt1"/>
-          </a:fontRef>
-        </p:style>
-        <p:txBody>
-          <a:bodyPr rtlCol="0" anchor="ctr" lIns="0" rIns="0" tIns="0" bIns="0" wrap="none"/>
-          <a:lstStyle/>
-          <a:p>
-            <a:pPr algn="ctr"/>
-            <a:r>
-              <a:rPr sz="1000" b="1">
-                <a:solidFill>
-                  <a:srgbClr val="FFFFFF"/>
-                </a:solidFill>
-                <a:latin typeface="Calibri"/>
-              </a:rPr>
-              <a:t>1</a:t>
-            </a:r>
-          </a:p>
-        </p:txBody>
-      </p:sp>
-      <p:sp>
-        <p:nvSpPr>
-          <p:cNvPr id="12" name="TextBox 11"/>
-          <p:cNvSpPr txBox="1"/>
-          <p:nvPr/>
-        </p:nvSpPr>
-        <p:spPr>
-          <a:xfrm>
-            <a:off x="8787384" y="1481328"/>
-            <a:ext cx="2962656" cy="169164"/>
-          </a:xfrm>
-          <a:prstGeom prst="rect">
-            <a:avLst/>
-          </a:prstGeom>
-          <a:noFill/>
-        </p:spPr>
-        <p:txBody>
-          <a:bodyPr wrap="square" anchor="t" lIns="0" rIns="0" tIns="0" bIns="0">
-            <a:spAutoFit/>
-          </a:bodyPr>
-          <a:lstStyle/>
-          <a:p>
-            <a:pPr algn="l">
-              <a:lnSpc>
-                <a:spcPct val="105000"/>
-              </a:lnSpc>
-            </a:pPr>
-            <a:r>
-              <a:rPr sz="1050" b="0">
-                <a:solidFill>
-                  <a:srgbClr val="1B2A33"/>
-                </a:solidFill>
-                <a:latin typeface="Calibri"/>
-              </a:rPr>
-              <a:t>Hierarchy levels and org units</a:t>
-            </a:r>
-          </a:p>
-        </p:txBody>
-      </p:sp>
-      <p:sp>
-        <p:nvSpPr>
-          <p:cNvPr id="13" name="Rectangle 12"/>
-          <p:cNvSpPr/>
-          <p:nvPr/>
-        </p:nvSpPr>
-        <p:spPr>
-          <a:xfrm>
-            <a:off x="8458200" y="1869948"/>
             <a:ext cx="45720" cy="502920"/>
           </a:xfrm>
           <a:prstGeom prst="rect">
@@ -39117,13 +38646,13 @@
       </p:sp>
       <p:sp>
         <p:nvSpPr>
-          <p:cNvPr id="14" name="TextBox 13"/>
-          <p:cNvSpPr txBox="1"/>
-          <p:nvPr/>
-        </p:nvSpPr>
-        <p:spPr>
-          <a:xfrm>
-            <a:off x="8622792" y="1869948"/>
+          <p:cNvPr id="10" name="TextBox 9"/>
+          <p:cNvSpPr txBox="1"/>
+          <p:nvPr/>
+        </p:nvSpPr>
+        <p:spPr>
+          <a:xfrm>
+            <a:off x="8622792" y="1188720"/>
             <a:ext cx="3127248" cy="164592"/>
           </a:xfrm>
           <a:prstGeom prst="rect">
@@ -39156,13 +38685,13 @@
       </p:sp>
       <p:sp>
         <p:nvSpPr>
-          <p:cNvPr id="15" name="TextBox 14"/>
-          <p:cNvSpPr txBox="1"/>
-          <p:nvPr/>
-        </p:nvSpPr>
-        <p:spPr>
-          <a:xfrm>
-            <a:off x="8622792" y="2061972"/>
+          <p:cNvPr id="11" name="TextBox 10"/>
+          <p:cNvSpPr txBox="1"/>
+          <p:nvPr/>
+        </p:nvSpPr>
+        <p:spPr>
+          <a:xfrm>
+            <a:off x="8622792" y="1380744"/>
             <a:ext cx="3127248" cy="320040"/>
           </a:xfrm>
           <a:prstGeom prst="rect">
@@ -39195,13 +38724,13 @@
       </p:sp>
       <p:sp>
         <p:nvSpPr>
-          <p:cNvPr id="16" name="Rectangle 15"/>
+          <p:cNvPr id="12" name="Rectangle 11"/>
           <p:cNvSpPr/>
           <p:nvPr/>
         </p:nvSpPr>
         <p:spPr>
           <a:xfrm>
-            <a:off x="8458200" y="2574036"/>
+            <a:off x="8458200" y="1892808"/>
             <a:ext cx="45720" cy="662940"/>
           </a:xfrm>
           <a:prstGeom prst="rect">
@@ -39239,13 +38768,13 @@
       </p:sp>
       <p:sp>
         <p:nvSpPr>
-          <p:cNvPr id="17" name="TextBox 16"/>
-          <p:cNvSpPr txBox="1"/>
-          <p:nvPr/>
-        </p:nvSpPr>
-        <p:spPr>
-          <a:xfrm>
-            <a:off x="8622792" y="2574036"/>
+          <p:cNvPr id="13" name="TextBox 12"/>
+          <p:cNvSpPr txBox="1"/>
+          <p:nvPr/>
+        </p:nvSpPr>
+        <p:spPr>
+          <a:xfrm>
+            <a:off x="8622792" y="1892808"/>
             <a:ext cx="3127248" cy="164592"/>
           </a:xfrm>
           <a:prstGeom prst="rect">
@@ -39278,13 +38807,13 @@
       </p:sp>
       <p:sp>
         <p:nvSpPr>
-          <p:cNvPr id="18" name="TextBox 17"/>
-          <p:cNvSpPr txBox="1"/>
-          <p:nvPr/>
-        </p:nvSpPr>
-        <p:spPr>
-          <a:xfrm>
-            <a:off x="8622792" y="2766060"/>
+          <p:cNvPr id="14" name="TextBox 13"/>
+          <p:cNvSpPr txBox="1"/>
+          <p:nvPr/>
+        </p:nvSpPr>
+        <p:spPr>
+          <a:xfrm>
+            <a:off x="8622792" y="2084832"/>
             <a:ext cx="3127248" cy="480060"/>
           </a:xfrm>
           <a:prstGeom prst="rect">
@@ -39317,13 +38846,13 @@
       </p:sp>
       <p:sp>
         <p:nvSpPr>
-          <p:cNvPr id="19" name="Rectangle 18"/>
+          <p:cNvPr id="15" name="Rectangle 14"/>
           <p:cNvSpPr/>
           <p:nvPr/>
         </p:nvSpPr>
         <p:spPr>
           <a:xfrm>
-            <a:off x="8458200" y="3438144"/>
+            <a:off x="8458200" y="2756916"/>
             <a:ext cx="45720" cy="342900"/>
           </a:xfrm>
           <a:prstGeom prst="rect">
@@ -39361,13 +38890,13 @@
       </p:sp>
       <p:sp>
         <p:nvSpPr>
-          <p:cNvPr id="20" name="TextBox 19"/>
-          <p:cNvSpPr txBox="1"/>
-          <p:nvPr/>
-        </p:nvSpPr>
-        <p:spPr>
-          <a:xfrm>
-            <a:off x="8622792" y="3438144"/>
+          <p:cNvPr id="16" name="TextBox 15"/>
+          <p:cNvSpPr txBox="1"/>
+          <p:nvPr/>
+        </p:nvSpPr>
+        <p:spPr>
+          <a:xfrm>
+            <a:off x="8622792" y="2756916"/>
             <a:ext cx="3127248" cy="164592"/>
           </a:xfrm>
           <a:prstGeom prst="rect">
@@ -39400,13 +38929,13 @@
       </p:sp>
       <p:sp>
         <p:nvSpPr>
-          <p:cNvPr id="21" name="TextBox 20"/>
-          <p:cNvSpPr txBox="1"/>
-          <p:nvPr/>
-        </p:nvSpPr>
-        <p:spPr>
-          <a:xfrm>
-            <a:off x="8622792" y="3630168"/>
+          <p:cNvPr id="17" name="TextBox 16"/>
+          <p:cNvSpPr txBox="1"/>
+          <p:nvPr/>
+        </p:nvSpPr>
+        <p:spPr>
+          <a:xfrm>
+            <a:off x="8622792" y="2948940"/>
             <a:ext cx="3127248" cy="160020"/>
           </a:xfrm>
           <a:prstGeom prst="rect">
@@ -39439,7 +38968,7 @@
       </p:sp>
       <p:sp>
         <p:nvSpPr>
-          <p:cNvPr id="22" name="Rectangle 21"/>
+          <p:cNvPr id="18" name="Rectangle 17"/>
           <p:cNvSpPr/>
           <p:nvPr/>
         </p:nvSpPr>
@@ -39483,7 +39012,7 @@
       </p:sp>
       <p:sp>
         <p:nvSpPr>
-          <p:cNvPr id="23" name="TextBox 22"/>
+          <p:cNvPr id="19" name="TextBox 18"/>
           <p:cNvSpPr txBox="1"/>
           <p:nvPr/>
         </p:nvSpPr>
@@ -39522,7 +39051,7 @@
       </p:sp>
       <p:sp>
         <p:nvSpPr>
-          <p:cNvPr id="24" name="TextBox 23"/>
+          <p:cNvPr id="20" name="TextBox 19"/>
           <p:cNvSpPr txBox="1"/>
           <p:nvPr/>
         </p:nvSpPr>
@@ -39860,197 +39389,13 @@
       </p:pic>
       <p:sp>
         <p:nvSpPr>
-          <p:cNvPr id="9" name="Oval 8"/>
+          <p:cNvPr id="9" name="Rectangle 8"/>
           <p:cNvSpPr/>
           <p:nvPr/>
         </p:nvSpPr>
         <p:spPr>
           <a:xfrm>
-            <a:off x="1307179" y="1572310"/>
-            <a:ext cx="274320" cy="274320"/>
-          </a:xfrm>
-          <a:prstGeom prst="ellipse">
-            <a:avLst/>
-          </a:prstGeom>
-          <a:solidFill>
-            <a:srgbClr val="C25B2E"/>
-          </a:solidFill>
-          <a:ln>
-            <a:noFill/>
-          </a:ln>
-          <a:effectLst/>
-        </p:spPr>
-        <p:style>
-          <a:lnRef idx="1">
-            <a:schemeClr val="accent1"/>
-          </a:lnRef>
-          <a:fillRef idx="3">
-            <a:schemeClr val="accent1"/>
-          </a:fillRef>
-          <a:effectRef idx="2">
-            <a:schemeClr val="accent1"/>
-          </a:effectRef>
-          <a:fontRef idx="minor">
-            <a:schemeClr val="lt1"/>
-          </a:fontRef>
-        </p:style>
-        <p:txBody>
-          <a:bodyPr rtlCol="0" anchor="ctr" lIns="0" rIns="0" tIns="0" bIns="0" wrap="none"/>
-          <a:lstStyle/>
-          <a:p>
-            <a:pPr algn="ctr"/>
-            <a:r>
-              <a:rPr sz="1300" b="1">
-                <a:solidFill>
-                  <a:srgbClr val="FFFFFF"/>
-                </a:solidFill>
-                <a:latin typeface="Calibri"/>
-              </a:rPr>
-              <a:t>1</a:t>
-            </a:r>
-          </a:p>
-        </p:txBody>
-      </p:sp>
-      <p:sp>
-        <p:nvSpPr>
-          <p:cNvPr id="10" name="TextBox 9"/>
-          <p:cNvSpPr txBox="1"/>
-          <p:nvPr/>
-        </p:nvSpPr>
-        <p:spPr>
-          <a:xfrm>
             <a:off x="8458200" y="1188720"/>
-            <a:ext cx="3291840" cy="219456"/>
-          </a:xfrm>
-          <a:prstGeom prst="rect">
-            <a:avLst/>
-          </a:prstGeom>
-          <a:noFill/>
-        </p:spPr>
-        <p:txBody>
-          <a:bodyPr wrap="square" anchor="t" lIns="0" rIns="0" tIns="0" bIns="0">
-            <a:spAutoFit/>
-          </a:bodyPr>
-          <a:lstStyle/>
-          <a:p>
-            <a:pPr algn="l">
-              <a:lnSpc>
-                <a:spcPct val="115000"/>
-              </a:lnSpc>
-            </a:pPr>
-            <a:r>
-              <a:rPr sz="1000" b="1">
-                <a:solidFill>
-                  <a:srgbClr val="C25B2E"/>
-                </a:solidFill>
-                <a:latin typeface="Calibri"/>
-              </a:rPr>
-              <a:t>ON THIS SCREEN</a:t>
-            </a:r>
-          </a:p>
-        </p:txBody>
-      </p:sp>
-      <p:sp>
-        <p:nvSpPr>
-          <p:cNvPr id="11" name="Oval 10"/>
-          <p:cNvSpPr/>
-          <p:nvPr/>
-        </p:nvSpPr>
-        <p:spPr>
-          <a:xfrm>
-            <a:off x="8458200" y="1463040"/>
-            <a:ext cx="210312" cy="210312"/>
-          </a:xfrm>
-          <a:prstGeom prst="ellipse">
-            <a:avLst/>
-          </a:prstGeom>
-          <a:solidFill>
-            <a:srgbClr val="C25B2E"/>
-          </a:solidFill>
-          <a:ln>
-            <a:noFill/>
-          </a:ln>
-          <a:effectLst/>
-        </p:spPr>
-        <p:style>
-          <a:lnRef idx="1">
-            <a:schemeClr val="accent1"/>
-          </a:lnRef>
-          <a:fillRef idx="3">
-            <a:schemeClr val="accent1"/>
-          </a:fillRef>
-          <a:effectRef idx="2">
-            <a:schemeClr val="accent1"/>
-          </a:effectRef>
-          <a:fontRef idx="minor">
-            <a:schemeClr val="lt1"/>
-          </a:fontRef>
-        </p:style>
-        <p:txBody>
-          <a:bodyPr rtlCol="0" anchor="ctr" lIns="0" rIns="0" tIns="0" bIns="0" wrap="none"/>
-          <a:lstStyle/>
-          <a:p>
-            <a:pPr algn="ctr"/>
-            <a:r>
-              <a:rPr sz="1000" b="1">
-                <a:solidFill>
-                  <a:srgbClr val="FFFFFF"/>
-                </a:solidFill>
-                <a:latin typeface="Calibri"/>
-              </a:rPr>
-              <a:t>1</a:t>
-            </a:r>
-          </a:p>
-        </p:txBody>
-      </p:sp>
-      <p:sp>
-        <p:nvSpPr>
-          <p:cNvPr id="12" name="TextBox 11"/>
-          <p:cNvSpPr txBox="1"/>
-          <p:nvPr/>
-        </p:nvSpPr>
-        <p:spPr>
-          <a:xfrm>
-            <a:off x="8787384" y="1481328"/>
-            <a:ext cx="2962656" cy="169164"/>
-          </a:xfrm>
-          <a:prstGeom prst="rect">
-            <a:avLst/>
-          </a:prstGeom>
-          <a:noFill/>
-        </p:spPr>
-        <p:txBody>
-          <a:bodyPr wrap="square" anchor="t" lIns="0" rIns="0" tIns="0" bIns="0">
-            <a:spAutoFit/>
-          </a:bodyPr>
-          <a:lstStyle/>
-          <a:p>
-            <a:pPr algn="l">
-              <a:lnSpc>
-                <a:spcPct val="105000"/>
-              </a:lnSpc>
-            </a:pPr>
-            <a:r>
-              <a:rPr sz="1050" b="0">
-                <a:solidFill>
-                  <a:srgbClr val="1B2A33"/>
-                </a:solidFill>
-                <a:latin typeface="Calibri"/>
-              </a:rPr>
-              <a:t>Branches, with live ticket load</a:t>
-            </a:r>
-          </a:p>
-        </p:txBody>
-      </p:sp>
-      <p:sp>
-        <p:nvSpPr>
-          <p:cNvPr id="13" name="Rectangle 12"/>
-          <p:cNvSpPr/>
-          <p:nvPr/>
-        </p:nvSpPr>
-        <p:spPr>
-          <a:xfrm>
-            <a:off x="8458200" y="1869948"/>
             <a:ext cx="45720" cy="502920"/>
           </a:xfrm>
           <a:prstGeom prst="rect">
@@ -40088,13 +39433,13 @@
       </p:sp>
       <p:sp>
         <p:nvSpPr>
-          <p:cNvPr id="14" name="TextBox 13"/>
-          <p:cNvSpPr txBox="1"/>
-          <p:nvPr/>
-        </p:nvSpPr>
-        <p:spPr>
-          <a:xfrm>
-            <a:off x="8622792" y="1869948"/>
+          <p:cNvPr id="10" name="TextBox 9"/>
+          <p:cNvSpPr txBox="1"/>
+          <p:nvPr/>
+        </p:nvSpPr>
+        <p:spPr>
+          <a:xfrm>
+            <a:off x="8622792" y="1188720"/>
             <a:ext cx="3127248" cy="164592"/>
           </a:xfrm>
           <a:prstGeom prst="rect">
@@ -40127,13 +39472,13 @@
       </p:sp>
       <p:sp>
         <p:nvSpPr>
-          <p:cNvPr id="15" name="TextBox 14"/>
-          <p:cNvSpPr txBox="1"/>
-          <p:nvPr/>
-        </p:nvSpPr>
-        <p:spPr>
-          <a:xfrm>
-            <a:off x="8622792" y="2061972"/>
+          <p:cNvPr id="11" name="TextBox 10"/>
+          <p:cNvSpPr txBox="1"/>
+          <p:nvPr/>
+        </p:nvSpPr>
+        <p:spPr>
+          <a:xfrm>
+            <a:off x="8622792" y="1380744"/>
             <a:ext cx="3127248" cy="320040"/>
           </a:xfrm>
           <a:prstGeom prst="rect">
@@ -40166,13 +39511,13 @@
       </p:sp>
       <p:sp>
         <p:nvSpPr>
-          <p:cNvPr id="16" name="Rectangle 15"/>
+          <p:cNvPr id="12" name="Rectangle 11"/>
           <p:cNvSpPr/>
           <p:nvPr/>
         </p:nvSpPr>
         <p:spPr>
           <a:xfrm>
-            <a:off x="8458200" y="2574036"/>
+            <a:off x="8458200" y="1892808"/>
             <a:ext cx="45720" cy="662940"/>
           </a:xfrm>
           <a:prstGeom prst="rect">
@@ -40210,13 +39555,13 @@
       </p:sp>
       <p:sp>
         <p:nvSpPr>
-          <p:cNvPr id="17" name="TextBox 16"/>
-          <p:cNvSpPr txBox="1"/>
-          <p:nvPr/>
-        </p:nvSpPr>
-        <p:spPr>
-          <a:xfrm>
-            <a:off x="8622792" y="2574036"/>
+          <p:cNvPr id="13" name="TextBox 12"/>
+          <p:cNvSpPr txBox="1"/>
+          <p:nvPr/>
+        </p:nvSpPr>
+        <p:spPr>
+          <a:xfrm>
+            <a:off x="8622792" y="1892808"/>
             <a:ext cx="3127248" cy="164592"/>
           </a:xfrm>
           <a:prstGeom prst="rect">
@@ -40249,13 +39594,13 @@
       </p:sp>
       <p:sp>
         <p:nvSpPr>
-          <p:cNvPr id="18" name="TextBox 17"/>
-          <p:cNvSpPr txBox="1"/>
-          <p:nvPr/>
-        </p:nvSpPr>
-        <p:spPr>
-          <a:xfrm>
-            <a:off x="8622792" y="2766060"/>
+          <p:cNvPr id="14" name="TextBox 13"/>
+          <p:cNvSpPr txBox="1"/>
+          <p:nvPr/>
+        </p:nvSpPr>
+        <p:spPr>
+          <a:xfrm>
+            <a:off x="8622792" y="2084832"/>
             <a:ext cx="3127248" cy="480060"/>
           </a:xfrm>
           <a:prstGeom prst="rect">
@@ -40288,13 +39633,13 @@
       </p:sp>
       <p:sp>
         <p:nvSpPr>
-          <p:cNvPr id="19" name="Rectangle 18"/>
+          <p:cNvPr id="15" name="Rectangle 14"/>
           <p:cNvSpPr/>
           <p:nvPr/>
         </p:nvSpPr>
         <p:spPr>
           <a:xfrm>
-            <a:off x="8458200" y="3438144"/>
+            <a:off x="8458200" y="2756916"/>
             <a:ext cx="45720" cy="342900"/>
           </a:xfrm>
           <a:prstGeom prst="rect">
@@ -40332,13 +39677,13 @@
       </p:sp>
       <p:sp>
         <p:nvSpPr>
-          <p:cNvPr id="20" name="TextBox 19"/>
-          <p:cNvSpPr txBox="1"/>
-          <p:nvPr/>
-        </p:nvSpPr>
-        <p:spPr>
-          <a:xfrm>
-            <a:off x="8622792" y="3438144"/>
+          <p:cNvPr id="16" name="TextBox 15"/>
+          <p:cNvSpPr txBox="1"/>
+          <p:nvPr/>
+        </p:nvSpPr>
+        <p:spPr>
+          <a:xfrm>
+            <a:off x="8622792" y="2756916"/>
             <a:ext cx="3127248" cy="164592"/>
           </a:xfrm>
           <a:prstGeom prst="rect">
@@ -40371,13 +39716,13 @@
       </p:sp>
       <p:sp>
         <p:nvSpPr>
-          <p:cNvPr id="21" name="TextBox 20"/>
-          <p:cNvSpPr txBox="1"/>
-          <p:nvPr/>
-        </p:nvSpPr>
-        <p:spPr>
-          <a:xfrm>
-            <a:off x="8622792" y="3630168"/>
+          <p:cNvPr id="17" name="TextBox 16"/>
+          <p:cNvSpPr txBox="1"/>
+          <p:nvPr/>
+        </p:nvSpPr>
+        <p:spPr>
+          <a:xfrm>
+            <a:off x="8622792" y="2948940"/>
             <a:ext cx="3127248" cy="160020"/>
           </a:xfrm>
           <a:prstGeom prst="rect">
@@ -40410,7 +39755,7 @@
       </p:sp>
       <p:sp>
         <p:nvSpPr>
-          <p:cNvPr id="22" name="Rectangle 21"/>
+          <p:cNvPr id="18" name="Rectangle 17"/>
           <p:cNvSpPr/>
           <p:nvPr/>
         </p:nvSpPr>
@@ -40454,7 +39799,7 @@
       </p:sp>
       <p:sp>
         <p:nvSpPr>
-          <p:cNvPr id="23" name="TextBox 22"/>
+          <p:cNvPr id="19" name="TextBox 18"/>
           <p:cNvSpPr txBox="1"/>
           <p:nvPr/>
         </p:nvSpPr>
@@ -40493,7 +39838,7 @@
       </p:sp>
       <p:sp>
         <p:nvSpPr>
-          <p:cNvPr id="24" name="TextBox 23"/>
+          <p:cNvPr id="20" name="TextBox 19"/>
           <p:cNvSpPr txBox="1"/>
           <p:nvPr/>
         </p:nvSpPr>
@@ -40831,197 +40176,13 @@
       </p:pic>
       <p:sp>
         <p:nvSpPr>
-          <p:cNvPr id="9" name="Oval 8"/>
+          <p:cNvPr id="9" name="Rectangle 8"/>
           <p:cNvSpPr/>
           <p:nvPr/>
         </p:nvSpPr>
         <p:spPr>
           <a:xfrm>
-            <a:off x="1307179" y="1572310"/>
-            <a:ext cx="274320" cy="274320"/>
-          </a:xfrm>
-          <a:prstGeom prst="ellipse">
-            <a:avLst/>
-          </a:prstGeom>
-          <a:solidFill>
-            <a:srgbClr val="C25B2E"/>
-          </a:solidFill>
-          <a:ln>
-            <a:noFill/>
-          </a:ln>
-          <a:effectLst/>
-        </p:spPr>
-        <p:style>
-          <a:lnRef idx="1">
-            <a:schemeClr val="accent1"/>
-          </a:lnRef>
-          <a:fillRef idx="3">
-            <a:schemeClr val="accent1"/>
-          </a:fillRef>
-          <a:effectRef idx="2">
-            <a:schemeClr val="accent1"/>
-          </a:effectRef>
-          <a:fontRef idx="minor">
-            <a:schemeClr val="lt1"/>
-          </a:fontRef>
-        </p:style>
-        <p:txBody>
-          <a:bodyPr rtlCol="0" anchor="ctr" lIns="0" rIns="0" tIns="0" bIns="0" wrap="none"/>
-          <a:lstStyle/>
-          <a:p>
-            <a:pPr algn="ctr"/>
-            <a:r>
-              <a:rPr sz="1300" b="1">
-                <a:solidFill>
-                  <a:srgbClr val="FFFFFF"/>
-                </a:solidFill>
-                <a:latin typeface="Calibri"/>
-              </a:rPr>
-              <a:t>1</a:t>
-            </a:r>
-          </a:p>
-        </p:txBody>
-      </p:sp>
-      <p:sp>
-        <p:nvSpPr>
-          <p:cNvPr id="10" name="TextBox 9"/>
-          <p:cNvSpPr txBox="1"/>
-          <p:nvPr/>
-        </p:nvSpPr>
-        <p:spPr>
-          <a:xfrm>
             <a:off x="8458200" y="1188720"/>
-            <a:ext cx="3291840" cy="219456"/>
-          </a:xfrm>
-          <a:prstGeom prst="rect">
-            <a:avLst/>
-          </a:prstGeom>
-          <a:noFill/>
-        </p:spPr>
-        <p:txBody>
-          <a:bodyPr wrap="square" anchor="t" lIns="0" rIns="0" tIns="0" bIns="0">
-            <a:spAutoFit/>
-          </a:bodyPr>
-          <a:lstStyle/>
-          <a:p>
-            <a:pPr algn="l">
-              <a:lnSpc>
-                <a:spcPct val="115000"/>
-              </a:lnSpc>
-            </a:pPr>
-            <a:r>
-              <a:rPr sz="1000" b="1">
-                <a:solidFill>
-                  <a:srgbClr val="C25B2E"/>
-                </a:solidFill>
-                <a:latin typeface="Calibri"/>
-              </a:rPr>
-              <a:t>ON THIS SCREEN</a:t>
-            </a:r>
-          </a:p>
-        </p:txBody>
-      </p:sp>
-      <p:sp>
-        <p:nvSpPr>
-          <p:cNvPr id="11" name="Oval 10"/>
-          <p:cNvSpPr/>
-          <p:nvPr/>
-        </p:nvSpPr>
-        <p:spPr>
-          <a:xfrm>
-            <a:off x="8458200" y="1463040"/>
-            <a:ext cx="210312" cy="210312"/>
-          </a:xfrm>
-          <a:prstGeom prst="ellipse">
-            <a:avLst/>
-          </a:prstGeom>
-          <a:solidFill>
-            <a:srgbClr val="C25B2E"/>
-          </a:solidFill>
-          <a:ln>
-            <a:noFill/>
-          </a:ln>
-          <a:effectLst/>
-        </p:spPr>
-        <p:style>
-          <a:lnRef idx="1">
-            <a:schemeClr val="accent1"/>
-          </a:lnRef>
-          <a:fillRef idx="3">
-            <a:schemeClr val="accent1"/>
-          </a:fillRef>
-          <a:effectRef idx="2">
-            <a:schemeClr val="accent1"/>
-          </a:effectRef>
-          <a:fontRef idx="minor">
-            <a:schemeClr val="lt1"/>
-          </a:fontRef>
-        </p:style>
-        <p:txBody>
-          <a:bodyPr rtlCol="0" anchor="ctr" lIns="0" rIns="0" tIns="0" bIns="0" wrap="none"/>
-          <a:lstStyle/>
-          <a:p>
-            <a:pPr algn="ctr"/>
-            <a:r>
-              <a:rPr sz="1000" b="1">
-                <a:solidFill>
-                  <a:srgbClr val="FFFFFF"/>
-                </a:solidFill>
-                <a:latin typeface="Calibri"/>
-              </a:rPr>
-              <a:t>1</a:t>
-            </a:r>
-          </a:p>
-        </p:txBody>
-      </p:sp>
-      <p:sp>
-        <p:nvSpPr>
-          <p:cNvPr id="12" name="TextBox 11"/>
-          <p:cNvSpPr txBox="1"/>
-          <p:nvPr/>
-        </p:nvSpPr>
-        <p:spPr>
-          <a:xfrm>
-            <a:off x="8787384" y="1481328"/>
-            <a:ext cx="2962656" cy="169164"/>
-          </a:xfrm>
-          <a:prstGeom prst="rect">
-            <a:avLst/>
-          </a:prstGeom>
-          <a:noFill/>
-        </p:spPr>
-        <p:txBody>
-          <a:bodyPr wrap="square" anchor="t" lIns="0" rIns="0" tIns="0" bIns="0">
-            <a:spAutoFit/>
-          </a:bodyPr>
-          <a:lstStyle/>
-          <a:p>
-            <a:pPr algn="l">
-              <a:lnSpc>
-                <a:spcPct val="105000"/>
-              </a:lnSpc>
-            </a:pPr>
-            <a:r>
-              <a:rPr sz="1050" b="0">
-                <a:solidFill>
-                  <a:srgbClr val="1B2A33"/>
-                </a:solidFill>
-                <a:latin typeface="Calibri"/>
-              </a:rPr>
-              <a:t>Filter the period and scope</a:t>
-            </a:r>
-          </a:p>
-        </p:txBody>
-      </p:sp>
-      <p:sp>
-        <p:nvSpPr>
-          <p:cNvPr id="13" name="Rectangle 12"/>
-          <p:cNvSpPr/>
-          <p:nvPr/>
-        </p:nvSpPr>
-        <p:spPr>
-          <a:xfrm>
-            <a:off x="8458200" y="1869948"/>
             <a:ext cx="45720" cy="342900"/>
           </a:xfrm>
           <a:prstGeom prst="rect">
@@ -41059,13 +40220,13 @@
       </p:sp>
       <p:sp>
         <p:nvSpPr>
-          <p:cNvPr id="14" name="TextBox 13"/>
-          <p:cNvSpPr txBox="1"/>
-          <p:nvPr/>
-        </p:nvSpPr>
-        <p:spPr>
-          <a:xfrm>
-            <a:off x="8622792" y="1869948"/>
+          <p:cNvPr id="10" name="TextBox 9"/>
+          <p:cNvSpPr txBox="1"/>
+          <p:nvPr/>
+        </p:nvSpPr>
+        <p:spPr>
+          <a:xfrm>
+            <a:off x="8622792" y="1188720"/>
             <a:ext cx="3127248" cy="164592"/>
           </a:xfrm>
           <a:prstGeom prst="rect">
@@ -41098,13 +40259,13 @@
       </p:sp>
       <p:sp>
         <p:nvSpPr>
-          <p:cNvPr id="15" name="TextBox 14"/>
-          <p:cNvSpPr txBox="1"/>
-          <p:nvPr/>
-        </p:nvSpPr>
-        <p:spPr>
-          <a:xfrm>
-            <a:off x="8622792" y="2061972"/>
+          <p:cNvPr id="11" name="TextBox 10"/>
+          <p:cNvSpPr txBox="1"/>
+          <p:nvPr/>
+        </p:nvSpPr>
+        <p:spPr>
+          <a:xfrm>
+            <a:off x="8622792" y="1380744"/>
             <a:ext cx="3127248" cy="160020"/>
           </a:xfrm>
           <a:prstGeom prst="rect">
@@ -41137,13 +40298,13 @@
       </p:sp>
       <p:sp>
         <p:nvSpPr>
-          <p:cNvPr id="16" name="Rectangle 15"/>
+          <p:cNvPr id="12" name="Rectangle 11"/>
           <p:cNvSpPr/>
           <p:nvPr/>
         </p:nvSpPr>
         <p:spPr>
           <a:xfrm>
-            <a:off x="8458200" y="2414016"/>
+            <a:off x="8458200" y="1732788"/>
             <a:ext cx="45720" cy="822960"/>
           </a:xfrm>
           <a:prstGeom prst="rect">
@@ -41181,13 +40342,13 @@
       </p:sp>
       <p:sp>
         <p:nvSpPr>
-          <p:cNvPr id="17" name="TextBox 16"/>
-          <p:cNvSpPr txBox="1"/>
-          <p:nvPr/>
-        </p:nvSpPr>
-        <p:spPr>
-          <a:xfrm>
-            <a:off x="8622792" y="2414016"/>
+          <p:cNvPr id="13" name="TextBox 12"/>
+          <p:cNvSpPr txBox="1"/>
+          <p:nvPr/>
+        </p:nvSpPr>
+        <p:spPr>
+          <a:xfrm>
+            <a:off x="8622792" y="1732788"/>
             <a:ext cx="3127248" cy="164592"/>
           </a:xfrm>
           <a:prstGeom prst="rect">
@@ -41220,13 +40381,13 @@
       </p:sp>
       <p:sp>
         <p:nvSpPr>
-          <p:cNvPr id="18" name="TextBox 17"/>
-          <p:cNvSpPr txBox="1"/>
-          <p:nvPr/>
-        </p:nvSpPr>
-        <p:spPr>
-          <a:xfrm>
-            <a:off x="8622792" y="2606040"/>
+          <p:cNvPr id="14" name="TextBox 13"/>
+          <p:cNvSpPr txBox="1"/>
+          <p:nvPr/>
+        </p:nvSpPr>
+        <p:spPr>
+          <a:xfrm>
+            <a:off x="8622792" y="1924812"/>
             <a:ext cx="3127248" cy="640080"/>
           </a:xfrm>
           <a:prstGeom prst="rect">
@@ -41259,13 +40420,13 @@
       </p:sp>
       <p:sp>
         <p:nvSpPr>
-          <p:cNvPr id="19" name="Rectangle 18"/>
+          <p:cNvPr id="15" name="Rectangle 14"/>
           <p:cNvSpPr/>
           <p:nvPr/>
         </p:nvSpPr>
         <p:spPr>
           <a:xfrm>
-            <a:off x="8458200" y="3438144"/>
+            <a:off x="8458200" y="2756916"/>
             <a:ext cx="45720" cy="342900"/>
           </a:xfrm>
           <a:prstGeom prst="rect">
@@ -41303,13 +40464,13 @@
       </p:sp>
       <p:sp>
         <p:nvSpPr>
-          <p:cNvPr id="20" name="TextBox 19"/>
-          <p:cNvSpPr txBox="1"/>
-          <p:nvPr/>
-        </p:nvSpPr>
-        <p:spPr>
-          <a:xfrm>
-            <a:off x="8622792" y="3438144"/>
+          <p:cNvPr id="16" name="TextBox 15"/>
+          <p:cNvSpPr txBox="1"/>
+          <p:nvPr/>
+        </p:nvSpPr>
+        <p:spPr>
+          <a:xfrm>
+            <a:off x="8622792" y="2756916"/>
             <a:ext cx="3127248" cy="164592"/>
           </a:xfrm>
           <a:prstGeom prst="rect">
@@ -41342,13 +40503,13 @@
       </p:sp>
       <p:sp>
         <p:nvSpPr>
-          <p:cNvPr id="21" name="TextBox 20"/>
-          <p:cNvSpPr txBox="1"/>
-          <p:nvPr/>
-        </p:nvSpPr>
-        <p:spPr>
-          <a:xfrm>
-            <a:off x="8622792" y="3630168"/>
+          <p:cNvPr id="17" name="TextBox 16"/>
+          <p:cNvSpPr txBox="1"/>
+          <p:nvPr/>
+        </p:nvSpPr>
+        <p:spPr>
+          <a:xfrm>
+            <a:off x="8622792" y="2948940"/>
             <a:ext cx="3127248" cy="160020"/>
           </a:xfrm>
           <a:prstGeom prst="rect">
@@ -41381,7 +40542,7 @@
       </p:sp>
       <p:sp>
         <p:nvSpPr>
-          <p:cNvPr id="22" name="Rectangle 21"/>
+          <p:cNvPr id="18" name="Rectangle 17"/>
           <p:cNvSpPr/>
           <p:nvPr/>
         </p:nvSpPr>
@@ -41425,7 +40586,7 @@
       </p:sp>
       <p:sp>
         <p:nvSpPr>
-          <p:cNvPr id="23" name="TextBox 22"/>
+          <p:cNvPr id="19" name="TextBox 18"/>
           <p:cNvSpPr txBox="1"/>
           <p:nvPr/>
         </p:nvSpPr>
@@ -41464,7 +40625,7 @@
       </p:sp>
       <p:sp>
         <p:nvSpPr>
-          <p:cNvPr id="24" name="TextBox 23"/>
+          <p:cNvPr id="20" name="TextBox 19"/>
           <p:cNvSpPr txBox="1"/>
           <p:nvPr/>
         </p:nvSpPr>
@@ -41802,197 +40963,13 @@
       </p:pic>
       <p:sp>
         <p:nvSpPr>
-          <p:cNvPr id="9" name="Oval 8"/>
+          <p:cNvPr id="9" name="Rectangle 8"/>
           <p:cNvSpPr/>
           <p:nvPr/>
         </p:nvSpPr>
         <p:spPr>
           <a:xfrm>
-            <a:off x="1307179" y="1572310"/>
-            <a:ext cx="274320" cy="274320"/>
-          </a:xfrm>
-          <a:prstGeom prst="ellipse">
-            <a:avLst/>
-          </a:prstGeom>
-          <a:solidFill>
-            <a:srgbClr val="C25B2E"/>
-          </a:solidFill>
-          <a:ln>
-            <a:noFill/>
-          </a:ln>
-          <a:effectLst/>
-        </p:spPr>
-        <p:style>
-          <a:lnRef idx="1">
-            <a:schemeClr val="accent1"/>
-          </a:lnRef>
-          <a:fillRef idx="3">
-            <a:schemeClr val="accent1"/>
-          </a:fillRef>
-          <a:effectRef idx="2">
-            <a:schemeClr val="accent1"/>
-          </a:effectRef>
-          <a:fontRef idx="minor">
-            <a:schemeClr val="lt1"/>
-          </a:fontRef>
-        </p:style>
-        <p:txBody>
-          <a:bodyPr rtlCol="0" anchor="ctr" lIns="0" rIns="0" tIns="0" bIns="0" wrap="none"/>
-          <a:lstStyle/>
-          <a:p>
-            <a:pPr algn="ctr"/>
-            <a:r>
-              <a:rPr sz="1300" b="1">
-                <a:solidFill>
-                  <a:srgbClr val="FFFFFF"/>
-                </a:solidFill>
-                <a:latin typeface="Calibri"/>
-              </a:rPr>
-              <a:t>1</a:t>
-            </a:r>
-          </a:p>
-        </p:txBody>
-      </p:sp>
-      <p:sp>
-        <p:nvSpPr>
-          <p:cNvPr id="10" name="TextBox 9"/>
-          <p:cNvSpPr txBox="1"/>
-          <p:nvPr/>
-        </p:nvSpPr>
-        <p:spPr>
-          <a:xfrm>
             <a:off x="8458200" y="1188720"/>
-            <a:ext cx="3291840" cy="219456"/>
-          </a:xfrm>
-          <a:prstGeom prst="rect">
-            <a:avLst/>
-          </a:prstGeom>
-          <a:noFill/>
-        </p:spPr>
-        <p:txBody>
-          <a:bodyPr wrap="square" anchor="t" lIns="0" rIns="0" tIns="0" bIns="0">
-            <a:spAutoFit/>
-          </a:bodyPr>
-          <a:lstStyle/>
-          <a:p>
-            <a:pPr algn="l">
-              <a:lnSpc>
-                <a:spcPct val="115000"/>
-              </a:lnSpc>
-            </a:pPr>
-            <a:r>
-              <a:rPr sz="1000" b="1">
-                <a:solidFill>
-                  <a:srgbClr val="C25B2E"/>
-                </a:solidFill>
-                <a:latin typeface="Calibri"/>
-              </a:rPr>
-              <a:t>ON THIS SCREEN</a:t>
-            </a:r>
-          </a:p>
-        </p:txBody>
-      </p:sp>
-      <p:sp>
-        <p:nvSpPr>
-          <p:cNvPr id="11" name="Oval 10"/>
-          <p:cNvSpPr/>
-          <p:nvPr/>
-        </p:nvSpPr>
-        <p:spPr>
-          <a:xfrm>
-            <a:off x="8458200" y="1463040"/>
-            <a:ext cx="210312" cy="210312"/>
-          </a:xfrm>
-          <a:prstGeom prst="ellipse">
-            <a:avLst/>
-          </a:prstGeom>
-          <a:solidFill>
-            <a:srgbClr val="C25B2E"/>
-          </a:solidFill>
-          <a:ln>
-            <a:noFill/>
-          </a:ln>
-          <a:effectLst/>
-        </p:spPr>
-        <p:style>
-          <a:lnRef idx="1">
-            <a:schemeClr val="accent1"/>
-          </a:lnRef>
-          <a:fillRef idx="3">
-            <a:schemeClr val="accent1"/>
-          </a:fillRef>
-          <a:effectRef idx="2">
-            <a:schemeClr val="accent1"/>
-          </a:effectRef>
-          <a:fontRef idx="minor">
-            <a:schemeClr val="lt1"/>
-          </a:fontRef>
-        </p:style>
-        <p:txBody>
-          <a:bodyPr rtlCol="0" anchor="ctr" lIns="0" rIns="0" tIns="0" bIns="0" wrap="none"/>
-          <a:lstStyle/>
-          <a:p>
-            <a:pPr algn="ctr"/>
-            <a:r>
-              <a:rPr sz="1000" b="1">
-                <a:solidFill>
-                  <a:srgbClr val="FFFFFF"/>
-                </a:solidFill>
-                <a:latin typeface="Calibri"/>
-              </a:rPr>
-              <a:t>1</a:t>
-            </a:r>
-          </a:p>
-        </p:txBody>
-      </p:sp>
-      <p:sp>
-        <p:nvSpPr>
-          <p:cNvPr id="12" name="TextBox 11"/>
-          <p:cNvSpPr txBox="1"/>
-          <p:nvPr/>
-        </p:nvSpPr>
-        <p:spPr>
-          <a:xfrm>
-            <a:off x="8787384" y="1481328"/>
-            <a:ext cx="2962656" cy="169164"/>
-          </a:xfrm>
-          <a:prstGeom prst="rect">
-            <a:avLst/>
-          </a:prstGeom>
-          <a:noFill/>
-        </p:spPr>
-        <p:txBody>
-          <a:bodyPr wrap="square" anchor="t" lIns="0" rIns="0" tIns="0" bIns="0">
-            <a:spAutoFit/>
-          </a:bodyPr>
-          <a:lstStyle/>
-          <a:p>
-            <a:pPr algn="l">
-              <a:lnSpc>
-                <a:spcPct val="105000"/>
-              </a:lnSpc>
-            </a:pPr>
-            <a:r>
-              <a:rPr sz="1050" b="0">
-                <a:solidFill>
-                  <a:srgbClr val="1B2A33"/>
-                </a:solidFill>
-                <a:latin typeface="Calibri"/>
-              </a:rPr>
-              <a:t>Enrol a second factor</a:t>
-            </a:r>
-          </a:p>
-        </p:txBody>
-      </p:sp>
-      <p:sp>
-        <p:nvSpPr>
-          <p:cNvPr id="13" name="Rectangle 12"/>
-          <p:cNvSpPr/>
-          <p:nvPr/>
-        </p:nvSpPr>
-        <p:spPr>
-          <a:xfrm>
-            <a:off x="8458200" y="1869948"/>
             <a:ext cx="45720" cy="502920"/>
           </a:xfrm>
           <a:prstGeom prst="rect">
@@ -42030,13 +41007,13 @@
       </p:sp>
       <p:sp>
         <p:nvSpPr>
-          <p:cNvPr id="14" name="TextBox 13"/>
-          <p:cNvSpPr txBox="1"/>
-          <p:nvPr/>
-        </p:nvSpPr>
-        <p:spPr>
-          <a:xfrm>
-            <a:off x="8622792" y="1869948"/>
+          <p:cNvPr id="10" name="TextBox 9"/>
+          <p:cNvSpPr txBox="1"/>
+          <p:nvPr/>
+        </p:nvSpPr>
+        <p:spPr>
+          <a:xfrm>
+            <a:off x="8622792" y="1188720"/>
             <a:ext cx="3127248" cy="164592"/>
           </a:xfrm>
           <a:prstGeom prst="rect">
@@ -42069,13 +41046,13 @@
       </p:sp>
       <p:sp>
         <p:nvSpPr>
-          <p:cNvPr id="15" name="TextBox 14"/>
-          <p:cNvSpPr txBox="1"/>
-          <p:nvPr/>
-        </p:nvSpPr>
-        <p:spPr>
-          <a:xfrm>
-            <a:off x="8622792" y="2061972"/>
+          <p:cNvPr id="11" name="TextBox 10"/>
+          <p:cNvSpPr txBox="1"/>
+          <p:nvPr/>
+        </p:nvSpPr>
+        <p:spPr>
+          <a:xfrm>
+            <a:off x="8622792" y="1380744"/>
             <a:ext cx="3127248" cy="320040"/>
           </a:xfrm>
           <a:prstGeom prst="rect">
@@ -42108,13 +41085,13 @@
       </p:sp>
       <p:sp>
         <p:nvSpPr>
-          <p:cNvPr id="16" name="Rectangle 15"/>
+          <p:cNvPr id="12" name="Rectangle 11"/>
           <p:cNvSpPr/>
           <p:nvPr/>
         </p:nvSpPr>
         <p:spPr>
           <a:xfrm>
-            <a:off x="8458200" y="2574036"/>
+            <a:off x="8458200" y="1892808"/>
             <a:ext cx="45720" cy="982980"/>
           </a:xfrm>
           <a:prstGeom prst="rect">
@@ -42152,13 +41129,13 @@
       </p:sp>
       <p:sp>
         <p:nvSpPr>
-          <p:cNvPr id="17" name="TextBox 16"/>
-          <p:cNvSpPr txBox="1"/>
-          <p:nvPr/>
-        </p:nvSpPr>
-        <p:spPr>
-          <a:xfrm>
-            <a:off x="8622792" y="2574036"/>
+          <p:cNvPr id="13" name="TextBox 12"/>
+          <p:cNvSpPr txBox="1"/>
+          <p:nvPr/>
+        </p:nvSpPr>
+        <p:spPr>
+          <a:xfrm>
+            <a:off x="8622792" y="1892808"/>
             <a:ext cx="3127248" cy="164592"/>
           </a:xfrm>
           <a:prstGeom prst="rect">
@@ -42191,13 +41168,13 @@
       </p:sp>
       <p:sp>
         <p:nvSpPr>
-          <p:cNvPr id="18" name="TextBox 17"/>
-          <p:cNvSpPr txBox="1"/>
-          <p:nvPr/>
-        </p:nvSpPr>
-        <p:spPr>
-          <a:xfrm>
-            <a:off x="8622792" y="2766060"/>
+          <p:cNvPr id="14" name="TextBox 13"/>
+          <p:cNvSpPr txBox="1"/>
+          <p:nvPr/>
+        </p:nvSpPr>
+        <p:spPr>
+          <a:xfrm>
+            <a:off x="8622792" y="2084832"/>
             <a:ext cx="3127248" cy="800100"/>
           </a:xfrm>
           <a:prstGeom prst="rect">
@@ -42230,13 +41207,13 @@
       </p:sp>
       <p:sp>
         <p:nvSpPr>
-          <p:cNvPr id="19" name="Rectangle 18"/>
+          <p:cNvPr id="15" name="Rectangle 14"/>
           <p:cNvSpPr/>
           <p:nvPr/>
         </p:nvSpPr>
         <p:spPr>
           <a:xfrm>
-            <a:off x="8458200" y="3758184"/>
+            <a:off x="8458200" y="3076956"/>
             <a:ext cx="45720" cy="502920"/>
           </a:xfrm>
           <a:prstGeom prst="rect">
@@ -42274,13 +41251,13 @@
       </p:sp>
       <p:sp>
         <p:nvSpPr>
-          <p:cNvPr id="20" name="TextBox 19"/>
-          <p:cNvSpPr txBox="1"/>
-          <p:nvPr/>
-        </p:nvSpPr>
-        <p:spPr>
-          <a:xfrm>
-            <a:off x="8622792" y="3758184"/>
+          <p:cNvPr id="16" name="TextBox 15"/>
+          <p:cNvSpPr txBox="1"/>
+          <p:nvPr/>
+        </p:nvSpPr>
+        <p:spPr>
+          <a:xfrm>
+            <a:off x="8622792" y="3076956"/>
             <a:ext cx="3127248" cy="164592"/>
           </a:xfrm>
           <a:prstGeom prst="rect">
@@ -42313,13 +41290,13 @@
       </p:sp>
       <p:sp>
         <p:nvSpPr>
-          <p:cNvPr id="21" name="TextBox 20"/>
-          <p:cNvSpPr txBox="1"/>
-          <p:nvPr/>
-        </p:nvSpPr>
-        <p:spPr>
-          <a:xfrm>
-            <a:off x="8622792" y="3950208"/>
+          <p:cNvPr id="17" name="TextBox 16"/>
+          <p:cNvSpPr txBox="1"/>
+          <p:nvPr/>
+        </p:nvSpPr>
+        <p:spPr>
+          <a:xfrm>
+            <a:off x="8622792" y="3268980"/>
             <a:ext cx="3127248" cy="320040"/>
           </a:xfrm>
           <a:prstGeom prst="rect">
@@ -42352,7 +41329,7 @@
       </p:sp>
       <p:sp>
         <p:nvSpPr>
-          <p:cNvPr id="22" name="Rectangle 21"/>
+          <p:cNvPr id="18" name="Rectangle 17"/>
           <p:cNvSpPr/>
           <p:nvPr/>
         </p:nvSpPr>
@@ -42396,7 +41373,7 @@
       </p:sp>
       <p:sp>
         <p:nvSpPr>
-          <p:cNvPr id="23" name="TextBox 22"/>
+          <p:cNvPr id="19" name="TextBox 18"/>
           <p:cNvSpPr txBox="1"/>
           <p:nvPr/>
         </p:nvSpPr>
@@ -42435,7 +41412,7 @@
       </p:sp>
       <p:sp>
         <p:nvSpPr>
-          <p:cNvPr id="24" name="TextBox 23"/>
+          <p:cNvPr id="20" name="TextBox 19"/>
           <p:cNvSpPr txBox="1"/>
           <p:nvPr/>
         </p:nvSpPr>
@@ -43851,197 +42828,13 @@
       </p:pic>
       <p:sp>
         <p:nvSpPr>
-          <p:cNvPr id="9" name="Oval 8"/>
+          <p:cNvPr id="9" name="Rectangle 8"/>
           <p:cNvSpPr/>
           <p:nvPr/>
         </p:nvSpPr>
         <p:spPr>
           <a:xfrm>
-            <a:off x="1307179" y="1572310"/>
-            <a:ext cx="274320" cy="274320"/>
-          </a:xfrm>
-          <a:prstGeom prst="ellipse">
-            <a:avLst/>
-          </a:prstGeom>
-          <a:solidFill>
-            <a:srgbClr val="C25B2E"/>
-          </a:solidFill>
-          <a:ln>
-            <a:noFill/>
-          </a:ln>
-          <a:effectLst/>
-        </p:spPr>
-        <p:style>
-          <a:lnRef idx="1">
-            <a:schemeClr val="accent1"/>
-          </a:lnRef>
-          <a:fillRef idx="3">
-            <a:schemeClr val="accent1"/>
-          </a:fillRef>
-          <a:effectRef idx="2">
-            <a:schemeClr val="accent1"/>
-          </a:effectRef>
-          <a:fontRef idx="minor">
-            <a:schemeClr val="lt1"/>
-          </a:fontRef>
-        </p:style>
-        <p:txBody>
-          <a:bodyPr rtlCol="0" anchor="ctr" lIns="0" rIns="0" tIns="0" bIns="0" wrap="none"/>
-          <a:lstStyle/>
-          <a:p>
-            <a:pPr algn="ctr"/>
-            <a:r>
-              <a:rPr sz="1300" b="1">
-                <a:solidFill>
-                  <a:srgbClr val="FFFFFF"/>
-                </a:solidFill>
-                <a:latin typeface="Calibri"/>
-              </a:rPr>
-              <a:t>1</a:t>
-            </a:r>
-          </a:p>
-        </p:txBody>
-      </p:sp>
-      <p:sp>
-        <p:nvSpPr>
-          <p:cNvPr id="10" name="TextBox 9"/>
-          <p:cNvSpPr txBox="1"/>
-          <p:nvPr/>
-        </p:nvSpPr>
-        <p:spPr>
-          <a:xfrm>
             <a:off x="8458200" y="1188720"/>
-            <a:ext cx="3291840" cy="219456"/>
-          </a:xfrm>
-          <a:prstGeom prst="rect">
-            <a:avLst/>
-          </a:prstGeom>
-          <a:noFill/>
-        </p:spPr>
-        <p:txBody>
-          <a:bodyPr wrap="square" anchor="t" lIns="0" rIns="0" tIns="0" bIns="0">
-            <a:spAutoFit/>
-          </a:bodyPr>
-          <a:lstStyle/>
-          <a:p>
-            <a:pPr algn="l">
-              <a:lnSpc>
-                <a:spcPct val="115000"/>
-              </a:lnSpc>
-            </a:pPr>
-            <a:r>
-              <a:rPr sz="1000" b="1">
-                <a:solidFill>
-                  <a:srgbClr val="C25B2E"/>
-                </a:solidFill>
-                <a:latin typeface="Calibri"/>
-              </a:rPr>
-              <a:t>ON THIS SCREEN</a:t>
-            </a:r>
-          </a:p>
-        </p:txBody>
-      </p:sp>
-      <p:sp>
-        <p:nvSpPr>
-          <p:cNvPr id="11" name="Oval 10"/>
-          <p:cNvSpPr/>
-          <p:nvPr/>
-        </p:nvSpPr>
-        <p:spPr>
-          <a:xfrm>
-            <a:off x="8458200" y="1463040"/>
-            <a:ext cx="210312" cy="210312"/>
-          </a:xfrm>
-          <a:prstGeom prst="ellipse">
-            <a:avLst/>
-          </a:prstGeom>
-          <a:solidFill>
-            <a:srgbClr val="C25B2E"/>
-          </a:solidFill>
-          <a:ln>
-            <a:noFill/>
-          </a:ln>
-          <a:effectLst/>
-        </p:spPr>
-        <p:style>
-          <a:lnRef idx="1">
-            <a:schemeClr val="accent1"/>
-          </a:lnRef>
-          <a:fillRef idx="3">
-            <a:schemeClr val="accent1"/>
-          </a:fillRef>
-          <a:effectRef idx="2">
-            <a:schemeClr val="accent1"/>
-          </a:effectRef>
-          <a:fontRef idx="minor">
-            <a:schemeClr val="lt1"/>
-          </a:fontRef>
-        </p:style>
-        <p:txBody>
-          <a:bodyPr rtlCol="0" anchor="ctr" lIns="0" rIns="0" tIns="0" bIns="0" wrap="none"/>
-          <a:lstStyle/>
-          <a:p>
-            <a:pPr algn="ctr"/>
-            <a:r>
-              <a:rPr sz="1000" b="1">
-                <a:solidFill>
-                  <a:srgbClr val="FFFFFF"/>
-                </a:solidFill>
-                <a:latin typeface="Calibri"/>
-              </a:rPr>
-              <a:t>1</a:t>
-            </a:r>
-          </a:p>
-        </p:txBody>
-      </p:sp>
-      <p:sp>
-        <p:nvSpPr>
-          <p:cNvPr id="12" name="TextBox 11"/>
-          <p:cNvSpPr txBox="1"/>
-          <p:nvPr/>
-        </p:nvSpPr>
-        <p:spPr>
-          <a:xfrm>
-            <a:off x="8787384" y="1481328"/>
-            <a:ext cx="2962656" cy="169164"/>
-          </a:xfrm>
-          <a:prstGeom prst="rect">
-            <a:avLst/>
-          </a:prstGeom>
-          <a:noFill/>
-        </p:spPr>
-        <p:txBody>
-          <a:bodyPr wrap="square" anchor="t" lIns="0" rIns="0" tIns="0" bIns="0">
-            <a:spAutoFit/>
-          </a:bodyPr>
-          <a:lstStyle/>
-          <a:p>
-            <a:pPr algn="l">
-              <a:lnSpc>
-                <a:spcPct val="105000"/>
-              </a:lnSpc>
-            </a:pPr>
-            <a:r>
-              <a:rPr sz="1050" b="0">
-                <a:solidFill>
-                  <a:srgbClr val="1B2A33"/>
-                </a:solidFill>
-                <a:latin typeface="Calibri"/>
-              </a:rPr>
-              <a:t>The same tiles everyone else sees</a:t>
-            </a:r>
-          </a:p>
-        </p:txBody>
-      </p:sp>
-      <p:sp>
-        <p:nvSpPr>
-          <p:cNvPr id="13" name="Rectangle 12"/>
-          <p:cNvSpPr/>
-          <p:nvPr/>
-        </p:nvSpPr>
-        <p:spPr>
-          <a:xfrm>
-            <a:off x="8458200" y="1869948"/>
             <a:ext cx="45720" cy="342900"/>
           </a:xfrm>
           <a:prstGeom prst="rect">
@@ -44079,13 +42872,13 @@
       </p:sp>
       <p:sp>
         <p:nvSpPr>
-          <p:cNvPr id="14" name="TextBox 13"/>
-          <p:cNvSpPr txBox="1"/>
-          <p:nvPr/>
-        </p:nvSpPr>
-        <p:spPr>
-          <a:xfrm>
-            <a:off x="8622792" y="1869948"/>
+          <p:cNvPr id="10" name="TextBox 9"/>
+          <p:cNvSpPr txBox="1"/>
+          <p:nvPr/>
+        </p:nvSpPr>
+        <p:spPr>
+          <a:xfrm>
+            <a:off x="8622792" y="1188720"/>
             <a:ext cx="3127248" cy="164592"/>
           </a:xfrm>
           <a:prstGeom prst="rect">
@@ -44118,13 +42911,13 @@
       </p:sp>
       <p:sp>
         <p:nvSpPr>
-          <p:cNvPr id="15" name="TextBox 14"/>
-          <p:cNvSpPr txBox="1"/>
-          <p:nvPr/>
-        </p:nvSpPr>
-        <p:spPr>
-          <a:xfrm>
-            <a:off x="8622792" y="2061972"/>
+          <p:cNvPr id="11" name="TextBox 10"/>
+          <p:cNvSpPr txBox="1"/>
+          <p:nvPr/>
+        </p:nvSpPr>
+        <p:spPr>
+          <a:xfrm>
+            <a:off x="8622792" y="1380744"/>
             <a:ext cx="3127248" cy="160020"/>
           </a:xfrm>
           <a:prstGeom prst="rect">
@@ -44157,13 +42950,13 @@
       </p:sp>
       <p:sp>
         <p:nvSpPr>
-          <p:cNvPr id="16" name="Rectangle 15"/>
+          <p:cNvPr id="12" name="Rectangle 11"/>
           <p:cNvSpPr/>
           <p:nvPr/>
         </p:nvSpPr>
         <p:spPr>
           <a:xfrm>
-            <a:off x="8458200" y="2414016"/>
+            <a:off x="8458200" y="1732788"/>
             <a:ext cx="45720" cy="662940"/>
           </a:xfrm>
           <a:prstGeom prst="rect">
@@ -44201,13 +42994,13 @@
       </p:sp>
       <p:sp>
         <p:nvSpPr>
-          <p:cNvPr id="17" name="TextBox 16"/>
-          <p:cNvSpPr txBox="1"/>
-          <p:nvPr/>
-        </p:nvSpPr>
-        <p:spPr>
-          <a:xfrm>
-            <a:off x="8622792" y="2414016"/>
+          <p:cNvPr id="13" name="TextBox 12"/>
+          <p:cNvSpPr txBox="1"/>
+          <p:nvPr/>
+        </p:nvSpPr>
+        <p:spPr>
+          <a:xfrm>
+            <a:off x="8622792" y="1732788"/>
             <a:ext cx="3127248" cy="164592"/>
           </a:xfrm>
           <a:prstGeom prst="rect">
@@ -44240,13 +43033,13 @@
       </p:sp>
       <p:sp>
         <p:nvSpPr>
-          <p:cNvPr id="18" name="TextBox 17"/>
-          <p:cNvSpPr txBox="1"/>
-          <p:nvPr/>
-        </p:nvSpPr>
-        <p:spPr>
-          <a:xfrm>
-            <a:off x="8622792" y="2606040"/>
+          <p:cNvPr id="14" name="TextBox 13"/>
+          <p:cNvSpPr txBox="1"/>
+          <p:nvPr/>
+        </p:nvSpPr>
+        <p:spPr>
+          <a:xfrm>
+            <a:off x="8622792" y="1924812"/>
             <a:ext cx="3127248" cy="480060"/>
           </a:xfrm>
           <a:prstGeom prst="rect">
@@ -44279,13 +43072,13 @@
       </p:sp>
       <p:sp>
         <p:nvSpPr>
-          <p:cNvPr id="19" name="Rectangle 18"/>
+          <p:cNvPr id="15" name="Rectangle 14"/>
           <p:cNvSpPr/>
           <p:nvPr/>
         </p:nvSpPr>
         <p:spPr>
           <a:xfrm>
-            <a:off x="8458200" y="3278124"/>
+            <a:off x="8458200" y="2596896"/>
             <a:ext cx="45720" cy="342900"/>
           </a:xfrm>
           <a:prstGeom prst="rect">
@@ -44323,13 +43116,13 @@
       </p:sp>
       <p:sp>
         <p:nvSpPr>
-          <p:cNvPr id="20" name="TextBox 19"/>
-          <p:cNvSpPr txBox="1"/>
-          <p:nvPr/>
-        </p:nvSpPr>
-        <p:spPr>
-          <a:xfrm>
-            <a:off x="8622792" y="3278124"/>
+          <p:cNvPr id="16" name="TextBox 15"/>
+          <p:cNvSpPr txBox="1"/>
+          <p:nvPr/>
+        </p:nvSpPr>
+        <p:spPr>
+          <a:xfrm>
+            <a:off x="8622792" y="2596896"/>
             <a:ext cx="3127248" cy="164592"/>
           </a:xfrm>
           <a:prstGeom prst="rect">
@@ -44362,13 +43155,13 @@
       </p:sp>
       <p:sp>
         <p:nvSpPr>
-          <p:cNvPr id="21" name="TextBox 20"/>
-          <p:cNvSpPr txBox="1"/>
-          <p:nvPr/>
-        </p:nvSpPr>
-        <p:spPr>
-          <a:xfrm>
-            <a:off x="8622792" y="3470148"/>
+          <p:cNvPr id="17" name="TextBox 16"/>
+          <p:cNvSpPr txBox="1"/>
+          <p:nvPr/>
+        </p:nvSpPr>
+        <p:spPr>
+          <a:xfrm>
+            <a:off x="8622792" y="2788920"/>
             <a:ext cx="3127248" cy="160020"/>
           </a:xfrm>
           <a:prstGeom prst="rect">
@@ -44401,7 +43194,7 @@
       </p:sp>
       <p:sp>
         <p:nvSpPr>
-          <p:cNvPr id="22" name="Rectangle 21"/>
+          <p:cNvPr id="18" name="Rectangle 17"/>
           <p:cNvSpPr/>
           <p:nvPr/>
         </p:nvSpPr>
@@ -44445,7 +43238,7 @@
       </p:sp>
       <p:sp>
         <p:nvSpPr>
-          <p:cNvPr id="23" name="TextBox 22"/>
+          <p:cNvPr id="19" name="TextBox 18"/>
           <p:cNvSpPr txBox="1"/>
           <p:nvPr/>
         </p:nvSpPr>
@@ -44484,7 +43277,7 @@
       </p:sp>
       <p:sp>
         <p:nvSpPr>
-          <p:cNvPr id="24" name="TextBox 23"/>
+          <p:cNvPr id="20" name="TextBox 19"/>
           <p:cNvSpPr txBox="1"/>
           <p:nvPr/>
         </p:nvSpPr>
@@ -44822,197 +43615,13 @@
       </p:pic>
       <p:sp>
         <p:nvSpPr>
-          <p:cNvPr id="9" name="Oval 8"/>
+          <p:cNvPr id="9" name="Rectangle 8"/>
           <p:cNvSpPr/>
           <p:nvPr/>
         </p:nvSpPr>
         <p:spPr>
           <a:xfrm>
-            <a:off x="1307179" y="1572310"/>
-            <a:ext cx="274320" cy="274320"/>
-          </a:xfrm>
-          <a:prstGeom prst="ellipse">
-            <a:avLst/>
-          </a:prstGeom>
-          <a:solidFill>
-            <a:srgbClr val="C25B2E"/>
-          </a:solidFill>
-          <a:ln>
-            <a:noFill/>
-          </a:ln>
-          <a:effectLst/>
-        </p:spPr>
-        <p:style>
-          <a:lnRef idx="1">
-            <a:schemeClr val="accent1"/>
-          </a:lnRef>
-          <a:fillRef idx="3">
-            <a:schemeClr val="accent1"/>
-          </a:fillRef>
-          <a:effectRef idx="2">
-            <a:schemeClr val="accent1"/>
-          </a:effectRef>
-          <a:fontRef idx="minor">
-            <a:schemeClr val="lt1"/>
-          </a:fontRef>
-        </p:style>
-        <p:txBody>
-          <a:bodyPr rtlCol="0" anchor="ctr" lIns="0" rIns="0" tIns="0" bIns="0" wrap="none"/>
-          <a:lstStyle/>
-          <a:p>
-            <a:pPr algn="ctr"/>
-            <a:r>
-              <a:rPr sz="1300" b="1">
-                <a:solidFill>
-                  <a:srgbClr val="FFFFFF"/>
-                </a:solidFill>
-                <a:latin typeface="Calibri"/>
-              </a:rPr>
-              <a:t>1</a:t>
-            </a:r>
-          </a:p>
-        </p:txBody>
-      </p:sp>
-      <p:sp>
-        <p:nvSpPr>
-          <p:cNvPr id="10" name="TextBox 9"/>
-          <p:cNvSpPr txBox="1"/>
-          <p:nvPr/>
-        </p:nvSpPr>
-        <p:spPr>
-          <a:xfrm>
             <a:off x="8458200" y="1188720"/>
-            <a:ext cx="3291840" cy="219456"/>
-          </a:xfrm>
-          <a:prstGeom prst="rect">
-            <a:avLst/>
-          </a:prstGeom>
-          <a:noFill/>
-        </p:spPr>
-        <p:txBody>
-          <a:bodyPr wrap="square" anchor="t" lIns="0" rIns="0" tIns="0" bIns="0">
-            <a:spAutoFit/>
-          </a:bodyPr>
-          <a:lstStyle/>
-          <a:p>
-            <a:pPr algn="l">
-              <a:lnSpc>
-                <a:spcPct val="115000"/>
-              </a:lnSpc>
-            </a:pPr>
-            <a:r>
-              <a:rPr sz="1000" b="1">
-                <a:solidFill>
-                  <a:srgbClr val="C25B2E"/>
-                </a:solidFill>
-                <a:latin typeface="Calibri"/>
-              </a:rPr>
-              <a:t>ON THIS SCREEN</a:t>
-            </a:r>
-          </a:p>
-        </p:txBody>
-      </p:sp>
-      <p:sp>
-        <p:nvSpPr>
-          <p:cNvPr id="11" name="Oval 10"/>
-          <p:cNvSpPr/>
-          <p:nvPr/>
-        </p:nvSpPr>
-        <p:spPr>
-          <a:xfrm>
-            <a:off x="8458200" y="1463040"/>
-            <a:ext cx="210312" cy="210312"/>
-          </a:xfrm>
-          <a:prstGeom prst="ellipse">
-            <a:avLst/>
-          </a:prstGeom>
-          <a:solidFill>
-            <a:srgbClr val="C25B2E"/>
-          </a:solidFill>
-          <a:ln>
-            <a:noFill/>
-          </a:ln>
-          <a:effectLst/>
-        </p:spPr>
-        <p:style>
-          <a:lnRef idx="1">
-            <a:schemeClr val="accent1"/>
-          </a:lnRef>
-          <a:fillRef idx="3">
-            <a:schemeClr val="accent1"/>
-          </a:fillRef>
-          <a:effectRef idx="2">
-            <a:schemeClr val="accent1"/>
-          </a:effectRef>
-          <a:fontRef idx="minor">
-            <a:schemeClr val="lt1"/>
-          </a:fontRef>
-        </p:style>
-        <p:txBody>
-          <a:bodyPr rtlCol="0" anchor="ctr" lIns="0" rIns="0" tIns="0" bIns="0" wrap="none"/>
-          <a:lstStyle/>
-          <a:p>
-            <a:pPr algn="ctr"/>
-            <a:r>
-              <a:rPr sz="1000" b="1">
-                <a:solidFill>
-                  <a:srgbClr val="FFFFFF"/>
-                </a:solidFill>
-                <a:latin typeface="Calibri"/>
-              </a:rPr>
-              <a:t>1</a:t>
-            </a:r>
-          </a:p>
-        </p:txBody>
-      </p:sp>
-      <p:sp>
-        <p:nvSpPr>
-          <p:cNvPr id="12" name="TextBox 11"/>
-          <p:cNvSpPr txBox="1"/>
-          <p:nvPr/>
-        </p:nvSpPr>
-        <p:spPr>
-          <a:xfrm>
-            <a:off x="8787384" y="1481328"/>
-            <a:ext cx="2962656" cy="169164"/>
-          </a:xfrm>
-          <a:prstGeom prst="rect">
-            <a:avLst/>
-          </a:prstGeom>
-          <a:noFill/>
-        </p:spPr>
-        <p:txBody>
-          <a:bodyPr wrap="square" anchor="t" lIns="0" rIns="0" tIns="0" bIns="0">
-            <a:spAutoFit/>
-          </a:bodyPr>
-          <a:lstStyle/>
-          <a:p>
-            <a:pPr algn="l">
-              <a:lnSpc>
-                <a:spcPct val="105000"/>
-              </a:lnSpc>
-            </a:pPr>
-            <a:r>
-              <a:rPr sz="1050" b="0">
-                <a:solidFill>
-                  <a:srgbClr val="1B2A33"/>
-                </a:solidFill>
-                <a:latin typeface="Calibri"/>
-              </a:rPr>
-              <a:t>Who changed what, when, from where</a:t>
-            </a:r>
-          </a:p>
-        </p:txBody>
-      </p:sp>
-      <p:sp>
-        <p:nvSpPr>
-          <p:cNvPr id="13" name="Rectangle 12"/>
-          <p:cNvSpPr/>
-          <p:nvPr/>
-        </p:nvSpPr>
-        <p:spPr>
-          <a:xfrm>
-            <a:off x="8458200" y="1869948"/>
             <a:ext cx="45720" cy="502920"/>
           </a:xfrm>
           <a:prstGeom prst="rect">
@@ -45050,13 +43659,13 @@
       </p:sp>
       <p:sp>
         <p:nvSpPr>
-          <p:cNvPr id="14" name="TextBox 13"/>
-          <p:cNvSpPr txBox="1"/>
-          <p:nvPr/>
-        </p:nvSpPr>
-        <p:spPr>
-          <a:xfrm>
-            <a:off x="8622792" y="1869948"/>
+          <p:cNvPr id="10" name="TextBox 9"/>
+          <p:cNvSpPr txBox="1"/>
+          <p:nvPr/>
+        </p:nvSpPr>
+        <p:spPr>
+          <a:xfrm>
+            <a:off x="8622792" y="1188720"/>
             <a:ext cx="3127248" cy="164592"/>
           </a:xfrm>
           <a:prstGeom prst="rect">
@@ -45089,13 +43698,13 @@
       </p:sp>
       <p:sp>
         <p:nvSpPr>
-          <p:cNvPr id="15" name="TextBox 14"/>
-          <p:cNvSpPr txBox="1"/>
-          <p:nvPr/>
-        </p:nvSpPr>
-        <p:spPr>
-          <a:xfrm>
-            <a:off x="8622792" y="2061972"/>
+          <p:cNvPr id="11" name="TextBox 10"/>
+          <p:cNvSpPr txBox="1"/>
+          <p:nvPr/>
+        </p:nvSpPr>
+        <p:spPr>
+          <a:xfrm>
+            <a:off x="8622792" y="1380744"/>
             <a:ext cx="3127248" cy="320040"/>
           </a:xfrm>
           <a:prstGeom prst="rect">
@@ -45128,13 +43737,13 @@
       </p:sp>
       <p:sp>
         <p:nvSpPr>
-          <p:cNvPr id="16" name="Rectangle 15"/>
+          <p:cNvPr id="12" name="Rectangle 11"/>
           <p:cNvSpPr/>
           <p:nvPr/>
         </p:nvSpPr>
         <p:spPr>
           <a:xfrm>
-            <a:off x="8458200" y="2574036"/>
+            <a:off x="8458200" y="1892808"/>
             <a:ext cx="45720" cy="662940"/>
           </a:xfrm>
           <a:prstGeom prst="rect">
@@ -45172,13 +43781,13 @@
       </p:sp>
       <p:sp>
         <p:nvSpPr>
-          <p:cNvPr id="17" name="TextBox 16"/>
-          <p:cNvSpPr txBox="1"/>
-          <p:nvPr/>
-        </p:nvSpPr>
-        <p:spPr>
-          <a:xfrm>
-            <a:off x="8622792" y="2574036"/>
+          <p:cNvPr id="13" name="TextBox 12"/>
+          <p:cNvSpPr txBox="1"/>
+          <p:nvPr/>
+        </p:nvSpPr>
+        <p:spPr>
+          <a:xfrm>
+            <a:off x="8622792" y="1892808"/>
             <a:ext cx="3127248" cy="164592"/>
           </a:xfrm>
           <a:prstGeom prst="rect">
@@ -45211,13 +43820,13 @@
       </p:sp>
       <p:sp>
         <p:nvSpPr>
-          <p:cNvPr id="18" name="TextBox 17"/>
-          <p:cNvSpPr txBox="1"/>
-          <p:nvPr/>
-        </p:nvSpPr>
-        <p:spPr>
-          <a:xfrm>
-            <a:off x="8622792" y="2766060"/>
+          <p:cNvPr id="14" name="TextBox 13"/>
+          <p:cNvSpPr txBox="1"/>
+          <p:nvPr/>
+        </p:nvSpPr>
+        <p:spPr>
+          <a:xfrm>
+            <a:off x="8622792" y="2084832"/>
             <a:ext cx="3127248" cy="480060"/>
           </a:xfrm>
           <a:prstGeom prst="rect">
@@ -45250,13 +43859,13 @@
       </p:sp>
       <p:sp>
         <p:nvSpPr>
-          <p:cNvPr id="19" name="Rectangle 18"/>
+          <p:cNvPr id="15" name="Rectangle 14"/>
           <p:cNvSpPr/>
           <p:nvPr/>
         </p:nvSpPr>
         <p:spPr>
           <a:xfrm>
-            <a:off x="8458200" y="3438144"/>
+            <a:off x="8458200" y="2756916"/>
             <a:ext cx="45720" cy="342900"/>
           </a:xfrm>
           <a:prstGeom prst="rect">
@@ -45294,13 +43903,13 @@
       </p:sp>
       <p:sp>
         <p:nvSpPr>
-          <p:cNvPr id="20" name="TextBox 19"/>
-          <p:cNvSpPr txBox="1"/>
-          <p:nvPr/>
-        </p:nvSpPr>
-        <p:spPr>
-          <a:xfrm>
-            <a:off x="8622792" y="3438144"/>
+          <p:cNvPr id="16" name="TextBox 15"/>
+          <p:cNvSpPr txBox="1"/>
+          <p:nvPr/>
+        </p:nvSpPr>
+        <p:spPr>
+          <a:xfrm>
+            <a:off x="8622792" y="2756916"/>
             <a:ext cx="3127248" cy="164592"/>
           </a:xfrm>
           <a:prstGeom prst="rect">
@@ -45333,13 +43942,13 @@
       </p:sp>
       <p:sp>
         <p:nvSpPr>
-          <p:cNvPr id="21" name="TextBox 20"/>
-          <p:cNvSpPr txBox="1"/>
-          <p:nvPr/>
-        </p:nvSpPr>
-        <p:spPr>
-          <a:xfrm>
-            <a:off x="8622792" y="3630168"/>
+          <p:cNvPr id="17" name="TextBox 16"/>
+          <p:cNvSpPr txBox="1"/>
+          <p:nvPr/>
+        </p:nvSpPr>
+        <p:spPr>
+          <a:xfrm>
+            <a:off x="8622792" y="2948940"/>
             <a:ext cx="3127248" cy="160020"/>
           </a:xfrm>
           <a:prstGeom prst="rect">
@@ -45372,7 +43981,7 @@
       </p:sp>
       <p:sp>
         <p:nvSpPr>
-          <p:cNvPr id="22" name="Rectangle 21"/>
+          <p:cNvPr id="18" name="Rectangle 17"/>
           <p:cNvSpPr/>
           <p:nvPr/>
         </p:nvSpPr>
@@ -45416,7 +44025,7 @@
       </p:sp>
       <p:sp>
         <p:nvSpPr>
-          <p:cNvPr id="23" name="TextBox 22"/>
+          <p:cNvPr id="19" name="TextBox 18"/>
           <p:cNvSpPr txBox="1"/>
           <p:nvPr/>
         </p:nvSpPr>
@@ -45455,7 +44064,7 @@
       </p:sp>
       <p:sp>
         <p:nvSpPr>
-          <p:cNvPr id="24" name="TextBox 23"/>
+          <p:cNvPr id="20" name="TextBox 19"/>
           <p:cNvSpPr txBox="1"/>
           <p:nvPr/>
         </p:nvSpPr>
@@ -45793,197 +44402,13 @@
       </p:pic>
       <p:sp>
         <p:nvSpPr>
-          <p:cNvPr id="9" name="Oval 8"/>
+          <p:cNvPr id="9" name="Rectangle 8"/>
           <p:cNvSpPr/>
           <p:nvPr/>
         </p:nvSpPr>
         <p:spPr>
           <a:xfrm>
-            <a:off x="1307179" y="1572310"/>
-            <a:ext cx="274320" cy="274320"/>
-          </a:xfrm>
-          <a:prstGeom prst="ellipse">
-            <a:avLst/>
-          </a:prstGeom>
-          <a:solidFill>
-            <a:srgbClr val="C25B2E"/>
-          </a:solidFill>
-          <a:ln>
-            <a:noFill/>
-          </a:ln>
-          <a:effectLst/>
-        </p:spPr>
-        <p:style>
-          <a:lnRef idx="1">
-            <a:schemeClr val="accent1"/>
-          </a:lnRef>
-          <a:fillRef idx="3">
-            <a:schemeClr val="accent1"/>
-          </a:fillRef>
-          <a:effectRef idx="2">
-            <a:schemeClr val="accent1"/>
-          </a:effectRef>
-          <a:fontRef idx="minor">
-            <a:schemeClr val="lt1"/>
-          </a:fontRef>
-        </p:style>
-        <p:txBody>
-          <a:bodyPr rtlCol="0" anchor="ctr" lIns="0" rIns="0" tIns="0" bIns="0" wrap="none"/>
-          <a:lstStyle/>
-          <a:p>
-            <a:pPr algn="ctr"/>
-            <a:r>
-              <a:rPr sz="1300" b="1">
-                <a:solidFill>
-                  <a:srgbClr val="FFFFFF"/>
-                </a:solidFill>
-                <a:latin typeface="Calibri"/>
-              </a:rPr>
-              <a:t>1</a:t>
-            </a:r>
-          </a:p>
-        </p:txBody>
-      </p:sp>
-      <p:sp>
-        <p:nvSpPr>
-          <p:cNvPr id="10" name="TextBox 9"/>
-          <p:cNvSpPr txBox="1"/>
-          <p:nvPr/>
-        </p:nvSpPr>
-        <p:spPr>
-          <a:xfrm>
             <a:off x="8458200" y="1188720"/>
-            <a:ext cx="3291840" cy="219456"/>
-          </a:xfrm>
-          <a:prstGeom prst="rect">
-            <a:avLst/>
-          </a:prstGeom>
-          <a:noFill/>
-        </p:spPr>
-        <p:txBody>
-          <a:bodyPr wrap="square" anchor="t" lIns="0" rIns="0" tIns="0" bIns="0">
-            <a:spAutoFit/>
-          </a:bodyPr>
-          <a:lstStyle/>
-          <a:p>
-            <a:pPr algn="l">
-              <a:lnSpc>
-                <a:spcPct val="115000"/>
-              </a:lnSpc>
-            </a:pPr>
-            <a:r>
-              <a:rPr sz="1000" b="1">
-                <a:solidFill>
-                  <a:srgbClr val="C25B2E"/>
-                </a:solidFill>
-                <a:latin typeface="Calibri"/>
-              </a:rPr>
-              <a:t>ON THIS SCREEN</a:t>
-            </a:r>
-          </a:p>
-        </p:txBody>
-      </p:sp>
-      <p:sp>
-        <p:nvSpPr>
-          <p:cNvPr id="11" name="Oval 10"/>
-          <p:cNvSpPr/>
-          <p:nvPr/>
-        </p:nvSpPr>
-        <p:spPr>
-          <a:xfrm>
-            <a:off x="8458200" y="1463040"/>
-            <a:ext cx="210312" cy="210312"/>
-          </a:xfrm>
-          <a:prstGeom prst="ellipse">
-            <a:avLst/>
-          </a:prstGeom>
-          <a:solidFill>
-            <a:srgbClr val="C25B2E"/>
-          </a:solidFill>
-          <a:ln>
-            <a:noFill/>
-          </a:ln>
-          <a:effectLst/>
-        </p:spPr>
-        <p:style>
-          <a:lnRef idx="1">
-            <a:schemeClr val="accent1"/>
-          </a:lnRef>
-          <a:fillRef idx="3">
-            <a:schemeClr val="accent1"/>
-          </a:fillRef>
-          <a:effectRef idx="2">
-            <a:schemeClr val="accent1"/>
-          </a:effectRef>
-          <a:fontRef idx="minor">
-            <a:schemeClr val="lt1"/>
-          </a:fontRef>
-        </p:style>
-        <p:txBody>
-          <a:bodyPr rtlCol="0" anchor="ctr" lIns="0" rIns="0" tIns="0" bIns="0" wrap="none"/>
-          <a:lstStyle/>
-          <a:p>
-            <a:pPr algn="ctr"/>
-            <a:r>
-              <a:rPr sz="1000" b="1">
-                <a:solidFill>
-                  <a:srgbClr val="FFFFFF"/>
-                </a:solidFill>
-                <a:latin typeface="Calibri"/>
-              </a:rPr>
-              <a:t>1</a:t>
-            </a:r>
-          </a:p>
-        </p:txBody>
-      </p:sp>
-      <p:sp>
-        <p:nvSpPr>
-          <p:cNvPr id="12" name="TextBox 11"/>
-          <p:cNvSpPr txBox="1"/>
-          <p:nvPr/>
-        </p:nvSpPr>
-        <p:spPr>
-          <a:xfrm>
-            <a:off x="8787384" y="1481328"/>
-            <a:ext cx="2962656" cy="169164"/>
-          </a:xfrm>
-          <a:prstGeom prst="rect">
-            <a:avLst/>
-          </a:prstGeom>
-          <a:noFill/>
-        </p:spPr>
-        <p:txBody>
-          <a:bodyPr wrap="square" anchor="t" lIns="0" rIns="0" tIns="0" bIns="0">
-            <a:spAutoFit/>
-          </a:bodyPr>
-          <a:lstStyle/>
-          <a:p>
-            <a:pPr algn="l">
-              <a:lnSpc>
-                <a:spcPct val="105000"/>
-              </a:lnSpc>
-            </a:pPr>
-            <a:r>
-              <a:rPr sz="1050" b="0">
-                <a:solidFill>
-                  <a:srgbClr val="1B2A33"/>
-                </a:solidFill>
-                <a:latin typeface="Calibri"/>
-              </a:rPr>
-              <a:t>No scope limit — every ticket</a:t>
-            </a:r>
-          </a:p>
-        </p:txBody>
-      </p:sp>
-      <p:sp>
-        <p:nvSpPr>
-          <p:cNvPr id="13" name="Rectangle 12"/>
-          <p:cNvSpPr/>
-          <p:nvPr/>
-        </p:nvSpPr>
-        <p:spPr>
-          <a:xfrm>
-            <a:off x="8458200" y="1869948"/>
             <a:ext cx="45720" cy="502920"/>
           </a:xfrm>
           <a:prstGeom prst="rect">
@@ -46021,13 +44446,13 @@
       </p:sp>
       <p:sp>
         <p:nvSpPr>
-          <p:cNvPr id="14" name="TextBox 13"/>
-          <p:cNvSpPr txBox="1"/>
-          <p:nvPr/>
-        </p:nvSpPr>
-        <p:spPr>
-          <a:xfrm>
-            <a:off x="8622792" y="1869948"/>
+          <p:cNvPr id="10" name="TextBox 9"/>
+          <p:cNvSpPr txBox="1"/>
+          <p:nvPr/>
+        </p:nvSpPr>
+        <p:spPr>
+          <a:xfrm>
+            <a:off x="8622792" y="1188720"/>
             <a:ext cx="3127248" cy="164592"/>
           </a:xfrm>
           <a:prstGeom prst="rect">
@@ -46060,13 +44485,13 @@
       </p:sp>
       <p:sp>
         <p:nvSpPr>
-          <p:cNvPr id="15" name="TextBox 14"/>
-          <p:cNvSpPr txBox="1"/>
-          <p:nvPr/>
-        </p:nvSpPr>
-        <p:spPr>
-          <a:xfrm>
-            <a:off x="8622792" y="2061972"/>
+          <p:cNvPr id="11" name="TextBox 10"/>
+          <p:cNvSpPr txBox="1"/>
+          <p:nvPr/>
+        </p:nvSpPr>
+        <p:spPr>
+          <a:xfrm>
+            <a:off x="8622792" y="1380744"/>
             <a:ext cx="3127248" cy="320040"/>
           </a:xfrm>
           <a:prstGeom prst="rect">
@@ -46099,14 +44524,14 @@
       </p:sp>
       <p:sp>
         <p:nvSpPr>
-          <p:cNvPr id="16" name="Rectangle 15"/>
+          <p:cNvPr id="12" name="Rectangle 11"/>
           <p:cNvSpPr/>
           <p:nvPr/>
         </p:nvSpPr>
         <p:spPr>
           <a:xfrm>
-            <a:off x="8458200" y="2574036"/>
-            <a:ext cx="45720" cy="662940"/>
+            <a:off x="8458200" y="1892808"/>
+            <a:ext cx="45720" cy="982980"/>
           </a:xfrm>
           <a:prstGeom prst="rect">
             <a:avLst/>
@@ -46143,13 +44568,13 @@
       </p:sp>
       <p:sp>
         <p:nvSpPr>
-          <p:cNvPr id="17" name="TextBox 16"/>
-          <p:cNvSpPr txBox="1"/>
-          <p:nvPr/>
-        </p:nvSpPr>
-        <p:spPr>
-          <a:xfrm>
-            <a:off x="8622792" y="2574036"/>
+          <p:cNvPr id="13" name="TextBox 12"/>
+          <p:cNvSpPr txBox="1"/>
+          <p:nvPr/>
+        </p:nvSpPr>
+        <p:spPr>
+          <a:xfrm>
+            <a:off x="8622792" y="1892808"/>
             <a:ext cx="3127248" cy="164592"/>
           </a:xfrm>
           <a:prstGeom prst="rect">
@@ -46182,14 +44607,14 @@
       </p:sp>
       <p:sp>
         <p:nvSpPr>
-          <p:cNvPr id="18" name="TextBox 17"/>
-          <p:cNvSpPr txBox="1"/>
-          <p:nvPr/>
-        </p:nvSpPr>
-        <p:spPr>
-          <a:xfrm>
-            <a:off x="8622792" y="2766060"/>
-            <a:ext cx="3127248" cy="480060"/>
+          <p:cNvPr id="14" name="TextBox 13"/>
+          <p:cNvSpPr txBox="1"/>
+          <p:nvPr/>
+        </p:nvSpPr>
+        <p:spPr>
+          <a:xfrm>
+            <a:off x="8622792" y="2084832"/>
+            <a:ext cx="3127248" cy="800100"/>
           </a:xfrm>
           <a:prstGeom prst="rect">
             <a:avLst/>
@@ -46214,20 +44639,20 @@
                 </a:solidFill>
                 <a:latin typeface="Calibri"/>
               </a:rPr>
-              <a:t>Internal notes are visible to an auditor. Write controls are not offered, and would be refused if called directly.</a:t>
-            </a:r>
-          </a:p>
-        </p:txBody>
-      </p:sp>
-      <p:sp>
-        <p:nvSpPr>
-          <p:cNvPr id="19" name="Rectangle 18"/>
+              <a:t>There is no scope limit — an auditor sees every ticket, not a subset. Internal notes are visible to them too. Write controls are not offered, and would be refused if called directly.</a:t>
+            </a:r>
+          </a:p>
+        </p:txBody>
+      </p:sp>
+      <p:sp>
+        <p:nvSpPr>
+          <p:cNvPr id="15" name="Rectangle 14"/>
           <p:cNvSpPr/>
           <p:nvPr/>
         </p:nvSpPr>
         <p:spPr>
           <a:xfrm>
-            <a:off x="8458200" y="3438144"/>
+            <a:off x="8458200" y="3076956"/>
             <a:ext cx="45720" cy="502920"/>
           </a:xfrm>
           <a:prstGeom prst="rect">
@@ -46265,13 +44690,13 @@
       </p:sp>
       <p:sp>
         <p:nvSpPr>
-          <p:cNvPr id="20" name="TextBox 19"/>
-          <p:cNvSpPr txBox="1"/>
-          <p:nvPr/>
-        </p:nvSpPr>
-        <p:spPr>
-          <a:xfrm>
-            <a:off x="8622792" y="3438144"/>
+          <p:cNvPr id="16" name="TextBox 15"/>
+          <p:cNvSpPr txBox="1"/>
+          <p:nvPr/>
+        </p:nvSpPr>
+        <p:spPr>
+          <a:xfrm>
+            <a:off x="8622792" y="3076956"/>
             <a:ext cx="3127248" cy="164592"/>
           </a:xfrm>
           <a:prstGeom prst="rect">
@@ -46304,13 +44729,13 @@
       </p:sp>
       <p:sp>
         <p:nvSpPr>
-          <p:cNvPr id="21" name="TextBox 20"/>
-          <p:cNvSpPr txBox="1"/>
-          <p:nvPr/>
-        </p:nvSpPr>
-        <p:spPr>
-          <a:xfrm>
-            <a:off x="8622792" y="3630168"/>
+          <p:cNvPr id="17" name="TextBox 16"/>
+          <p:cNvSpPr txBox="1"/>
+          <p:nvPr/>
+        </p:nvSpPr>
+        <p:spPr>
+          <a:xfrm>
+            <a:off x="8622792" y="3268980"/>
             <a:ext cx="3127248" cy="320040"/>
           </a:xfrm>
           <a:prstGeom prst="rect">
@@ -46343,7 +44768,7 @@
       </p:sp>
       <p:sp>
         <p:nvSpPr>
-          <p:cNvPr id="22" name="Rectangle 21"/>
+          <p:cNvPr id="18" name="Rectangle 17"/>
           <p:cNvSpPr/>
           <p:nvPr/>
         </p:nvSpPr>
@@ -46387,7 +44812,7 @@
       </p:sp>
       <p:sp>
         <p:nvSpPr>
-          <p:cNvPr id="23" name="TextBox 22"/>
+          <p:cNvPr id="19" name="TextBox 18"/>
           <p:cNvSpPr txBox="1"/>
           <p:nvPr/>
         </p:nvSpPr>
@@ -46426,7 +44851,7 @@
       </p:sp>
       <p:sp>
         <p:nvSpPr>
-          <p:cNvPr id="24" name="TextBox 23"/>
+          <p:cNvPr id="20" name="TextBox 19"/>
           <p:cNvSpPr txBox="1"/>
           <p:nvPr/>
         </p:nvSpPr>
@@ -59977,7 +58402,7 @@
                 </a:solidFill>
                 <a:latin typeface="Calibri"/>
               </a:rPr>
-              <a:t>This deck describes the application at commit 9fe8bc4. If a screen has changed, the deck is wrong and not the application — raise it so this can be recaptured.</a:t>
+              <a:t>This deck describes the application at commit 59ff422. If a screen has changed, the deck is wrong and not the application — raise it so this can be recaptured.</a:t>
             </a:r>
           </a:p>
           <a:p>

--- a/docs/sop/SUCCESS-Bank-Ticketing-SOP.pptx
+++ b/docs/sop/SUCCESS-Bank-Ticketing-SOP.pptx
@@ -4003,7 +4003,7 @@
                 </a:solidFill>
                 <a:latin typeface="Calibri"/>
               </a:rPr>
-              <a:t>Version 1.0  ·  Built at commit f9f9068</a:t>
+              <a:t>Version 1.0  ·  Built at commit 37f71d3</a:t>
             </a:r>
           </a:p>
         </p:txBody>
@@ -50113,7 +50113,7 @@
         <p:spPr>
           <a:xfrm>
             <a:off x="388620" y="1165860"/>
-            <a:ext cx="6958584" cy="4846320"/>
+            <a:ext cx="7726680" cy="4846320"/>
           </a:xfrm>
           <a:prstGeom prst="rect">
             <a:avLst/>
@@ -50165,7 +50165,7 @@
         <p:spPr>
           <a:xfrm>
             <a:off x="411480" y="1188720"/>
-            <a:ext cx="6912864" cy="4800600"/>
+            <a:ext cx="7680960" cy="4800600"/>
           </a:xfrm>
           <a:prstGeom prst="rect">
             <a:avLst/>
@@ -50180,7 +50180,7 @@
         </p:nvSpPr>
         <p:spPr>
           <a:xfrm>
-            <a:off x="1382649" y="3019805"/>
+            <a:off x="1527742" y="3035647"/>
             <a:ext cx="274320" cy="274320"/>
           </a:xfrm>
           <a:prstGeom prst="ellipse">
@@ -50239,7 +50239,7 @@
         </p:nvSpPr>
         <p:spPr>
           <a:xfrm>
-            <a:off x="1382649" y="3319843"/>
+            <a:off x="1527742" y="3369289"/>
             <a:ext cx="274320" cy="274320"/>
           </a:xfrm>
           <a:prstGeom prst="ellipse">
@@ -50298,7 +50298,7 @@
         </p:nvSpPr>
         <p:spPr>
           <a:xfrm>
-            <a:off x="1382649" y="3779740"/>
+            <a:off x="1527742" y="3880073"/>
             <a:ext cx="274320" cy="274320"/>
           </a:xfrm>
           <a:prstGeom prst="ellipse">
@@ -50357,7 +50357,7 @@
         </p:nvSpPr>
         <p:spPr>
           <a:xfrm>
-            <a:off x="1382649" y="4564639"/>
+            <a:off x="1527742" y="4751862"/>
             <a:ext cx="274320" cy="274320"/>
           </a:xfrm>
           <a:prstGeom prst="ellipse">
@@ -51567,7 +51567,7 @@
         <p:spPr>
           <a:xfrm>
             <a:off x="388620" y="1165860"/>
-            <a:ext cx="6958584" cy="4846320"/>
+            <a:ext cx="7726680" cy="4846320"/>
           </a:xfrm>
           <a:prstGeom prst="rect">
             <a:avLst/>
@@ -51619,7 +51619,7 @@
         <p:spPr>
           <a:xfrm>
             <a:off x="411480" y="1188720"/>
-            <a:ext cx="6912864" cy="4800600"/>
+            <a:ext cx="7680960" cy="4800600"/>
           </a:xfrm>
           <a:prstGeom prst="rect">
             <a:avLst/>
@@ -51634,7 +51634,7 @@
         </p:nvSpPr>
         <p:spPr>
           <a:xfrm>
-            <a:off x="1382649" y="3019805"/>
+            <a:off x="1527742" y="3035647"/>
             <a:ext cx="274320" cy="274320"/>
           </a:xfrm>
           <a:prstGeom prst="ellipse">
@@ -51693,7 +51693,7 @@
         </p:nvSpPr>
         <p:spPr>
           <a:xfrm>
-            <a:off x="1382649" y="3319843"/>
+            <a:off x="1527742" y="3369289"/>
             <a:ext cx="274320" cy="274320"/>
           </a:xfrm>
           <a:prstGeom prst="ellipse">
@@ -51752,7 +51752,7 @@
         </p:nvSpPr>
         <p:spPr>
           <a:xfrm>
-            <a:off x="1382649" y="3779740"/>
+            <a:off x="1527742" y="3880073"/>
             <a:ext cx="274320" cy="274320"/>
           </a:xfrm>
           <a:prstGeom prst="ellipse">
@@ -51811,7 +51811,7 @@
         </p:nvSpPr>
         <p:spPr>
           <a:xfrm>
-            <a:off x="1382649" y="4564639"/>
+            <a:off x="1527742" y="4751862"/>
             <a:ext cx="274320" cy="274320"/>
           </a:xfrm>
           <a:prstGeom prst="ellipse">
@@ -52668,7 +52668,7 @@
         <p:spPr>
           <a:xfrm>
             <a:off x="411480" y="6062472"/>
-            <a:ext cx="6912864" cy="374904"/>
+            <a:ext cx="7680960" cy="374904"/>
           </a:xfrm>
           <a:prstGeom prst="rect">
             <a:avLst/>
@@ -52712,7 +52712,7 @@
         <p:spPr>
           <a:xfrm>
             <a:off x="576072" y="6126480"/>
-            <a:ext cx="6583680" cy="265176"/>
+            <a:ext cx="7351776" cy="265176"/>
           </a:xfrm>
           <a:prstGeom prst="rect">
             <a:avLst/>
@@ -53104,7 +53104,7 @@
         <p:spPr>
           <a:xfrm>
             <a:off x="388620" y="1165860"/>
-            <a:ext cx="6958584" cy="4846320"/>
+            <a:ext cx="7726680" cy="4846320"/>
           </a:xfrm>
           <a:prstGeom prst="rect">
             <a:avLst/>
@@ -53156,7 +53156,7 @@
         <p:spPr>
           <a:xfrm>
             <a:off x="411480" y="1188720"/>
-            <a:ext cx="6912864" cy="4800600"/>
+            <a:ext cx="7680960" cy="4800600"/>
           </a:xfrm>
           <a:prstGeom prst="rect">
             <a:avLst/>
@@ -53171,7 +53171,7 @@
         </p:nvSpPr>
         <p:spPr>
           <a:xfrm>
-            <a:off x="1464220" y="3382251"/>
+            <a:off x="1618377" y="3438418"/>
             <a:ext cx="274320" cy="274320"/>
           </a:xfrm>
           <a:prstGeom prst="ellipse">
@@ -55321,7 +55321,7 @@
         <p:spPr>
           <a:xfrm>
             <a:off x="388620" y="1165860"/>
-            <a:ext cx="6958584" cy="4846320"/>
+            <a:ext cx="7726680" cy="4846320"/>
           </a:xfrm>
           <a:prstGeom prst="rect">
             <a:avLst/>
@@ -55373,7 +55373,7 @@
         <p:spPr>
           <a:xfrm>
             <a:off x="411480" y="1188720"/>
-            <a:ext cx="6912864" cy="4800600"/>
+            <a:ext cx="7680960" cy="4800600"/>
           </a:xfrm>
           <a:prstGeom prst="rect">
             <a:avLst/>
@@ -55388,7 +55388,7 @@
         </p:nvSpPr>
         <p:spPr>
           <a:xfrm>
-            <a:off x="2841954" y="3844069"/>
+            <a:off x="3149193" y="3621321"/>
             <a:ext cx="274320" cy="274320"/>
           </a:xfrm>
           <a:prstGeom prst="ellipse">
@@ -55447,7 +55447,7 @@
         </p:nvSpPr>
         <p:spPr>
           <a:xfrm>
-            <a:off x="5441882" y="3535870"/>
+            <a:off x="6038002" y="3278558"/>
             <a:ext cx="274320" cy="274320"/>
           </a:xfrm>
           <a:prstGeom prst="ellipse">
@@ -55506,7 +55506,7 @@
         </p:nvSpPr>
         <p:spPr>
           <a:xfrm>
-            <a:off x="1440025" y="4174350"/>
+            <a:off x="1591494" y="3988087"/>
             <a:ext cx="274320" cy="274320"/>
           </a:xfrm>
           <a:prstGeom prst="ellipse">
@@ -55565,7 +55565,7 @@
         </p:nvSpPr>
         <p:spPr>
           <a:xfrm>
-            <a:off x="2841954" y="5506516"/>
+            <a:off x="3149193" y="5468112"/>
             <a:ext cx="274320" cy="274320"/>
           </a:xfrm>
           <a:prstGeom prst="ellipse">
@@ -65913,7 +65913,7 @@
                 </a:solidFill>
                 <a:latin typeface="Calibri"/>
               </a:rPr>
-              <a:t>This deck describes the application at commit f9f9068. If a screen has changed, the deck is wrong and not the application — raise it so this can be recaptured.</a:t>
+              <a:t>This deck describes the application at commit 37f71d3. If a screen has changed, the deck is wrong and not the application — raise it so this can be recaptured.</a:t>
             </a:r>
           </a:p>
           <a:p>
